--- a/selfcafe-miraiya-deck/selfcafe-miraiya-deck.pptx
+++ b/selfcafe-miraiya-deck/selfcafe-miraiya-deck.pptx
@@ -15,9 +15,10 @@
     <p:sldId id="263" r:id="rId9"/>
     <p:sldId id="264" r:id="rId10"/>
     <p:sldId id="265" r:id="rId11"/>
+    <p:sldId id="266" r:id="rId12"/>
   </p:sldIdLst>
   <p:notesMasterIdLst>
-    <p:notesMasterId r:id="rId12"/>
+    <p:notesMasterId r:id="rId13"/>
   </p:notesMasterIdLst>
   <p:sldSz cx="12192000" cy="6858000"/>
   <p:notesSz cx="6858000" cy="12192000"/>
@@ -623,6 +624,94 @@
             <a:fld id="{F7021451-1387-4CA6-816F-3879F97B5CBC}" type="slidenum">
               <a:rPr lang="en-US"/>
               <a:t>10</a:t>
+            </a:fld>
+            <a:endParaRPr lang="en-US"/>
+          </a:p>
+        </p:txBody>
+      </p:sp>
+    </p:spTree>
+    <p:extLst>
+      <p:ext uri="{BB962C8B-B14F-4D97-AF65-F5344CB8AC3E}">
+        <p14:creationId xmlns:p14="http://schemas.microsoft.com/office/powerpoint/2010/main" val="1024086991"/>
+      </p:ext>
+    </p:extLst>
+  </p:cSld>
+  <p:clrMapOvr>
+    <a:masterClrMapping/>
+  </p:clrMapOvr>
+</p:notes>
+</file>
+
+<file path=ppt/notesSlides/notesSlide11.xml><?xml version="1.0" encoding="utf-8"?>
+<p:notes xmlns:a="http://schemas.openxmlformats.org/drawingml/2006/main" xmlns:r="http://schemas.openxmlformats.org/officeDocument/2006/relationships" xmlns:p="http://schemas.openxmlformats.org/presentationml/2006/main">
+  <p:cSld>
+    <p:spTree>
+      <p:nvGrpSpPr>
+        <p:cNvPr id="1" name=""/>
+        <p:cNvGrpSpPr/>
+        <p:nvPr/>
+      </p:nvGrpSpPr>
+      <p:grpSpPr>
+        <a:xfrm>
+          <a:off x="0" y="0"/>
+          <a:ext cx="0" cy="0"/>
+          <a:chOff x="0" y="0"/>
+          <a:chExt cx="0" cy="0"/>
+        </a:xfrm>
+      </p:grpSpPr>
+      <p:sp>
+        <p:nvSpPr>
+          <p:cNvPr id="2" name="Slide Image Placeholder 1"/>
+          <p:cNvSpPr>
+            <a:spLocks noGrp="1" noRot="1" noChangeAspect="1"/>
+          </p:cNvSpPr>
+          <p:nvPr>
+            <p:ph type="sldImg"/>
+          </p:nvPr>
+        </p:nvSpPr>
+        <p:spPr/>
+      </p:sp>
+      <p:sp>
+        <p:nvSpPr>
+          <p:cNvPr id="3" name="Notes Placeholder 2"/>
+          <p:cNvSpPr>
+            <a:spLocks noGrp="1"/>
+          </p:cNvSpPr>
+          <p:nvPr>
+            <p:ph type="body" idx="1"/>
+          </p:nvPr>
+        </p:nvSpPr>
+        <p:spPr/>
+        <p:txBody>
+          <a:bodyPr/>
+          <a:lstStyle/>
+          <a:p>
+            <a:r>
+              <a:rPr lang="en-US" dirty="0"/>
+              <a:t/>
+            </a:r>
+            <a:endParaRPr lang="en-US" dirty="0"/>
+          </a:p>
+        </p:txBody>
+      </p:sp>
+      <p:sp>
+        <p:nvSpPr>
+          <p:cNvPr id="4" name="Slide Number Placeholder 3"/>
+          <p:cNvSpPr>
+            <a:spLocks noGrp="1"/>
+          </p:cNvSpPr>
+          <p:nvPr>
+            <p:ph type="sldNum" sz="quarter" idx="10"/>
+          </p:nvPr>
+        </p:nvSpPr>
+        <p:spPr/>
+        <p:txBody>
+          <a:bodyPr/>
+          <a:lstStyle/>
+          <a:p>
+            <a:fld id="{F7021451-1387-4CA6-816F-3879F97B5CBC}" type="slidenum">
+              <a:rPr lang="en-US"/>
+              <a:t>11</a:t>
             </a:fld>
             <a:endParaRPr lang="en-US"/>
           </a:p>
@@ -2378,7 +2467,7 @@
                 <a:ea typeface="Yu Gothic" pitchFamily="34" charset="-122"/>
                 <a:cs typeface="Yu Gothic" pitchFamily="34" charset="-120"/>
               </a:rPr>
-              <a:t>   今後の進め方</a:t>
+              <a:t>   運営と導入条件</a:t>
             </a:r>
             <a:endParaRPr lang="en-US" sz="1050" dirty="0"/>
           </a:p>
@@ -2417,7 +2506,7 @@
                 <a:ea typeface="Yu Gothic" pitchFamily="34" charset="-122"/>
                 <a:cs typeface="Yu Gothic" pitchFamily="34" charset="-120"/>
               </a:rPr>
-              <a:t>現地確認から、最短2〜3ヶ月で切り替えできます。</a:t>
+              <a:t>お願いするのは1日15分の清掃と補充だけ。</a:t>
             </a:r>
             <a:endParaRPr lang="en-US" sz="2900" dirty="0"/>
           </a:p>
@@ -2456,7 +2545,7 @@
                 <a:ea typeface="Yu Gothic" pitchFamily="34" charset="-122"/>
                 <a:cs typeface="Yu Gothic" pitchFamily="34" charset="-120"/>
               </a:rPr>
-              <a:t>まずは2店舗の現地確認と、条件のすり合わせからお願いできればと存じます。</a:t>
+              <a:t>運営主体はセルフカフェ本部です。カフェ専任のスタッフを置く必要はありません。</a:t>
             </a:r>
             <a:endParaRPr lang="en-US" sz="1250" dirty="0"/>
           </a:p>
@@ -2559,6 +2648,1312 @@
                 <a:cs typeface="Arial" pitchFamily="34" charset="-120"/>
               </a:rPr>
               <a:t>10</a:t>
+            </a:r>
+            <a:endParaRPr lang="en-US" sz="1000" dirty="0"/>
+          </a:p>
+        </p:txBody>
+      </p:sp>
+      <p:sp>
+        <p:nvSpPr>
+          <p:cNvPr id="9" name="Shape 6"/>
+          <p:cNvSpPr/>
+          <p:nvPr/>
+        </p:nvSpPr>
+        <p:spPr>
+          <a:xfrm>
+            <a:off x="660197" y="1651406"/>
+            <a:ext cx="5943600" cy="749808"/>
+          </a:xfrm>
+          <a:prstGeom prst="roundRect">
+            <a:avLst>
+              <a:gd name="adj" fmla="val 7317"/>
+            </a:avLst>
+          </a:prstGeom>
+          <a:solidFill>
+            <a:srgbClr val="F1F8F3"/>
+          </a:solidFill>
+          <a:ln w="9525">
+            <a:solidFill>
+              <a:srgbClr val="D2E7DA"/>
+            </a:solidFill>
+            <a:prstDash val="solid"/>
+          </a:ln>
+        </p:spPr>
+      </p:sp>
+      <p:sp>
+        <p:nvSpPr>
+          <p:cNvPr id="10" name="Text 7"/>
+          <p:cNvSpPr/>
+          <p:nvPr/>
+        </p:nvSpPr>
+        <p:spPr>
+          <a:xfrm>
+            <a:off x="934517" y="1742846"/>
+            <a:ext cx="5394960" cy="256032"/>
+          </a:xfrm>
+          <a:prstGeom prst="rect">
+            <a:avLst/>
+          </a:prstGeom>
+          <a:noFill/>
+          <a:ln/>
+        </p:spPr>
+        <p:txBody>
+          <a:bodyPr wrap="square" lIns="0" tIns="0" rIns="0" bIns="0" rtlCol="0" anchor="ctr"/>
+          <a:lstStyle/>
+          <a:p>
+            <a:pPr indent="0" marL="0">
+              <a:buNone/>
+            </a:pPr>
+            <a:r>
+              <a:rPr lang="en-US" sz="1200" b="1" dirty="0">
+                <a:solidFill>
+                  <a:srgbClr val="106838"/>
+                </a:solidFill>
+                <a:latin typeface="Yu Gothic" pitchFamily="34" charset="0"/>
+                <a:ea typeface="Yu Gothic" pitchFamily="34" charset="-122"/>
+                <a:cs typeface="Yu Gothic" pitchFamily="34" charset="-120"/>
+              </a:rPr>
+              <a:t>① 店内清掃</a:t>
+            </a:r>
+            <a:endParaRPr lang="en-US" sz="1200" dirty="0"/>
+          </a:p>
+        </p:txBody>
+      </p:sp>
+      <p:sp>
+        <p:nvSpPr>
+          <p:cNvPr id="11" name="Text 8"/>
+          <p:cNvSpPr/>
+          <p:nvPr/>
+        </p:nvSpPr>
+        <p:spPr>
+          <a:xfrm>
+            <a:off x="934517" y="2017166"/>
+            <a:ext cx="5394960" cy="310896"/>
+          </a:xfrm>
+          <a:prstGeom prst="rect">
+            <a:avLst/>
+          </a:prstGeom>
+          <a:noFill/>
+          <a:ln/>
+        </p:spPr>
+        <p:txBody>
+          <a:bodyPr wrap="square" lIns="0" tIns="0" rIns="0" bIns="0" rtlCol="0" anchor="ctr"/>
+          <a:lstStyle/>
+          <a:p>
+            <a:pPr indent="0" marL="0">
+              <a:buNone/>
+            </a:pPr>
+            <a:r>
+              <a:rPr lang="en-US" sz="950" dirty="0">
+                <a:solidFill>
+                  <a:srgbClr val="4B5550"/>
+                </a:solidFill>
+                <a:latin typeface="Yu Gothic" pitchFamily="34" charset="0"/>
+                <a:ea typeface="Yu Gothic" pitchFamily="34" charset="-122"/>
+                <a:cs typeface="Yu Gothic" pitchFamily="34" charset="-120"/>
+              </a:rPr>
+              <a:t>テーブル・床・トイレの清掃、ゴミ回収。営業前後の都合の良い時間で結構です。</a:t>
+            </a:r>
+            <a:endParaRPr lang="en-US" sz="950" dirty="0"/>
+          </a:p>
+        </p:txBody>
+      </p:sp>
+      <p:sp>
+        <p:nvSpPr>
+          <p:cNvPr id="12" name="Shape 9"/>
+          <p:cNvSpPr/>
+          <p:nvPr/>
+        </p:nvSpPr>
+        <p:spPr>
+          <a:xfrm>
+            <a:off x="660197" y="2510942"/>
+            <a:ext cx="5943600" cy="749808"/>
+          </a:xfrm>
+          <a:prstGeom prst="roundRect">
+            <a:avLst>
+              <a:gd name="adj" fmla="val 7317"/>
+            </a:avLst>
+          </a:prstGeom>
+          <a:solidFill>
+            <a:srgbClr val="F1F8F3"/>
+          </a:solidFill>
+          <a:ln w="9525">
+            <a:solidFill>
+              <a:srgbClr val="D2E7DA"/>
+            </a:solidFill>
+            <a:prstDash val="solid"/>
+          </a:ln>
+        </p:spPr>
+      </p:sp>
+      <p:sp>
+        <p:nvSpPr>
+          <p:cNvPr id="13" name="Text 10"/>
+          <p:cNvSpPr/>
+          <p:nvPr/>
+        </p:nvSpPr>
+        <p:spPr>
+          <a:xfrm>
+            <a:off x="934517" y="2602382"/>
+            <a:ext cx="5394960" cy="256032"/>
+          </a:xfrm>
+          <a:prstGeom prst="rect">
+            <a:avLst/>
+          </a:prstGeom>
+          <a:noFill/>
+          <a:ln/>
+        </p:spPr>
+        <p:txBody>
+          <a:bodyPr wrap="square" lIns="0" tIns="0" rIns="0" bIns="0" rtlCol="0" anchor="ctr"/>
+          <a:lstStyle/>
+          <a:p>
+            <a:pPr indent="0" marL="0">
+              <a:buNone/>
+            </a:pPr>
+            <a:r>
+              <a:rPr lang="en-US" sz="1200" b="1" dirty="0">
+                <a:solidFill>
+                  <a:srgbClr val="106838"/>
+                </a:solidFill>
+                <a:latin typeface="Yu Gothic" pitchFamily="34" charset="0"/>
+                <a:ea typeface="Yu Gothic" pitchFamily="34" charset="-122"/>
+                <a:cs typeface="Yu Gothic" pitchFamily="34" charset="-120"/>
+              </a:rPr>
+              <a:t>② 原料・備品の補充</a:t>
+            </a:r>
+            <a:endParaRPr lang="en-US" sz="1200" dirty="0"/>
+          </a:p>
+        </p:txBody>
+      </p:sp>
+      <p:sp>
+        <p:nvSpPr>
+          <p:cNvPr id="14" name="Text 11"/>
+          <p:cNvSpPr/>
+          <p:nvPr/>
+        </p:nvSpPr>
+        <p:spPr>
+          <a:xfrm>
+            <a:off x="934517" y="2876702"/>
+            <a:ext cx="5394960" cy="310896"/>
+          </a:xfrm>
+          <a:prstGeom prst="rect">
+            <a:avLst/>
+          </a:prstGeom>
+          <a:noFill/>
+          <a:ln/>
+        </p:spPr>
+        <p:txBody>
+          <a:bodyPr wrap="square" lIns="0" tIns="0" rIns="0" bIns="0" rtlCol="0" anchor="ctr"/>
+          <a:lstStyle/>
+          <a:p>
+            <a:pPr indent="0" marL="0">
+              <a:buNone/>
+            </a:pPr>
+            <a:r>
+              <a:rPr lang="en-US" sz="950" dirty="0">
+                <a:solidFill>
+                  <a:srgbClr val="4B5550"/>
+                </a:solidFill>
+                <a:latin typeface="Yu Gothic" pitchFamily="34" charset="0"/>
+                <a:ea typeface="Yu Gothic" pitchFamily="34" charset="-122"/>
+                <a:cs typeface="Yu Gothic" pitchFamily="34" charset="-120"/>
+              </a:rPr>
+              <a:t>コーヒー豆・カップ等の補充。在庫は本部から定期配送します。</a:t>
+            </a:r>
+            <a:endParaRPr lang="en-US" sz="950" dirty="0"/>
+          </a:p>
+        </p:txBody>
+      </p:sp>
+      <p:sp>
+        <p:nvSpPr>
+          <p:cNvPr id="15" name="Shape 12"/>
+          <p:cNvSpPr/>
+          <p:nvPr/>
+        </p:nvSpPr>
+        <p:spPr>
+          <a:xfrm>
+            <a:off x="660197" y="3370478"/>
+            <a:ext cx="5943600" cy="749808"/>
+          </a:xfrm>
+          <a:prstGeom prst="roundRect">
+            <a:avLst>
+              <a:gd name="adj" fmla="val 7317"/>
+            </a:avLst>
+          </a:prstGeom>
+          <a:solidFill>
+            <a:srgbClr val="F1F8F3"/>
+          </a:solidFill>
+          <a:ln w="9525">
+            <a:solidFill>
+              <a:srgbClr val="D2E7DA"/>
+            </a:solidFill>
+            <a:prstDash val="solid"/>
+          </a:ln>
+        </p:spPr>
+      </p:sp>
+      <p:sp>
+        <p:nvSpPr>
+          <p:cNvPr id="16" name="Text 13"/>
+          <p:cNvSpPr/>
+          <p:nvPr/>
+        </p:nvSpPr>
+        <p:spPr>
+          <a:xfrm>
+            <a:off x="934517" y="3461918"/>
+            <a:ext cx="5394960" cy="256032"/>
+          </a:xfrm>
+          <a:prstGeom prst="rect">
+            <a:avLst/>
+          </a:prstGeom>
+          <a:noFill/>
+          <a:ln/>
+        </p:spPr>
+        <p:txBody>
+          <a:bodyPr wrap="square" lIns="0" tIns="0" rIns="0" bIns="0" rtlCol="0" anchor="ctr"/>
+          <a:lstStyle/>
+          <a:p>
+            <a:pPr indent="0" marL="0">
+              <a:buNone/>
+            </a:pPr>
+            <a:r>
+              <a:rPr lang="en-US" sz="1200" b="1" dirty="0">
+                <a:solidFill>
+                  <a:srgbClr val="106838"/>
+                </a:solidFill>
+                <a:latin typeface="Yu Gothic" pitchFamily="34" charset="0"/>
+                <a:ea typeface="Yu Gothic" pitchFamily="34" charset="-122"/>
+                <a:cs typeface="Yu Gothic" pitchFamily="34" charset="-120"/>
+              </a:rPr>
+              <a:t>③ 発注・棚卸（月1〜2回）</a:t>
+            </a:r>
+            <a:endParaRPr lang="en-US" sz="1200" dirty="0"/>
+          </a:p>
+        </p:txBody>
+      </p:sp>
+      <p:sp>
+        <p:nvSpPr>
+          <p:cNvPr id="17" name="Text 14"/>
+          <p:cNvSpPr/>
+          <p:nvPr/>
+        </p:nvSpPr>
+        <p:spPr>
+          <a:xfrm>
+            <a:off x="934517" y="3736238"/>
+            <a:ext cx="5394960" cy="310896"/>
+          </a:xfrm>
+          <a:prstGeom prst="rect">
+            <a:avLst/>
+          </a:prstGeom>
+          <a:noFill/>
+          <a:ln/>
+        </p:spPr>
+        <p:txBody>
+          <a:bodyPr wrap="square" lIns="0" tIns="0" rIns="0" bIns="0" rtlCol="0" anchor="ctr"/>
+          <a:lstStyle/>
+          <a:p>
+            <a:pPr indent="0" marL="0">
+              <a:buNone/>
+            </a:pPr>
+            <a:r>
+              <a:rPr lang="en-US" sz="950" dirty="0">
+                <a:solidFill>
+                  <a:srgbClr val="4B5550"/>
+                </a:solidFill>
+                <a:latin typeface="Yu Gothic" pitchFamily="34" charset="0"/>
+                <a:ea typeface="Yu Gothic" pitchFamily="34" charset="-122"/>
+                <a:cs typeface="Yu Gothic" pitchFamily="34" charset="-120"/>
+              </a:rPr>
+              <a:t>定期配送に合わせた発注と在庫の棚卸のみです。</a:t>
+            </a:r>
+            <a:endParaRPr lang="en-US" sz="950" dirty="0"/>
+          </a:p>
+        </p:txBody>
+      </p:sp>
+      <p:sp>
+        <p:nvSpPr>
+          <p:cNvPr id="18" name="Shape 15"/>
+          <p:cNvSpPr/>
+          <p:nvPr/>
+        </p:nvSpPr>
+        <p:spPr>
+          <a:xfrm>
+            <a:off x="660197" y="4303166"/>
+            <a:ext cx="5943600" cy="822960"/>
+          </a:xfrm>
+          <a:prstGeom prst="roundRect">
+            <a:avLst>
+              <a:gd name="adj" fmla="val 6667"/>
+            </a:avLst>
+          </a:prstGeom>
+          <a:solidFill>
+            <a:srgbClr val="0C5230"/>
+          </a:solidFill>
+          <a:ln/>
+        </p:spPr>
+      </p:sp>
+      <p:pic>
+        <p:nvPicPr>
+          <p:cNvPr id="19" name="Image 1" descr="/home/user/suzuki-ceo/selfcafe-miraiya-deck/assets/icons/LuLifeBuoy-pale.png">    </p:cNvPr>
+          <p:cNvPicPr>
+            <a:picLocks noChangeAspect="1"/>
+          </p:cNvPicPr>
+          <p:nvPr/>
+        </p:nvPicPr>
+        <p:blipFill>
+          <a:blip r:embed="rId2"/>
+          <a:stretch>
+            <a:fillRect/>
+          </a:stretch>
+        </p:blipFill>
+        <p:spPr>
+          <a:xfrm>
+            <a:off x="934517" y="4540910"/>
+            <a:ext cx="329184" cy="329184"/>
+          </a:xfrm>
+          <a:prstGeom prst="rect">
+            <a:avLst/>
+          </a:prstGeom>
+        </p:spPr>
+      </p:pic>
+      <p:sp>
+        <p:nvSpPr>
+          <p:cNvPr id="20" name="Text 16"/>
+          <p:cNvSpPr/>
+          <p:nvPr/>
+        </p:nvSpPr>
+        <p:spPr>
+          <a:xfrm>
+            <a:off x="1410005" y="4303166"/>
+            <a:ext cx="4919472" cy="822960"/>
+          </a:xfrm>
+          <a:prstGeom prst="rect">
+            <a:avLst/>
+          </a:prstGeom>
+          <a:noFill/>
+          <a:ln/>
+        </p:spPr>
+        <p:txBody>
+          <a:bodyPr wrap="square" lIns="0" tIns="0" rIns="0" bIns="0" rtlCol="0" anchor="ctr"/>
+          <a:lstStyle/>
+          <a:p>
+            <a:pPr indent="0" marL="0">
+              <a:lnSpc>
+                <a:spcPct val="130000"/>
+              </a:lnSpc>
+              <a:buNone/>
+            </a:pPr>
+            <a:r>
+              <a:rPr lang="en-US" sz="1000" b="1" dirty="0">
+                <a:solidFill>
+                  <a:srgbClr val="FFFFFF"/>
+                </a:solidFill>
+                <a:latin typeface="Yu Gothic" pitchFamily="34" charset="0"/>
+                <a:ea typeface="Yu Gothic" pitchFamily="34" charset="-122"/>
+                <a:cs typeface="Yu Gothic" pitchFamily="34" charset="-120"/>
+              </a:rPr>
+              <a:t>清掃はパートナーへの委託も可能です（月3万円程度）。お客様からのお問い合わせは本部が対応します。</a:t>
+            </a:r>
+            <a:endParaRPr lang="en-US" sz="1000" dirty="0"/>
+          </a:p>
+        </p:txBody>
+      </p:sp>
+      <p:sp>
+        <p:nvSpPr>
+          <p:cNvPr id="21" name="Shape 17"/>
+          <p:cNvSpPr/>
+          <p:nvPr/>
+        </p:nvSpPr>
+        <p:spPr>
+          <a:xfrm>
+            <a:off x="6987845" y="1651406"/>
+            <a:ext cx="4543654" cy="3474720"/>
+          </a:xfrm>
+          <a:prstGeom prst="roundRect">
+            <a:avLst>
+              <a:gd name="adj" fmla="val 1579"/>
+            </a:avLst>
+          </a:prstGeom>
+          <a:solidFill>
+            <a:srgbClr val="FFFFFF"/>
+          </a:solidFill>
+          <a:ln w="9525">
+            <a:solidFill>
+              <a:srgbClr val="EFEAE0"/>
+            </a:solidFill>
+            <a:prstDash val="solid"/>
+          </a:ln>
+        </p:spPr>
+      </p:sp>
+      <p:sp>
+        <p:nvSpPr>
+          <p:cNvPr id="22" name="Text 18"/>
+          <p:cNvSpPr/>
+          <p:nvPr/>
+        </p:nvSpPr>
+        <p:spPr>
+          <a:xfrm>
+            <a:off x="7262165" y="1870862"/>
+            <a:ext cx="2194560" cy="164592"/>
+          </a:xfrm>
+          <a:prstGeom prst="rect">
+            <a:avLst/>
+          </a:prstGeom>
+          <a:noFill/>
+          <a:ln/>
+        </p:spPr>
+        <p:txBody>
+          <a:bodyPr wrap="square" lIns="0" tIns="0" rIns="0" bIns="0" rtlCol="0" anchor="ctr"/>
+          <a:lstStyle/>
+          <a:p>
+            <a:pPr indent="0" marL="0">
+              <a:buNone/>
+            </a:pPr>
+            <a:r>
+              <a:rPr lang="en-US" sz="900" b="1" spc="150" kern="0" dirty="0">
+                <a:solidFill>
+                  <a:srgbClr val="A8761F"/>
+                </a:solidFill>
+                <a:latin typeface="Arial" pitchFamily="34" charset="0"/>
+                <a:ea typeface="Arial" pitchFamily="34" charset="-122"/>
+                <a:cs typeface="Arial" pitchFamily="34" charset="-120"/>
+              </a:rPr>
+              <a:t>CONDITIONS</a:t>
+            </a:r>
+            <a:endParaRPr lang="en-US" sz="900" dirty="0"/>
+          </a:p>
+        </p:txBody>
+      </p:sp>
+      <p:sp>
+        <p:nvSpPr>
+          <p:cNvPr id="23" name="Text 19"/>
+          <p:cNvSpPr/>
+          <p:nvPr/>
+        </p:nvSpPr>
+        <p:spPr>
+          <a:xfrm>
+            <a:off x="7262165" y="2181758"/>
+            <a:ext cx="3995014" cy="219456"/>
+          </a:xfrm>
+          <a:prstGeom prst="rect">
+            <a:avLst/>
+          </a:prstGeom>
+          <a:noFill/>
+          <a:ln/>
+        </p:spPr>
+        <p:txBody>
+          <a:bodyPr wrap="square" lIns="0" tIns="0" rIns="0" bIns="0" rtlCol="0" anchor="ctr"/>
+          <a:lstStyle/>
+          <a:p>
+            <a:pPr indent="0" marL="0">
+              <a:buNone/>
+            </a:pPr>
+            <a:r>
+              <a:rPr lang="en-US" sz="950" dirty="0">
+                <a:solidFill>
+                  <a:srgbClr val="7E8882"/>
+                </a:solidFill>
+                <a:latin typeface="Yu Gothic" pitchFamily="34" charset="0"/>
+                <a:ea typeface="Yu Gothic" pitchFamily="34" charset="-122"/>
+                <a:cs typeface="Yu Gothic" pitchFamily="34" charset="-120"/>
+              </a:rPr>
+              <a:t>初期費用</a:t>
+            </a:r>
+            <a:endParaRPr lang="en-US" sz="950" dirty="0"/>
+          </a:p>
+        </p:txBody>
+      </p:sp>
+      <p:sp>
+        <p:nvSpPr>
+          <p:cNvPr id="24" name="Text 20"/>
+          <p:cNvSpPr/>
+          <p:nvPr/>
+        </p:nvSpPr>
+        <p:spPr>
+          <a:xfrm>
+            <a:off x="7262165" y="2382926"/>
+            <a:ext cx="3995014" cy="274320"/>
+          </a:xfrm>
+          <a:prstGeom prst="rect">
+            <a:avLst/>
+          </a:prstGeom>
+          <a:noFill/>
+          <a:ln/>
+        </p:spPr>
+        <p:txBody>
+          <a:bodyPr wrap="square" lIns="0" tIns="0" rIns="0" bIns="0" rtlCol="0" anchor="ctr"/>
+          <a:lstStyle/>
+          <a:p>
+            <a:pPr indent="0" marL="0">
+              <a:buNone/>
+            </a:pPr>
+            <a:r>
+              <a:rPr lang="en-US" sz="1150" b="1" dirty="0">
+                <a:solidFill>
+                  <a:srgbClr val="0A3D23"/>
+                </a:solidFill>
+                <a:latin typeface="Yu Gothic" pitchFamily="34" charset="0"/>
+                <a:ea typeface="Yu Gothic" pitchFamily="34" charset="-122"/>
+                <a:cs typeface="Yu Gothic" pitchFamily="34" charset="-120"/>
+              </a:rPr>
+              <a:t>30万〜50万円程度（機器設置費のみ）</a:t>
+            </a:r>
+            <a:endParaRPr lang="en-US" sz="1150" dirty="0"/>
+          </a:p>
+        </p:txBody>
+      </p:sp>
+      <p:sp>
+        <p:nvSpPr>
+          <p:cNvPr id="25" name="Shape 21"/>
+          <p:cNvSpPr/>
+          <p:nvPr/>
+        </p:nvSpPr>
+        <p:spPr>
+          <a:xfrm>
+            <a:off x="7262165" y="2675534"/>
+            <a:ext cx="3995014" cy="10058"/>
+          </a:xfrm>
+          <a:prstGeom prst="rect">
+            <a:avLst/>
+          </a:prstGeom>
+          <a:solidFill>
+            <a:srgbClr val="EFEAE0"/>
+          </a:solidFill>
+          <a:ln/>
+        </p:spPr>
+      </p:sp>
+      <p:sp>
+        <p:nvSpPr>
+          <p:cNvPr id="26" name="Text 22"/>
+          <p:cNvSpPr/>
+          <p:nvPr/>
+        </p:nvSpPr>
+        <p:spPr>
+          <a:xfrm>
+            <a:off x="7262165" y="2748686"/>
+            <a:ext cx="3995014" cy="219456"/>
+          </a:xfrm>
+          <a:prstGeom prst="rect">
+            <a:avLst/>
+          </a:prstGeom>
+          <a:noFill/>
+          <a:ln/>
+        </p:spPr>
+        <p:txBody>
+          <a:bodyPr wrap="square" lIns="0" tIns="0" rIns="0" bIns="0" rtlCol="0" anchor="ctr"/>
+          <a:lstStyle/>
+          <a:p>
+            <a:pPr indent="0" marL="0">
+              <a:buNone/>
+            </a:pPr>
+            <a:r>
+              <a:rPr lang="en-US" sz="950" dirty="0">
+                <a:solidFill>
+                  <a:srgbClr val="7E8882"/>
+                </a:solidFill>
+                <a:latin typeface="Yu Gothic" pitchFamily="34" charset="0"/>
+                <a:ea typeface="Yu Gothic" pitchFamily="34" charset="-122"/>
+                <a:cs typeface="Yu Gothic" pitchFamily="34" charset="-120"/>
+              </a:rPr>
+              <a:t>加盟金・研修費</a:t>
+            </a:r>
+            <a:endParaRPr lang="en-US" sz="950" dirty="0"/>
+          </a:p>
+        </p:txBody>
+      </p:sp>
+      <p:sp>
+        <p:nvSpPr>
+          <p:cNvPr id="27" name="Text 23"/>
+          <p:cNvSpPr/>
+          <p:nvPr/>
+        </p:nvSpPr>
+        <p:spPr>
+          <a:xfrm>
+            <a:off x="7262165" y="2949854"/>
+            <a:ext cx="3995014" cy="274320"/>
+          </a:xfrm>
+          <a:prstGeom prst="rect">
+            <a:avLst/>
+          </a:prstGeom>
+          <a:noFill/>
+          <a:ln/>
+        </p:spPr>
+        <p:txBody>
+          <a:bodyPr wrap="square" lIns="0" tIns="0" rIns="0" bIns="0" rtlCol="0" anchor="ctr"/>
+          <a:lstStyle/>
+          <a:p>
+            <a:pPr indent="0" marL="0">
+              <a:buNone/>
+            </a:pPr>
+            <a:r>
+              <a:rPr lang="en-US" sz="1150" b="1" dirty="0">
+                <a:solidFill>
+                  <a:srgbClr val="0A3D23"/>
+                </a:solidFill>
+                <a:latin typeface="Yu Gothic" pitchFamily="34" charset="0"/>
+                <a:ea typeface="Yu Gothic" pitchFamily="34" charset="-122"/>
+                <a:cs typeface="Yu Gothic" pitchFamily="34" charset="-120"/>
+              </a:rPr>
+              <a:t>なし</a:t>
+            </a:r>
+            <a:endParaRPr lang="en-US" sz="1150" dirty="0"/>
+          </a:p>
+        </p:txBody>
+      </p:sp>
+      <p:sp>
+        <p:nvSpPr>
+          <p:cNvPr id="28" name="Shape 24"/>
+          <p:cNvSpPr/>
+          <p:nvPr/>
+        </p:nvSpPr>
+        <p:spPr>
+          <a:xfrm>
+            <a:off x="7262165" y="3242462"/>
+            <a:ext cx="3995014" cy="10058"/>
+          </a:xfrm>
+          <a:prstGeom prst="rect">
+            <a:avLst/>
+          </a:prstGeom>
+          <a:solidFill>
+            <a:srgbClr val="EFEAE0"/>
+          </a:solidFill>
+          <a:ln/>
+        </p:spPr>
+      </p:sp>
+      <p:sp>
+        <p:nvSpPr>
+          <p:cNvPr id="29" name="Text 25"/>
+          <p:cNvSpPr/>
+          <p:nvPr/>
+        </p:nvSpPr>
+        <p:spPr>
+          <a:xfrm>
+            <a:off x="7262165" y="3315614"/>
+            <a:ext cx="3995014" cy="219456"/>
+          </a:xfrm>
+          <a:prstGeom prst="rect">
+            <a:avLst/>
+          </a:prstGeom>
+          <a:noFill/>
+          <a:ln/>
+        </p:spPr>
+        <p:txBody>
+          <a:bodyPr wrap="square" lIns="0" tIns="0" rIns="0" bIns="0" rtlCol="0" anchor="ctr"/>
+          <a:lstStyle/>
+          <a:p>
+            <a:pPr indent="0" marL="0">
+              <a:buNone/>
+            </a:pPr>
+            <a:r>
+              <a:rPr lang="en-US" sz="950" dirty="0">
+                <a:solidFill>
+                  <a:srgbClr val="7E8882"/>
+                </a:solidFill>
+                <a:latin typeface="Yu Gothic" pitchFamily="34" charset="0"/>
+                <a:ea typeface="Yu Gothic" pitchFamily="34" charset="-122"/>
+                <a:cs typeface="Yu Gothic" pitchFamily="34" charset="-120"/>
+              </a:rPr>
+              <a:t>原料・水道光熱費</a:t>
+            </a:r>
+            <a:endParaRPr lang="en-US" sz="950" dirty="0"/>
+          </a:p>
+        </p:txBody>
+      </p:sp>
+      <p:sp>
+        <p:nvSpPr>
+          <p:cNvPr id="30" name="Text 26"/>
+          <p:cNvSpPr/>
+          <p:nvPr/>
+        </p:nvSpPr>
+        <p:spPr>
+          <a:xfrm>
+            <a:off x="7262165" y="3516782"/>
+            <a:ext cx="3995014" cy="274320"/>
+          </a:xfrm>
+          <a:prstGeom prst="rect">
+            <a:avLst/>
+          </a:prstGeom>
+          <a:noFill/>
+          <a:ln/>
+        </p:spPr>
+        <p:txBody>
+          <a:bodyPr wrap="square" lIns="0" tIns="0" rIns="0" bIns="0" rtlCol="0" anchor="ctr"/>
+          <a:lstStyle/>
+          <a:p>
+            <a:pPr indent="0" marL="0">
+              <a:buNone/>
+            </a:pPr>
+            <a:r>
+              <a:rPr lang="en-US" sz="1150" b="1" dirty="0">
+                <a:solidFill>
+                  <a:srgbClr val="0A3D23"/>
+                </a:solidFill>
+                <a:latin typeface="Yu Gothic" pitchFamily="34" charset="0"/>
+                <a:ea typeface="Yu Gothic" pitchFamily="34" charset="-122"/>
+                <a:cs typeface="Yu Gothic" pitchFamily="34" charset="-120"/>
+              </a:rPr>
+              <a:t>本部負担</a:t>
+            </a:r>
+            <a:endParaRPr lang="en-US" sz="1150" dirty="0"/>
+          </a:p>
+        </p:txBody>
+      </p:sp>
+      <p:sp>
+        <p:nvSpPr>
+          <p:cNvPr id="31" name="Shape 27"/>
+          <p:cNvSpPr/>
+          <p:nvPr/>
+        </p:nvSpPr>
+        <p:spPr>
+          <a:xfrm>
+            <a:off x="7262165" y="3809390"/>
+            <a:ext cx="3995014" cy="10058"/>
+          </a:xfrm>
+          <a:prstGeom prst="rect">
+            <a:avLst/>
+          </a:prstGeom>
+          <a:solidFill>
+            <a:srgbClr val="EFEAE0"/>
+          </a:solidFill>
+          <a:ln/>
+        </p:spPr>
+      </p:sp>
+      <p:sp>
+        <p:nvSpPr>
+          <p:cNvPr id="32" name="Text 28"/>
+          <p:cNvSpPr/>
+          <p:nvPr/>
+        </p:nvSpPr>
+        <p:spPr>
+          <a:xfrm>
+            <a:off x="7262165" y="3882542"/>
+            <a:ext cx="3995014" cy="219456"/>
+          </a:xfrm>
+          <a:prstGeom prst="rect">
+            <a:avLst/>
+          </a:prstGeom>
+          <a:noFill/>
+          <a:ln/>
+        </p:spPr>
+        <p:txBody>
+          <a:bodyPr wrap="square" lIns="0" tIns="0" rIns="0" bIns="0" rtlCol="0" anchor="ctr"/>
+          <a:lstStyle/>
+          <a:p>
+            <a:pPr indent="0" marL="0">
+              <a:buNone/>
+            </a:pPr>
+            <a:r>
+              <a:rPr lang="en-US" sz="950" dirty="0">
+                <a:solidFill>
+                  <a:srgbClr val="7E8882"/>
+                </a:solidFill>
+                <a:latin typeface="Yu Gothic" pitchFamily="34" charset="0"/>
+                <a:ea typeface="Yu Gothic" pitchFamily="34" charset="-122"/>
+                <a:cs typeface="Yu Gothic" pitchFamily="34" charset="-120"/>
+              </a:rPr>
+              <a:t>お支払い</a:t>
+            </a:r>
+            <a:endParaRPr lang="en-US" sz="950" dirty="0"/>
+          </a:p>
+        </p:txBody>
+      </p:sp>
+      <p:sp>
+        <p:nvSpPr>
+          <p:cNvPr id="33" name="Text 29"/>
+          <p:cNvSpPr/>
+          <p:nvPr/>
+        </p:nvSpPr>
+        <p:spPr>
+          <a:xfrm>
+            <a:off x="7262165" y="4083710"/>
+            <a:ext cx="3995014" cy="274320"/>
+          </a:xfrm>
+          <a:prstGeom prst="rect">
+            <a:avLst/>
+          </a:prstGeom>
+          <a:noFill/>
+          <a:ln/>
+        </p:spPr>
+        <p:txBody>
+          <a:bodyPr wrap="square" lIns="0" tIns="0" rIns="0" bIns="0" rtlCol="0" anchor="ctr"/>
+          <a:lstStyle/>
+          <a:p>
+            <a:pPr indent="0" marL="0">
+              <a:buNone/>
+            </a:pPr>
+            <a:r>
+              <a:rPr lang="en-US" sz="1150" b="1" dirty="0">
+                <a:solidFill>
+                  <a:srgbClr val="0A3D23"/>
+                </a:solidFill>
+                <a:latin typeface="Yu Gothic" pitchFamily="34" charset="0"/>
+                <a:ea typeface="Yu Gothic" pitchFamily="34" charset="-122"/>
+                <a:cs typeface="Yu Gothic" pitchFamily="34" charset="-120"/>
+              </a:rPr>
+              <a:t>セルフカフェ売上の25％ ＋ 月額5万円</a:t>
+            </a:r>
+            <a:endParaRPr lang="en-US" sz="1150" dirty="0"/>
+          </a:p>
+        </p:txBody>
+      </p:sp>
+      <p:sp>
+        <p:nvSpPr>
+          <p:cNvPr id="34" name="Shape 30"/>
+          <p:cNvSpPr/>
+          <p:nvPr/>
+        </p:nvSpPr>
+        <p:spPr>
+          <a:xfrm>
+            <a:off x="7262165" y="4376318"/>
+            <a:ext cx="3995014" cy="10058"/>
+          </a:xfrm>
+          <a:prstGeom prst="rect">
+            <a:avLst/>
+          </a:prstGeom>
+          <a:solidFill>
+            <a:srgbClr val="EFEAE0"/>
+          </a:solidFill>
+          <a:ln/>
+        </p:spPr>
+      </p:sp>
+      <p:sp>
+        <p:nvSpPr>
+          <p:cNvPr id="35" name="Text 31"/>
+          <p:cNvSpPr/>
+          <p:nvPr/>
+        </p:nvSpPr>
+        <p:spPr>
+          <a:xfrm>
+            <a:off x="7262165" y="4449470"/>
+            <a:ext cx="3995014" cy="219456"/>
+          </a:xfrm>
+          <a:prstGeom prst="rect">
+            <a:avLst/>
+          </a:prstGeom>
+          <a:noFill/>
+          <a:ln/>
+        </p:spPr>
+        <p:txBody>
+          <a:bodyPr wrap="square" lIns="0" tIns="0" rIns="0" bIns="0" rtlCol="0" anchor="ctr"/>
+          <a:lstStyle/>
+          <a:p>
+            <a:pPr indent="0" marL="0">
+              <a:buNone/>
+            </a:pPr>
+            <a:r>
+              <a:rPr lang="en-US" sz="950" dirty="0">
+                <a:solidFill>
+                  <a:srgbClr val="7E8882"/>
+                </a:solidFill>
+                <a:latin typeface="Yu Gothic" pitchFamily="34" charset="0"/>
+                <a:ea typeface="Yu Gothic" pitchFamily="34" charset="-122"/>
+                <a:cs typeface="Yu Gothic" pitchFamily="34" charset="-120"/>
+              </a:rPr>
+              <a:t>契約期間</a:t>
+            </a:r>
+            <a:endParaRPr lang="en-US" sz="950" dirty="0"/>
+          </a:p>
+        </p:txBody>
+      </p:sp>
+      <p:sp>
+        <p:nvSpPr>
+          <p:cNvPr id="36" name="Text 32"/>
+          <p:cNvSpPr/>
+          <p:nvPr/>
+        </p:nvSpPr>
+        <p:spPr>
+          <a:xfrm>
+            <a:off x="7262165" y="4650638"/>
+            <a:ext cx="3995014" cy="274320"/>
+          </a:xfrm>
+          <a:prstGeom prst="rect">
+            <a:avLst/>
+          </a:prstGeom>
+          <a:noFill/>
+          <a:ln/>
+        </p:spPr>
+        <p:txBody>
+          <a:bodyPr wrap="square" lIns="0" tIns="0" rIns="0" bIns="0" rtlCol="0" anchor="ctr"/>
+          <a:lstStyle/>
+          <a:p>
+            <a:pPr indent="0" marL="0">
+              <a:buNone/>
+            </a:pPr>
+            <a:r>
+              <a:rPr lang="en-US" sz="1150" b="1" dirty="0">
+                <a:solidFill>
+                  <a:srgbClr val="0A3D23"/>
+                </a:solidFill>
+                <a:latin typeface="Yu Gothic" pitchFamily="34" charset="0"/>
+                <a:ea typeface="Yu Gothic" pitchFamily="34" charset="-122"/>
+                <a:cs typeface="Yu Gothic" pitchFamily="34" charset="-120"/>
+              </a:rPr>
+              <a:t>最低3年〜（本部審査あり）</a:t>
+            </a:r>
+            <a:endParaRPr lang="en-US" sz="1150" dirty="0"/>
+          </a:p>
+        </p:txBody>
+      </p:sp>
+      <p:pic>
+        <p:nvPicPr>
+          <p:cNvPr id="37" name="Image 2" descr="/home/user/suzuki-ceo/selfcafe-miraiya-deck/assets/photos/.crops/p24-install-1189x96.jpg">    </p:cNvPr>
+          <p:cNvPicPr>
+            <a:picLocks noChangeAspect="1"/>
+          </p:cNvPicPr>
+          <p:nvPr/>
+        </p:nvPicPr>
+        <p:blipFill>
+          <a:blip r:embed="rId3"/>
+          <a:stretch>
+            <a:fillRect/>
+          </a:stretch>
+        </p:blipFill>
+        <p:spPr>
+          <a:xfrm>
+            <a:off x="660197" y="5272430"/>
+            <a:ext cx="10871302" cy="877824"/>
+          </a:xfrm>
+          <a:prstGeom prst="rect">
+            <a:avLst/>
+          </a:prstGeom>
+        </p:spPr>
+      </p:pic>
+      <p:sp>
+        <p:nvSpPr>
+          <p:cNvPr id="38" name="Shape 33"/>
+          <p:cNvSpPr/>
+          <p:nvPr/>
+        </p:nvSpPr>
+        <p:spPr>
+          <a:xfrm>
+            <a:off x="660197" y="5272430"/>
+            <a:ext cx="10871302" cy="877824"/>
+          </a:xfrm>
+          <a:prstGeom prst="rect">
+            <a:avLst/>
+          </a:prstGeom>
+          <a:ln w="12700">
+            <a:solidFill>
+              <a:srgbClr val="D8D2C6"/>
+            </a:solidFill>
+            <a:prstDash val="solid"/>
+          </a:ln>
+        </p:spPr>
+      </p:sp>
+      <p:sp>
+        <p:nvSpPr>
+          <p:cNvPr id="39" name="Text 34"/>
+          <p:cNvSpPr/>
+          <p:nvPr/>
+        </p:nvSpPr>
+        <p:spPr>
+          <a:xfrm>
+            <a:off x="660197" y="6345936"/>
+            <a:ext cx="10871302" cy="182880"/>
+          </a:xfrm>
+          <a:prstGeom prst="rect">
+            <a:avLst/>
+          </a:prstGeom>
+          <a:noFill/>
+          <a:ln/>
+        </p:spPr>
+        <p:txBody>
+          <a:bodyPr wrap="square" lIns="0" tIns="0" rIns="0" bIns="0" rtlCol="0" anchor="ctr"/>
+          <a:lstStyle/>
+          <a:p>
+            <a:pPr indent="0" marL="0">
+              <a:buNone/>
+            </a:pPr>
+            <a:r>
+              <a:rPr lang="en-US" sz="850" dirty="0">
+                <a:solidFill>
+                  <a:srgbClr val="A8B0AA"/>
+                </a:solidFill>
+                <a:latin typeface="Yu Gothic" pitchFamily="34" charset="0"/>
+                <a:ea typeface="Yu Gothic" pitchFamily="34" charset="-122"/>
+                <a:cs typeface="Yu Gothic" pitchFamily="34" charset="-120"/>
+              </a:rPr>
+              <a:t>※ 既存什器の再利用可否・工事範囲は現地確認のうえ個別にご相談させてください。金額は税抜・目安です。</a:t>
+            </a:r>
+            <a:endParaRPr lang="en-US" sz="850" dirty="0"/>
+          </a:p>
+        </p:txBody>
+      </p:sp>
+    </p:spTree>
+  </p:cSld>
+  <p:clrMapOvr>
+    <a:masterClrMapping/>
+  </p:clrMapOvr>
+</p:sld>
+</file>
+
+<file path=ppt/slides/slide11.xml><?xml version="1.0" encoding="utf-8"?>
+<p:sld xmlns:a="http://schemas.openxmlformats.org/drawingml/2006/main" xmlns:r="http://schemas.openxmlformats.org/officeDocument/2006/relationships" xmlns:p="http://schemas.openxmlformats.org/presentationml/2006/main">
+  <p:cSld name="Slide 11">
+    <p:bg>
+      <p:bgPr>
+        <a:solidFill>
+          <a:srgbClr val="FFFDF7"/>
+        </a:solidFill>
+      </p:bgPr>
+    </p:bg>
+    <p:spTree>
+      <p:nvGrpSpPr>
+        <p:cNvPr id="1" name=""/>
+        <p:cNvGrpSpPr/>
+        <p:nvPr/>
+      </p:nvGrpSpPr>
+      <p:grpSpPr>
+        <a:xfrm>
+          <a:off x="0" y="0"/>
+          <a:ext cx="0" cy="0"/>
+          <a:chOff x="0" y="0"/>
+          <a:chExt cx="0" cy="0"/>
+        </a:xfrm>
+      </p:grpSpPr>
+      <p:sp>
+        <p:nvSpPr>
+          <p:cNvPr id="2" name="Shape 0"/>
+          <p:cNvSpPr/>
+          <p:nvPr/>
+        </p:nvSpPr>
+        <p:spPr>
+          <a:xfrm>
+            <a:off x="660197" y="545897"/>
+            <a:ext cx="202997" cy="25603"/>
+          </a:xfrm>
+          <a:prstGeom prst="rect">
+            <a:avLst/>
+          </a:prstGeom>
+          <a:solidFill>
+            <a:srgbClr val="106838"/>
+          </a:solidFill>
+          <a:ln/>
+        </p:spPr>
+      </p:sp>
+      <p:sp>
+        <p:nvSpPr>
+          <p:cNvPr id="3" name="Text 1"/>
+          <p:cNvSpPr/>
+          <p:nvPr/>
+        </p:nvSpPr>
+        <p:spPr>
+          <a:xfrm>
+            <a:off x="952805" y="444398"/>
+            <a:ext cx="6400800" cy="177394"/>
+          </a:xfrm>
+          <a:prstGeom prst="rect">
+            <a:avLst/>
+          </a:prstGeom>
+          <a:noFill/>
+          <a:ln/>
+        </p:spPr>
+        <p:txBody>
+          <a:bodyPr wrap="square" lIns="0" tIns="0" rIns="0" bIns="0" rtlCol="0" anchor="ctr"/>
+          <a:lstStyle/>
+          <a:p>
+            <a:pPr indent="0" marL="0">
+              <a:buNone/>
+            </a:pPr>
+            <a:r>
+              <a:rPr lang="en-US" sz="1050" b="1" dirty="0">
+                <a:solidFill>
+                  <a:srgbClr val="A8761F"/>
+                </a:solidFill>
+                <a:latin typeface="Arial" pitchFamily="34" charset="0"/>
+                <a:ea typeface="Arial" pitchFamily="34" charset="-122"/>
+                <a:cs typeface="Arial" pitchFamily="34" charset="-120"/>
+              </a:rPr>
+              <a:t>10</a:t>
+            </a:r>
+            <a:r>
+              <a:rPr lang="en-US" sz="1050" b="1" dirty="0">
+                <a:solidFill>
+                  <a:srgbClr val="1B8149"/>
+                </a:solidFill>
+                <a:latin typeface="Yu Gothic" pitchFamily="34" charset="0"/>
+                <a:ea typeface="Yu Gothic" pitchFamily="34" charset="-122"/>
+                <a:cs typeface="Yu Gothic" pitchFamily="34" charset="-120"/>
+              </a:rPr>
+              <a:t>   今後の進め方</a:t>
+            </a:r>
+            <a:endParaRPr lang="en-US" sz="1050" dirty="0"/>
+          </a:p>
+        </p:txBody>
+      </p:sp>
+      <p:sp>
+        <p:nvSpPr>
+          <p:cNvPr id="4" name="Text 2"/>
+          <p:cNvSpPr/>
+          <p:nvPr/>
+        </p:nvSpPr>
+        <p:spPr>
+          <a:xfrm>
+            <a:off x="660197" y="660197"/>
+            <a:ext cx="8889797" cy="508406"/>
+          </a:xfrm>
+          <a:prstGeom prst="rect">
+            <a:avLst/>
+          </a:prstGeom>
+          <a:noFill/>
+          <a:ln/>
+        </p:spPr>
+        <p:txBody>
+          <a:bodyPr wrap="square" lIns="0" tIns="0" rIns="0" bIns="0" rtlCol="0" anchor="ctr"/>
+          <a:lstStyle/>
+          <a:p>
+            <a:pPr indent="0" marL="0">
+              <a:buNone/>
+            </a:pPr>
+            <a:r>
+              <a:rPr lang="en-US" sz="2900" b="1" dirty="0">
+                <a:solidFill>
+                  <a:srgbClr val="0A3D23"/>
+                </a:solidFill>
+                <a:latin typeface="Yu Gothic" pitchFamily="34" charset="0"/>
+                <a:ea typeface="Yu Gothic" pitchFamily="34" charset="-122"/>
+                <a:cs typeface="Yu Gothic" pitchFamily="34" charset="-120"/>
+              </a:rPr>
+              <a:t>現地確認から、最短2〜3ヶ月で切り替えできます。</a:t>
+            </a:r>
+            <a:endParaRPr lang="en-US" sz="2900" dirty="0"/>
+          </a:p>
+        </p:txBody>
+      </p:sp>
+      <p:sp>
+        <p:nvSpPr>
+          <p:cNvPr id="5" name="Text 3"/>
+          <p:cNvSpPr/>
+          <p:nvPr/>
+        </p:nvSpPr>
+        <p:spPr>
+          <a:xfrm>
+            <a:off x="660197" y="1308506"/>
+            <a:ext cx="10032797" cy="228600"/>
+          </a:xfrm>
+          <a:prstGeom prst="rect">
+            <a:avLst/>
+          </a:prstGeom>
+          <a:noFill/>
+          <a:ln/>
+        </p:spPr>
+        <p:txBody>
+          <a:bodyPr wrap="square" lIns="0" tIns="0" rIns="0" bIns="0" rtlCol="0" anchor="ctr"/>
+          <a:lstStyle/>
+          <a:p>
+            <a:pPr indent="0" marL="0">
+              <a:buNone/>
+            </a:pPr>
+            <a:r>
+              <a:rPr lang="en-US" sz="1250" dirty="0">
+                <a:solidFill>
+                  <a:srgbClr val="4B5550"/>
+                </a:solidFill>
+                <a:latin typeface="Yu Gothic" pitchFamily="34" charset="0"/>
+                <a:ea typeface="Yu Gothic" pitchFamily="34" charset="-122"/>
+                <a:cs typeface="Yu Gothic" pitchFamily="34" charset="-120"/>
+              </a:rPr>
+              <a:t>まずは2店舗の現地確認と、条件のすり合わせからお願いできればと存じます。</a:t>
+            </a:r>
+            <a:endParaRPr lang="en-US" sz="1250" dirty="0"/>
+          </a:p>
+        </p:txBody>
+      </p:sp>
+      <p:pic>
+        <p:nvPicPr>
+          <p:cNvPr id="6" name="Image 0" descr="/home/user/suzuki-ceo/selfcafe-miraiya-deck/assets/logo-green.png">    </p:cNvPr>
+          <p:cNvPicPr>
+            <a:picLocks noChangeAspect="1"/>
+          </p:cNvPicPr>
+          <p:nvPr/>
+        </p:nvPicPr>
+        <p:blipFill>
+          <a:blip r:embed="rId1"/>
+          <a:stretch>
+            <a:fillRect/>
+          </a:stretch>
+        </p:blipFill>
+        <p:spPr>
+          <a:xfrm>
+            <a:off x="9855403" y="482803"/>
+            <a:ext cx="1676095" cy="238658"/>
+          </a:xfrm>
+          <a:prstGeom prst="rect">
+            <a:avLst/>
+          </a:prstGeom>
+        </p:spPr>
+      </p:pic>
+      <p:sp>
+        <p:nvSpPr>
+          <p:cNvPr id="7" name="Text 4"/>
+          <p:cNvSpPr/>
+          <p:nvPr/>
+        </p:nvSpPr>
+        <p:spPr>
+          <a:xfrm>
+            <a:off x="660197" y="6476695"/>
+            <a:ext cx="5080406" cy="152705"/>
+          </a:xfrm>
+          <a:prstGeom prst="rect">
+            <a:avLst/>
+          </a:prstGeom>
+          <a:noFill/>
+          <a:ln/>
+        </p:spPr>
+        <p:txBody>
+          <a:bodyPr wrap="square" lIns="0" tIns="0" rIns="0" bIns="0" rtlCol="0" anchor="ctr"/>
+          <a:lstStyle/>
+          <a:p>
+            <a:pPr indent="0" marL="0">
+              <a:buNone/>
+            </a:pPr>
+            <a:r>
+              <a:rPr lang="en-US" sz="900" dirty="0">
+                <a:solidFill>
+                  <a:srgbClr val="A8B0AA"/>
+                </a:solidFill>
+                <a:latin typeface="Yu Gothic" pitchFamily="34" charset="0"/>
+                <a:ea typeface="Yu Gothic" pitchFamily="34" charset="-122"/>
+                <a:cs typeface="Yu Gothic" pitchFamily="34" charset="-120"/>
+              </a:rPr>
+              <a:t>セルフカフェ × 未来屋書店 業態転換のご提案</a:t>
+            </a:r>
+            <a:endParaRPr lang="en-US" sz="900" dirty="0"/>
+          </a:p>
+        </p:txBody>
+      </p:sp>
+      <p:sp>
+        <p:nvSpPr>
+          <p:cNvPr id="8" name="Text 5"/>
+          <p:cNvSpPr/>
+          <p:nvPr/>
+        </p:nvSpPr>
+        <p:spPr>
+          <a:xfrm>
+            <a:off x="10261397" y="6463894"/>
+            <a:ext cx="1270102" cy="152705"/>
+          </a:xfrm>
+          <a:prstGeom prst="rect">
+            <a:avLst/>
+          </a:prstGeom>
+          <a:noFill/>
+          <a:ln/>
+        </p:spPr>
+        <p:txBody>
+          <a:bodyPr wrap="square" lIns="0" tIns="0" rIns="0" bIns="0" rtlCol="0" anchor="ctr"/>
+          <a:lstStyle/>
+          <a:p>
+            <a:pPr algn="r" indent="0" marL="0">
+              <a:buNone/>
+            </a:pPr>
+            <a:r>
+              <a:rPr lang="en-US" sz="1000" b="1" dirty="0">
+                <a:solidFill>
+                  <a:srgbClr val="7E8882"/>
+                </a:solidFill>
+                <a:latin typeface="Arial" pitchFamily="34" charset="0"/>
+                <a:ea typeface="Arial" pitchFamily="34" charset="-122"/>
+                <a:cs typeface="Arial" pitchFamily="34" charset="-120"/>
+              </a:rPr>
+              <a:t>11</a:t>
             </a:r>
             <a:endParaRPr lang="en-US" sz="1000" dirty="0"/>
           </a:p>
@@ -6340,7 +7735,7 @@
       </p:sp>
       <p:pic>
         <p:nvPicPr>
-          <p:cNvPr id="37" name="Image 5" descr="/home/user/suzuki-ceo/selfcafe-miraiya-deck/assets/photos/.crops/store-sasashima-487x330.jpg">    </p:cNvPr>
+          <p:cNvPr id="37" name="Image 5" descr="/home/user/suzuki-ceo/selfcafe-miraiya-deck/assets/photos/.crops/sasashima-interior-487x330.jpg">    </p:cNvPr>
           <p:cNvPicPr>
             <a:picLocks noChangeAspect="1"/>
           </p:cNvPicPr>
@@ -6447,7 +7842,7 @@
                 <a:ea typeface="Yu Gothic" pitchFamily="34" charset="-122"/>
                 <a:cs typeface="Yu Gothic" pitchFamily="34" charset="-120"/>
               </a:rPr>
-              <a:t>ささしまライブ店（名古屋）の店内。商業施設内でも同じ仕様で展開しています。</a:t>
+              <a:t>ささしまライブ店（名古屋）。商業施設の1階路面で、朝8時から22時まで無人運営しています。</a:t>
             </a:r>
             <a:endParaRPr lang="en-US" sz="1000" dirty="0"/>
           </a:p>
@@ -7962,7 +9357,7 @@
       </p:sp>
       <p:pic>
         <p:nvPicPr>
-          <p:cNvPr id="10" name="Image 1" descr="/home/user/suzuki-ceo/selfcafe-miraiya-deck/assets/photos/.crops/store-inzai-real-328x172.jpg">    </p:cNvPr>
+          <p:cNvPr id="10" name="Image 1" descr="/home/user/suzuki-ceo/selfcafe-miraiya-deck/assets/photos/.crops/inzai-hall-328x172.jpg">    </p:cNvPr>
           <p:cNvPicPr>
             <a:picLocks noChangeAspect="1"/>
           </p:cNvPicPr>
@@ -8555,7 +9950,7 @@
       </p:sp>
       <p:pic>
         <p:nvPicPr>
-          <p:cNvPr id="28" name="Image 3" descr="/home/user/suzuki-ceo/selfcafe-miraiya-deck/assets/photos/.crops/store-sasashima-328x172.jpg">    </p:cNvPr>
+          <p:cNvPr id="28" name="Image 3" descr="/home/user/suzuki-ceo/selfcafe-miraiya-deck/assets/photos/.crops/sasashima-exterior-328x172.jpg">    </p:cNvPr>
           <p:cNvPicPr>
             <a:picLocks noChangeAspect="1"/>
           </p:cNvPicPr>
@@ -9094,7 +10489,7 @@
                 <a:ea typeface="Yu Gothic" pitchFamily="34" charset="-122"/>
                 <a:cs typeface="Yu Gothic" pitchFamily="34" charset="-120"/>
               </a:rPr>
-              <a:t>   前提の考え方</a:t>
+              <a:t>   導入イメージ</a:t>
             </a:r>
             <a:endParaRPr lang="en-US" sz="1050" dirty="0"/>
           </a:p>
@@ -9133,7 +10528,7 @@
                 <a:ea typeface="Yu Gothic" pitchFamily="34" charset="-122"/>
                 <a:cs typeface="Yu Gothic" pitchFamily="34" charset="-120"/>
               </a:rPr>
-              <a:t>実績を基準に、控えめに置いた想定です。</a:t>
+              <a:t>書店の中に、こう入ります。</a:t>
             </a:r>
             <a:endParaRPr lang="en-US" sz="2900" dirty="0"/>
           </a:p>
@@ -9172,7 +10567,7 @@
                 <a:ea typeface="Yu Gothic" pitchFamily="34" charset="-122"/>
                 <a:cs typeface="Yu Gothic" pitchFamily="34" charset="-120"/>
               </a:rPr>
-              <a:t>商業施設内・映画館隣接という条件を踏まえ、実績平均の1.5倍程度を想定しました。</a:t>
+              <a:t>印西牧の原店の実際の様子です。書架のとなりに席を並べ、書店の動線をそのまま活かしています。</a:t>
             </a:r>
             <a:endParaRPr lang="en-US" sz="1250" dirty="0"/>
           </a:p>
@@ -9280,625 +10675,158 @@
           </a:p>
         </p:txBody>
       </p:sp>
-      <p:sp>
-        <p:nvSpPr>
-          <p:cNvPr id="9" name="Shape 6"/>
-          <p:cNvSpPr/>
-          <p:nvPr/>
-        </p:nvSpPr>
+      <p:pic>
+        <p:nvPicPr>
+          <p:cNvPr id="9" name="Image 1" descr="/home/user/suzuki-ceo/selfcafe-miraiya-deck/assets/photos/.crops/inzai-hall-750x390.jpg">    </p:cNvPr>
+          <p:cNvPicPr>
+            <a:picLocks noChangeAspect="1"/>
+          </p:cNvPicPr>
+          <p:nvPr/>
+        </p:nvPicPr>
+        <p:blipFill>
+          <a:blip r:embed="rId2"/>
+          <a:stretch>
+            <a:fillRect/>
+          </a:stretch>
+        </p:blipFill>
         <p:spPr>
           <a:xfrm>
             <a:off x="660197" y="1651406"/>
-            <a:ext cx="7406640" cy="3200400"/>
-          </a:xfrm>
-          <a:prstGeom prst="roundRect">
-            <a:avLst>
-              <a:gd name="adj" fmla="val 1714"/>
-            </a:avLst>
-          </a:prstGeom>
-          <a:solidFill>
-            <a:srgbClr val="FFFFFF"/>
-          </a:solidFill>
-          <a:ln w="9525">
+            <a:ext cx="6858000" cy="3566160"/>
+          </a:xfrm>
+          <a:prstGeom prst="rect">
+            <a:avLst/>
+          </a:prstGeom>
+        </p:spPr>
+      </p:pic>
+      <p:sp>
+        <p:nvSpPr>
+          <p:cNvPr id="10" name="Shape 6"/>
+          <p:cNvSpPr/>
+          <p:nvPr/>
+        </p:nvSpPr>
+        <p:spPr>
+          <a:xfrm>
+            <a:off x="660197" y="1651406"/>
+            <a:ext cx="6858000" cy="3566160"/>
+          </a:xfrm>
+          <a:prstGeom prst="rect">
+            <a:avLst/>
+          </a:prstGeom>
+          <a:ln w="12700">
             <a:solidFill>
-              <a:srgbClr val="EFEAE0"/>
+              <a:srgbClr val="D8D2C6"/>
             </a:solidFill>
             <a:prstDash val="solid"/>
           </a:ln>
         </p:spPr>
       </p:sp>
-      <p:sp>
-        <p:nvSpPr>
-          <p:cNvPr id="10" name="Text 7"/>
-          <p:cNvSpPr/>
-          <p:nvPr/>
-        </p:nvSpPr>
-        <p:spPr>
-          <a:xfrm>
-            <a:off x="934517" y="1834286"/>
-            <a:ext cx="6858000" cy="256032"/>
-          </a:xfrm>
-          <a:prstGeom prst="rect">
-            <a:avLst/>
-          </a:prstGeom>
-          <a:noFill/>
-          <a:ln/>
-        </p:spPr>
-        <p:txBody>
-          <a:bodyPr wrap="square" lIns="0" tIns="0" rIns="0" bIns="0" rtlCol="0" anchor="ctr"/>
-          <a:lstStyle/>
-          <a:p>
-            <a:pPr indent="0" marL="0">
-              <a:buNone/>
-            </a:pPr>
-            <a:r>
-              <a:rPr lang="en-US" sz="1100" b="1" dirty="0">
-                <a:solidFill>
-                  <a:srgbClr val="0A3D23"/>
-                </a:solidFill>
-                <a:latin typeface="Yu Gothic" pitchFamily="34" charset="0"/>
-                <a:ea typeface="Yu Gothic" pitchFamily="34" charset="-122"/>
-                <a:cs typeface="Yu Gothic" pitchFamily="34" charset="-120"/>
-              </a:rPr>
-              <a:t>1日あたりの販売杯数の比較</a:t>
-            </a:r>
-            <a:endParaRPr lang="en-US" sz="1100" dirty="0"/>
-          </a:p>
-        </p:txBody>
-      </p:sp>
-      <p:sp>
-        <p:nvSpPr>
-          <p:cNvPr id="11" name="Text 8"/>
-          <p:cNvSpPr/>
-          <p:nvPr/>
-        </p:nvSpPr>
-        <p:spPr>
-          <a:xfrm>
-            <a:off x="934517" y="2254910"/>
-            <a:ext cx="2157984" cy="310896"/>
-          </a:xfrm>
-          <a:prstGeom prst="rect">
-            <a:avLst/>
-          </a:prstGeom>
-          <a:noFill/>
-          <a:ln/>
-        </p:spPr>
-        <p:txBody>
-          <a:bodyPr wrap="square" lIns="0" tIns="0" rIns="0" bIns="0" rtlCol="0" anchor="ctr"/>
-          <a:lstStyle/>
-          <a:p>
-            <a:pPr indent="0" marL="0">
-              <a:buNone/>
-            </a:pPr>
-            <a:r>
-              <a:rPr lang="en-US" sz="950" dirty="0">
-                <a:solidFill>
-                  <a:srgbClr val="7E8882"/>
-                </a:solidFill>
-                <a:latin typeface="Yu Gothic" pitchFamily="34" charset="0"/>
-                <a:ea typeface="Yu Gothic" pitchFamily="34" charset="-122"/>
-                <a:cs typeface="Yu Gothic" pitchFamily="34" charset="-120"/>
-              </a:rPr>
-              <a:t>印西牧の原店（実績）</a:t>
-            </a:r>
-            <a:endParaRPr lang="en-US" sz="950" dirty="0"/>
-          </a:p>
-        </p:txBody>
-      </p:sp>
-      <p:sp>
-        <p:nvSpPr>
-          <p:cNvPr id="12" name="Shape 9"/>
-          <p:cNvSpPr/>
-          <p:nvPr/>
-        </p:nvSpPr>
-        <p:spPr>
-          <a:xfrm>
-            <a:off x="3129077" y="2300630"/>
-            <a:ext cx="1313641" cy="219456"/>
+      <p:pic>
+        <p:nvPicPr>
+          <p:cNvPr id="11" name="Image 2" descr="/home/user/suzuki-ceo/selfcafe-miraiya-deck/assets/photos/.crops/inzai-books-409x180.jpg">    </p:cNvPr>
+          <p:cNvPicPr>
+            <a:picLocks noChangeAspect="1"/>
+          </p:cNvPicPr>
+          <p:nvPr/>
+        </p:nvPicPr>
+        <p:blipFill>
+          <a:blip r:embed="rId3"/>
+          <a:stretch>
+            <a:fillRect/>
+          </a:stretch>
+        </p:blipFill>
+        <p:spPr>
+          <a:xfrm>
+            <a:off x="7792517" y="1651406"/>
+            <a:ext cx="3738982" cy="1645920"/>
+          </a:xfrm>
+          <a:prstGeom prst="rect">
+            <a:avLst/>
+          </a:prstGeom>
+        </p:spPr>
+      </p:pic>
+      <p:sp>
+        <p:nvSpPr>
+          <p:cNvPr id="12" name="Shape 7"/>
+          <p:cNvSpPr/>
+          <p:nvPr/>
+        </p:nvSpPr>
+        <p:spPr>
+          <a:xfrm>
+            <a:off x="7792517" y="1651406"/>
+            <a:ext cx="3738982" cy="1645920"/>
+          </a:xfrm>
+          <a:prstGeom prst="rect">
+            <a:avLst/>
+          </a:prstGeom>
+          <a:ln w="12700">
+            <a:solidFill>
+              <a:srgbClr val="D8D2C6"/>
+            </a:solidFill>
+            <a:prstDash val="solid"/>
+          </a:ln>
+        </p:spPr>
+      </p:sp>
+      <p:pic>
+        <p:nvPicPr>
+          <p:cNvPr id="13" name="Image 3" descr="/home/user/suzuki-ceo/selfcafe-miraiya-deck/assets/photos/.crops/inzai-counter-409x180.jpg">    </p:cNvPr>
+          <p:cNvPicPr>
+            <a:picLocks noChangeAspect="1"/>
+          </p:cNvPicPr>
+          <p:nvPr/>
+        </p:nvPicPr>
+        <p:blipFill>
+          <a:blip r:embed="rId4"/>
+          <a:stretch>
+            <a:fillRect/>
+          </a:stretch>
+        </p:blipFill>
+        <p:spPr>
+          <a:xfrm>
+            <a:off x="7792517" y="3571646"/>
+            <a:ext cx="3738982" cy="1645920"/>
+          </a:xfrm>
+          <a:prstGeom prst="rect">
+            <a:avLst/>
+          </a:prstGeom>
+        </p:spPr>
+      </p:pic>
+      <p:sp>
+        <p:nvSpPr>
+          <p:cNvPr id="14" name="Shape 8"/>
+          <p:cNvSpPr/>
+          <p:nvPr/>
+        </p:nvSpPr>
+        <p:spPr>
+          <a:xfrm>
+            <a:off x="7792517" y="3571646"/>
+            <a:ext cx="3738982" cy="1645920"/>
+          </a:xfrm>
+          <a:prstGeom prst="rect">
+            <a:avLst/>
+          </a:prstGeom>
+          <a:ln w="12700">
+            <a:solidFill>
+              <a:srgbClr val="D8D2C6"/>
+            </a:solidFill>
+            <a:prstDash val="solid"/>
+          </a:ln>
+        </p:spPr>
+      </p:sp>
+      <p:sp>
+        <p:nvSpPr>
+          <p:cNvPr id="15" name="Shape 9"/>
+          <p:cNvSpPr/>
+          <p:nvPr/>
+        </p:nvSpPr>
+        <p:spPr>
+          <a:xfrm>
+            <a:off x="660197" y="5437022"/>
+            <a:ext cx="3477463" cy="859536"/>
           </a:xfrm>
           <a:prstGeom prst="roundRect">
             <a:avLst>
-              <a:gd name="adj" fmla="val 20833"/>
-            </a:avLst>
-          </a:prstGeom>
-          <a:solidFill>
-            <a:srgbClr val="9CC3AA"/>
-          </a:solidFill>
-          <a:ln/>
-        </p:spPr>
-      </p:sp>
-      <p:sp>
-        <p:nvSpPr>
-          <p:cNvPr id="13" name="Text 10"/>
-          <p:cNvSpPr/>
-          <p:nvPr/>
-        </p:nvSpPr>
-        <p:spPr>
-          <a:xfrm>
-            <a:off x="4534158" y="2254910"/>
-            <a:ext cx="914400" cy="310896"/>
-          </a:xfrm>
-          <a:prstGeom prst="rect">
-            <a:avLst/>
-          </a:prstGeom>
-          <a:noFill/>
-          <a:ln/>
-        </p:spPr>
-        <p:txBody>
-          <a:bodyPr wrap="square" lIns="0" tIns="0" rIns="0" bIns="0" rtlCol="0" anchor="ctr"/>
-          <a:lstStyle/>
-          <a:p>
-            <a:pPr indent="0" marL="0">
-              <a:buNone/>
-            </a:pPr>
-            <a:r>
-              <a:rPr lang="en-US" sz="1000" b="1" dirty="0">
-                <a:solidFill>
-                  <a:srgbClr val="7E8882"/>
-                </a:solidFill>
-                <a:latin typeface="Yu Gothic" pitchFamily="34" charset="0"/>
-                <a:ea typeface="Yu Gothic" pitchFamily="34" charset="-122"/>
-                <a:cs typeface="Yu Gothic" pitchFamily="34" charset="-120"/>
-              </a:rPr>
-              <a:t>40.6 杯</a:t>
-            </a:r>
-            <a:endParaRPr lang="en-US" sz="1000" dirty="0"/>
-          </a:p>
-        </p:txBody>
-      </p:sp>
-      <p:sp>
-        <p:nvSpPr>
-          <p:cNvPr id="14" name="Text 11"/>
-          <p:cNvSpPr/>
-          <p:nvPr/>
-        </p:nvSpPr>
-        <p:spPr>
-          <a:xfrm>
-            <a:off x="934517" y="2757830"/>
-            <a:ext cx="2157984" cy="310896"/>
-          </a:xfrm>
-          <a:prstGeom prst="rect">
-            <a:avLst/>
-          </a:prstGeom>
-          <a:noFill/>
-          <a:ln/>
-        </p:spPr>
-        <p:txBody>
-          <a:bodyPr wrap="square" lIns="0" tIns="0" rIns="0" bIns="0" rtlCol="0" anchor="ctr"/>
-          <a:lstStyle/>
-          <a:p>
-            <a:pPr indent="0" marL="0">
-              <a:buNone/>
-            </a:pPr>
-            <a:r>
-              <a:rPr lang="en-US" sz="950" dirty="0">
-                <a:solidFill>
-                  <a:srgbClr val="7E8882"/>
-                </a:solidFill>
-                <a:latin typeface="Yu Gothic" pitchFamily="34" charset="0"/>
-                <a:ea typeface="Yu Gothic" pitchFamily="34" charset="-122"/>
-                <a:cs typeface="Yu Gothic" pitchFamily="34" charset="-120"/>
-              </a:rPr>
-              <a:t>新守山店（実績）</a:t>
-            </a:r>
-            <a:endParaRPr lang="en-US" sz="950" dirty="0"/>
-          </a:p>
-        </p:txBody>
-      </p:sp>
-      <p:sp>
-        <p:nvSpPr>
-          <p:cNvPr id="15" name="Shape 12"/>
-          <p:cNvSpPr/>
-          <p:nvPr/>
-        </p:nvSpPr>
-        <p:spPr>
-          <a:xfrm>
-            <a:off x="3129077" y="2803550"/>
-            <a:ext cx="1462477" cy="219456"/>
-          </a:xfrm>
-          <a:prstGeom prst="roundRect">
-            <a:avLst>
-              <a:gd name="adj" fmla="val 20833"/>
-            </a:avLst>
-          </a:prstGeom>
-          <a:solidFill>
-            <a:srgbClr val="9CC3AA"/>
-          </a:solidFill>
-          <a:ln/>
-        </p:spPr>
-      </p:sp>
-      <p:sp>
-        <p:nvSpPr>
-          <p:cNvPr id="16" name="Text 13"/>
-          <p:cNvSpPr/>
-          <p:nvPr/>
-        </p:nvSpPr>
-        <p:spPr>
-          <a:xfrm>
-            <a:off x="4682994" y="2757830"/>
-            <a:ext cx="914400" cy="310896"/>
-          </a:xfrm>
-          <a:prstGeom prst="rect">
-            <a:avLst/>
-          </a:prstGeom>
-          <a:noFill/>
-          <a:ln/>
-        </p:spPr>
-        <p:txBody>
-          <a:bodyPr wrap="square" lIns="0" tIns="0" rIns="0" bIns="0" rtlCol="0" anchor="ctr"/>
-          <a:lstStyle/>
-          <a:p>
-            <a:pPr indent="0" marL="0">
-              <a:buNone/>
-            </a:pPr>
-            <a:r>
-              <a:rPr lang="en-US" sz="1000" b="1" dirty="0">
-                <a:solidFill>
-                  <a:srgbClr val="7E8882"/>
-                </a:solidFill>
-                <a:latin typeface="Yu Gothic" pitchFamily="34" charset="0"/>
-                <a:ea typeface="Yu Gothic" pitchFamily="34" charset="-122"/>
-                <a:cs typeface="Yu Gothic" pitchFamily="34" charset="-120"/>
-              </a:rPr>
-              <a:t>45.2 杯</a:t>
-            </a:r>
-            <a:endParaRPr lang="en-US" sz="1000" dirty="0"/>
-          </a:p>
-        </p:txBody>
-      </p:sp>
-      <p:sp>
-        <p:nvSpPr>
-          <p:cNvPr id="17" name="Text 14"/>
-          <p:cNvSpPr/>
-          <p:nvPr/>
-        </p:nvSpPr>
-        <p:spPr>
-          <a:xfrm>
-            <a:off x="934517" y="3260750"/>
-            <a:ext cx="2157984" cy="310896"/>
-          </a:xfrm>
-          <a:prstGeom prst="rect">
-            <a:avLst/>
-          </a:prstGeom>
-          <a:noFill/>
-          <a:ln/>
-        </p:spPr>
-        <p:txBody>
-          <a:bodyPr wrap="square" lIns="0" tIns="0" rIns="0" bIns="0" rtlCol="0" anchor="ctr"/>
-          <a:lstStyle/>
-          <a:p>
-            <a:pPr indent="0" marL="0">
-              <a:buNone/>
-            </a:pPr>
-            <a:r>
-              <a:rPr lang="en-US" sz="950" b="1" dirty="0">
-                <a:solidFill>
-                  <a:srgbClr val="0A3D23"/>
-                </a:solidFill>
-                <a:latin typeface="Yu Gothic" pitchFamily="34" charset="0"/>
-                <a:ea typeface="Yu Gothic" pitchFamily="34" charset="-122"/>
-                <a:cs typeface="Yu Gothic" pitchFamily="34" charset="-120"/>
-              </a:rPr>
-              <a:t>土浦店（想定）</a:t>
-            </a:r>
-            <a:endParaRPr lang="en-US" sz="950" dirty="0"/>
-          </a:p>
-        </p:txBody>
-      </p:sp>
-      <p:sp>
-        <p:nvSpPr>
-          <p:cNvPr id="18" name="Shape 15"/>
-          <p:cNvSpPr/>
-          <p:nvPr/>
-        </p:nvSpPr>
-        <p:spPr>
-          <a:xfrm>
-            <a:off x="3129077" y="3306470"/>
-            <a:ext cx="1941342" cy="219456"/>
-          </a:xfrm>
-          <a:prstGeom prst="roundRect">
-            <a:avLst>
-              <a:gd name="adj" fmla="val 20833"/>
-            </a:avLst>
-          </a:prstGeom>
-          <a:solidFill>
-            <a:srgbClr val="A8761F"/>
-          </a:solidFill>
-          <a:ln/>
-        </p:spPr>
-      </p:sp>
-      <p:sp>
-        <p:nvSpPr>
-          <p:cNvPr id="19" name="Text 16"/>
-          <p:cNvSpPr/>
-          <p:nvPr/>
-        </p:nvSpPr>
-        <p:spPr>
-          <a:xfrm>
-            <a:off x="5161858" y="3260750"/>
-            <a:ext cx="914400" cy="310896"/>
-          </a:xfrm>
-          <a:prstGeom prst="rect">
-            <a:avLst/>
-          </a:prstGeom>
-          <a:noFill/>
-          <a:ln/>
-        </p:spPr>
-        <p:txBody>
-          <a:bodyPr wrap="square" lIns="0" tIns="0" rIns="0" bIns="0" rtlCol="0" anchor="ctr"/>
-          <a:lstStyle/>
-          <a:p>
-            <a:pPr indent="0" marL="0">
-              <a:buNone/>
-            </a:pPr>
-            <a:r>
-              <a:rPr lang="en-US" sz="1000" b="1" dirty="0">
-                <a:solidFill>
-                  <a:srgbClr val="A8761F"/>
-                </a:solidFill>
-                <a:latin typeface="Yu Gothic" pitchFamily="34" charset="0"/>
-                <a:ea typeface="Yu Gothic" pitchFamily="34" charset="-122"/>
-                <a:cs typeface="Yu Gothic" pitchFamily="34" charset="-120"/>
-              </a:rPr>
-              <a:t>60 杯</a:t>
-            </a:r>
-            <a:endParaRPr lang="en-US" sz="1000" dirty="0"/>
-          </a:p>
-        </p:txBody>
-      </p:sp>
-      <p:sp>
-        <p:nvSpPr>
-          <p:cNvPr id="20" name="Text 17"/>
-          <p:cNvSpPr/>
-          <p:nvPr/>
-        </p:nvSpPr>
-        <p:spPr>
-          <a:xfrm>
-            <a:off x="934517" y="3763670"/>
-            <a:ext cx="2157984" cy="310896"/>
-          </a:xfrm>
-          <a:prstGeom prst="rect">
-            <a:avLst/>
-          </a:prstGeom>
-          <a:noFill/>
-          <a:ln/>
-        </p:spPr>
-        <p:txBody>
-          <a:bodyPr wrap="square" lIns="0" tIns="0" rIns="0" bIns="0" rtlCol="0" anchor="ctr"/>
-          <a:lstStyle/>
-          <a:p>
-            <a:pPr indent="0" marL="0">
-              <a:buNone/>
-            </a:pPr>
-            <a:r>
-              <a:rPr lang="en-US" sz="950" b="1" dirty="0">
-                <a:solidFill>
-                  <a:srgbClr val="0A3D23"/>
-                </a:solidFill>
-                <a:latin typeface="Yu Gothic" pitchFamily="34" charset="0"/>
-                <a:ea typeface="Yu Gothic" pitchFamily="34" charset="-122"/>
-                <a:cs typeface="Yu Gothic" pitchFamily="34" charset="-120"/>
-              </a:rPr>
-              <a:t>秋田店（想定）</a:t>
-            </a:r>
-            <a:endParaRPr lang="en-US" sz="950" dirty="0"/>
-          </a:p>
-        </p:txBody>
-      </p:sp>
-      <p:sp>
-        <p:nvSpPr>
-          <p:cNvPr id="21" name="Shape 18"/>
-          <p:cNvSpPr/>
-          <p:nvPr/>
-        </p:nvSpPr>
-        <p:spPr>
-          <a:xfrm>
-            <a:off x="3129077" y="3809390"/>
-            <a:ext cx="2264898" cy="219456"/>
-          </a:xfrm>
-          <a:prstGeom prst="roundRect">
-            <a:avLst>
-              <a:gd name="adj" fmla="val 20833"/>
-            </a:avLst>
-          </a:prstGeom>
-          <a:solidFill>
-            <a:srgbClr val="A8761F"/>
-          </a:solidFill>
-          <a:ln/>
-        </p:spPr>
-      </p:sp>
-      <p:sp>
-        <p:nvSpPr>
-          <p:cNvPr id="22" name="Text 19"/>
-          <p:cNvSpPr/>
-          <p:nvPr/>
-        </p:nvSpPr>
-        <p:spPr>
-          <a:xfrm>
-            <a:off x="5485415" y="3763670"/>
-            <a:ext cx="914400" cy="310896"/>
-          </a:xfrm>
-          <a:prstGeom prst="rect">
-            <a:avLst/>
-          </a:prstGeom>
-          <a:noFill/>
-          <a:ln/>
-        </p:spPr>
-        <p:txBody>
-          <a:bodyPr wrap="square" lIns="0" tIns="0" rIns="0" bIns="0" rtlCol="0" anchor="ctr"/>
-          <a:lstStyle/>
-          <a:p>
-            <a:pPr indent="0" marL="0">
-              <a:buNone/>
-            </a:pPr>
-            <a:r>
-              <a:rPr lang="en-US" sz="1000" b="1" dirty="0">
-                <a:solidFill>
-                  <a:srgbClr val="A8761F"/>
-                </a:solidFill>
-                <a:latin typeface="Yu Gothic" pitchFamily="34" charset="0"/>
-                <a:ea typeface="Yu Gothic" pitchFamily="34" charset="-122"/>
-                <a:cs typeface="Yu Gothic" pitchFamily="34" charset="-120"/>
-              </a:rPr>
-              <a:t>70 杯</a:t>
-            </a:r>
-            <a:endParaRPr lang="en-US" sz="1000" dirty="0"/>
-          </a:p>
-        </p:txBody>
-      </p:sp>
-      <p:sp>
-        <p:nvSpPr>
-          <p:cNvPr id="23" name="Text 20"/>
-          <p:cNvSpPr/>
-          <p:nvPr/>
-        </p:nvSpPr>
-        <p:spPr>
-          <a:xfrm>
-            <a:off x="934517" y="4266590"/>
-            <a:ext cx="2157984" cy="310896"/>
-          </a:xfrm>
-          <a:prstGeom prst="rect">
-            <a:avLst/>
-          </a:prstGeom>
-          <a:noFill/>
-          <a:ln/>
-        </p:spPr>
-        <p:txBody>
-          <a:bodyPr wrap="square" lIns="0" tIns="0" rIns="0" bIns="0" rtlCol="0" anchor="ctr"/>
-          <a:lstStyle/>
-          <a:p>
-            <a:pPr indent="0" marL="0">
-              <a:buNone/>
-            </a:pPr>
-            <a:r>
-              <a:rPr lang="en-US" sz="950" dirty="0">
-                <a:solidFill>
-                  <a:srgbClr val="7E8882"/>
-                </a:solidFill>
-                <a:latin typeface="Yu Gothic" pitchFamily="34" charset="0"/>
-                <a:ea typeface="Yu Gothic" pitchFamily="34" charset="-122"/>
-                <a:cs typeface="Yu Gothic" pitchFamily="34" charset="-120"/>
-              </a:rPr>
-              <a:t>ささしまライブ店（実績）</a:t>
-            </a:r>
-            <a:endParaRPr lang="en-US" sz="950" dirty="0"/>
-          </a:p>
-        </p:txBody>
-      </p:sp>
-      <p:sp>
-        <p:nvSpPr>
-          <p:cNvPr id="24" name="Shape 21"/>
-          <p:cNvSpPr/>
-          <p:nvPr/>
-        </p:nvSpPr>
-        <p:spPr>
-          <a:xfrm>
-            <a:off x="3129077" y="4312310"/>
-            <a:ext cx="3970043" cy="219456"/>
-          </a:xfrm>
-          <a:prstGeom prst="roundRect">
-            <a:avLst>
-              <a:gd name="adj" fmla="val 20833"/>
-            </a:avLst>
-          </a:prstGeom>
-          <a:solidFill>
-            <a:srgbClr val="5FA57C"/>
-          </a:solidFill>
-          <a:ln/>
-        </p:spPr>
-      </p:sp>
-      <p:sp>
-        <p:nvSpPr>
-          <p:cNvPr id="25" name="Text 22"/>
-          <p:cNvSpPr/>
-          <p:nvPr/>
-        </p:nvSpPr>
-        <p:spPr>
-          <a:xfrm>
-            <a:off x="7190560" y="4266590"/>
-            <a:ext cx="914400" cy="310896"/>
-          </a:xfrm>
-          <a:prstGeom prst="rect">
-            <a:avLst/>
-          </a:prstGeom>
-          <a:noFill/>
-          <a:ln/>
-        </p:spPr>
-        <p:txBody>
-          <a:bodyPr wrap="square" lIns="0" tIns="0" rIns="0" bIns="0" rtlCol="0" anchor="ctr"/>
-          <a:lstStyle/>
-          <a:p>
-            <a:pPr indent="0" marL="0">
-              <a:buNone/>
-            </a:pPr>
-            <a:r>
-              <a:rPr lang="en-US" sz="1000" b="1" dirty="0">
-                <a:solidFill>
-                  <a:srgbClr val="7E8882"/>
-                </a:solidFill>
-                <a:latin typeface="Yu Gothic" pitchFamily="34" charset="0"/>
-                <a:ea typeface="Yu Gothic" pitchFamily="34" charset="-122"/>
-                <a:cs typeface="Yu Gothic" pitchFamily="34" charset="-120"/>
-              </a:rPr>
-              <a:t>122.7 杯</a:t>
-            </a:r>
-            <a:endParaRPr lang="en-US" sz="1000" dirty="0"/>
-          </a:p>
-        </p:txBody>
-      </p:sp>
-      <p:sp>
-        <p:nvSpPr>
-          <p:cNvPr id="26" name="Text 23"/>
-          <p:cNvSpPr/>
-          <p:nvPr/>
-        </p:nvSpPr>
-        <p:spPr>
-          <a:xfrm>
-            <a:off x="934517" y="4522622"/>
-            <a:ext cx="6858000" cy="237744"/>
-          </a:xfrm>
-          <a:prstGeom prst="rect">
-            <a:avLst/>
-          </a:prstGeom>
-          <a:noFill/>
-          <a:ln/>
-        </p:spPr>
-        <p:txBody>
-          <a:bodyPr wrap="square" lIns="0" tIns="0" rIns="0" bIns="0" rtlCol="0" anchor="ctr"/>
-          <a:lstStyle/>
-          <a:p>
-            <a:pPr indent="0" marL="0">
-              <a:buNone/>
-            </a:pPr>
-            <a:r>
-              <a:rPr lang="en-US" sz="850" dirty="0">
-                <a:solidFill>
-                  <a:srgbClr val="A8B0AA"/>
-                </a:solidFill>
-                <a:latin typeface="Yu Gothic" pitchFamily="34" charset="0"/>
-                <a:ea typeface="Yu Gothic" pitchFamily="34" charset="-122"/>
-                <a:cs typeface="Yu Gothic" pitchFamily="34" charset="-120"/>
-              </a:rPr>
-              <a:t>※ 帯の色：金＝今回の想定／緑＝既存店の実績</a:t>
-            </a:r>
-            <a:endParaRPr lang="en-US" sz="850" dirty="0"/>
-          </a:p>
-        </p:txBody>
-      </p:sp>
-      <p:sp>
-        <p:nvSpPr>
-          <p:cNvPr id="27" name="Shape 24"/>
-          <p:cNvSpPr/>
-          <p:nvPr/>
-        </p:nvSpPr>
-        <p:spPr>
-          <a:xfrm>
-            <a:off x="8450885" y="1651406"/>
-            <a:ext cx="3080614" cy="731520"/>
-          </a:xfrm>
-          <a:prstGeom prst="roundRect">
-            <a:avLst>
-              <a:gd name="adj" fmla="val 7500"/>
+              <a:gd name="adj" fmla="val 6383"/>
             </a:avLst>
           </a:prstGeom>
           <a:solidFill>
@@ -9914,21 +10842,21 @@
       </p:sp>
       <p:pic>
         <p:nvPicPr>
-          <p:cNvPr id="28" name="Image 1" descr="/home/user/suzuki-ceo/selfcafe-miraiya-deck/assets/icons/LuChartColumn-green.png">    </p:cNvPr>
+          <p:cNvPr id="16" name="Image 4" descr="/home/user/suzuki-ceo/selfcafe-miraiya-deck/assets/icons/LuRuler-green.png">    </p:cNvPr>
           <p:cNvPicPr>
             <a:picLocks noChangeAspect="1"/>
           </p:cNvPicPr>
           <p:nvPr/>
         </p:nvPicPr>
         <p:blipFill>
-          <a:blip r:embed="rId2"/>
+          <a:blip r:embed="rId5"/>
           <a:stretch>
             <a:fillRect/>
           </a:stretch>
         </p:blipFill>
         <p:spPr>
           <a:xfrm>
-            <a:off x="8670341" y="1852574"/>
+            <a:off x="879653" y="5693054"/>
             <a:ext cx="310896" cy="310896"/>
           </a:xfrm>
           <a:prstGeom prst="rect">
@@ -9938,30 +10866,30 @@
       </p:pic>
       <p:sp>
         <p:nvSpPr>
-          <p:cNvPr id="29" name="Text 25"/>
-          <p:cNvSpPr/>
-          <p:nvPr/>
-        </p:nvSpPr>
-        <p:spPr>
-          <a:xfrm>
-            <a:off x="9090965" y="1742846"/>
-            <a:ext cx="2221078" cy="237744"/>
-          </a:xfrm>
-          <a:prstGeom prst="rect">
-            <a:avLst/>
-          </a:prstGeom>
-          <a:noFill/>
-          <a:ln/>
-        </p:spPr>
-        <p:txBody>
-          <a:bodyPr wrap="square" lIns="0" tIns="0" rIns="0" bIns="0" rtlCol="0" anchor="ctr"/>
-          <a:lstStyle/>
-          <a:p>
-            <a:pPr indent="0" marL="0">
-              <a:buNone/>
-            </a:pPr>
-            <a:r>
-              <a:rPr lang="en-US" sz="1000" b="1" dirty="0">
+          <p:cNvPr id="17" name="Text 10"/>
+          <p:cNvSpPr/>
+          <p:nvPr/>
+        </p:nvSpPr>
+        <p:spPr>
+          <a:xfrm>
+            <a:off x="1281989" y="5546750"/>
+            <a:ext cx="2636215" cy="256032"/>
+          </a:xfrm>
+          <a:prstGeom prst="rect">
+            <a:avLst/>
+          </a:prstGeom>
+          <a:noFill/>
+          <a:ln/>
+        </p:spPr>
+        <p:txBody>
+          <a:bodyPr wrap="square" lIns="0" tIns="0" rIns="0" bIns="0" rtlCol="0" anchor="ctr"/>
+          <a:lstStyle/>
+          <a:p>
+            <a:pPr indent="0" marL="0">
+              <a:buNone/>
+            </a:pPr>
+            <a:r>
+              <a:rPr lang="en-US" sz="1050" b="1" dirty="0">
                 <a:solidFill>
                   <a:srgbClr val="106838"/>
                 </a:solidFill>
@@ -9969,22 +10897,22 @@
                 <a:ea typeface="Yu Gothic" pitchFamily="34" charset="-122"/>
                 <a:cs typeface="Yu Gothic" pitchFamily="34" charset="-120"/>
               </a:rPr>
-              <a:t>基準</a:t>
-            </a:r>
-            <a:endParaRPr lang="en-US" sz="1000" dirty="0"/>
-          </a:p>
-        </p:txBody>
-      </p:sp>
-      <p:sp>
-        <p:nvSpPr>
-          <p:cNvPr id="30" name="Text 26"/>
-          <p:cNvSpPr/>
-          <p:nvPr/>
-        </p:nvSpPr>
-        <p:spPr>
-          <a:xfrm>
-            <a:off x="9090965" y="1980590"/>
-            <a:ext cx="2221078" cy="329184"/>
+              <a:t>書架の間・壁面沿いに設置</a:t>
+            </a:r>
+            <a:endParaRPr lang="en-US" sz="1050" dirty="0"/>
+          </a:p>
+        </p:txBody>
+      </p:sp>
+      <p:sp>
+        <p:nvSpPr>
+          <p:cNvPr id="18" name="Text 11"/>
+          <p:cNvSpPr/>
+          <p:nvPr/>
+        </p:nvSpPr>
+        <p:spPr>
+          <a:xfrm>
+            <a:off x="1281989" y="5802782"/>
+            <a:ext cx="2636215" cy="402336"/>
           </a:xfrm>
           <a:prstGeom prst="rect">
             <a:avLst/>
@@ -9998,12 +10926,12 @@
           <a:p>
             <a:pPr indent="0" marL="0">
               <a:lnSpc>
-                <a:spcPct val="120000"/>
+                <a:spcPct val="125000"/>
               </a:lnSpc>
               <a:buNone/>
             </a:pPr>
             <a:r>
-              <a:rPr lang="en-US" sz="950" dirty="0">
+              <a:rPr lang="en-US" sz="900" dirty="0">
                 <a:solidFill>
                   <a:srgbClr val="0A3D23"/>
                 </a:solidFill>
@@ -10011,26 +10939,26 @@
                 <a:ea typeface="Yu Gothic" pitchFamily="34" charset="-122"/>
                 <a:cs typeface="Yu Gothic" pitchFamily="34" charset="-120"/>
               </a:rPr>
-              <a:t>書店併設2店の実績平均 1日42.9杯</a:t>
-            </a:r>
-            <a:endParaRPr lang="en-US" sz="950" dirty="0"/>
-          </a:p>
-        </p:txBody>
-      </p:sp>
-      <p:sp>
-        <p:nvSpPr>
-          <p:cNvPr id="31" name="Shape 27"/>
-          <p:cNvSpPr/>
-          <p:nvPr/>
-        </p:nvSpPr>
-        <p:spPr>
-          <a:xfrm>
-            <a:off x="8450885" y="2474366"/>
-            <a:ext cx="3080614" cy="731520"/>
+              <a:t>独立区画は不要。既存の什器配置を大きく変えずに席をつくれます。</a:t>
+            </a:r>
+            <a:endParaRPr lang="en-US" sz="900" dirty="0"/>
+          </a:p>
+        </p:txBody>
+      </p:sp>
+      <p:sp>
+        <p:nvSpPr>
+          <p:cNvPr id="19" name="Shape 12"/>
+          <p:cNvSpPr/>
+          <p:nvPr/>
+        </p:nvSpPr>
+        <p:spPr>
+          <a:xfrm>
+            <a:off x="4357116" y="5437022"/>
+            <a:ext cx="3477463" cy="859536"/>
           </a:xfrm>
           <a:prstGeom prst="roundRect">
             <a:avLst>
-              <a:gd name="adj" fmla="val 7500"/>
+              <a:gd name="adj" fmla="val 6383"/>
             </a:avLst>
           </a:prstGeom>
           <a:solidFill>
@@ -10046,21 +10974,21 @@
       </p:sp>
       <p:pic>
         <p:nvPicPr>
-          <p:cNvPr id="32" name="Image 2" descr="/home/user/suzuki-ceo/selfcafe-miraiya-deck/assets/icons/LuTrendingUp-green.png">    </p:cNvPr>
+          <p:cNvPr id="20" name="Image 5" descr="/home/user/suzuki-ceo/selfcafe-miraiya-deck/assets/icons/LuPlug-green.png">    </p:cNvPr>
           <p:cNvPicPr>
             <a:picLocks noChangeAspect="1"/>
           </p:cNvPicPr>
           <p:nvPr/>
         </p:nvPicPr>
         <p:blipFill>
-          <a:blip r:embed="rId3"/>
+          <a:blip r:embed="rId6"/>
           <a:stretch>
             <a:fillRect/>
           </a:stretch>
         </p:blipFill>
         <p:spPr>
           <a:xfrm>
-            <a:off x="8670341" y="2675534"/>
+            <a:off x="4576572" y="5693054"/>
             <a:ext cx="310896" cy="310896"/>
           </a:xfrm>
           <a:prstGeom prst="rect">
@@ -10070,30 +10998,30 @@
       </p:pic>
       <p:sp>
         <p:nvSpPr>
-          <p:cNvPr id="33" name="Text 28"/>
-          <p:cNvSpPr/>
-          <p:nvPr/>
-        </p:nvSpPr>
-        <p:spPr>
-          <a:xfrm>
-            <a:off x="9090965" y="2565806"/>
-            <a:ext cx="2221078" cy="237744"/>
-          </a:xfrm>
-          <a:prstGeom prst="rect">
-            <a:avLst/>
-          </a:prstGeom>
-          <a:noFill/>
-          <a:ln/>
-        </p:spPr>
-        <p:txBody>
-          <a:bodyPr wrap="square" lIns="0" tIns="0" rIns="0" bIns="0" rtlCol="0" anchor="ctr"/>
-          <a:lstStyle/>
-          <a:p>
-            <a:pPr indent="0" marL="0">
-              <a:buNone/>
-            </a:pPr>
-            <a:r>
-              <a:rPr lang="en-US" sz="1000" b="1" dirty="0">
+          <p:cNvPr id="21" name="Text 13"/>
+          <p:cNvSpPr/>
+          <p:nvPr/>
+        </p:nvSpPr>
+        <p:spPr>
+          <a:xfrm>
+            <a:off x="4978908" y="5546750"/>
+            <a:ext cx="2636215" cy="256032"/>
+          </a:xfrm>
+          <a:prstGeom prst="rect">
+            <a:avLst/>
+          </a:prstGeom>
+          <a:noFill/>
+          <a:ln/>
+        </p:spPr>
+        <p:txBody>
+          <a:bodyPr wrap="square" lIns="0" tIns="0" rIns="0" bIns="0" rtlCol="0" anchor="ctr"/>
+          <a:lstStyle/>
+          <a:p>
+            <a:pPr indent="0" marL="0">
+              <a:buNone/>
+            </a:pPr>
+            <a:r>
+              <a:rPr lang="en-US" sz="1050" b="1" dirty="0">
                 <a:solidFill>
                   <a:srgbClr val="106838"/>
                 </a:solidFill>
@@ -10101,22 +11029,22 @@
                 <a:ea typeface="Yu Gothic" pitchFamily="34" charset="-122"/>
                 <a:cs typeface="Yu Gothic" pitchFamily="34" charset="-120"/>
               </a:rPr>
-              <a:t>係数</a:t>
-            </a:r>
-            <a:endParaRPr lang="en-US" sz="1000" dirty="0"/>
-          </a:p>
-        </p:txBody>
-      </p:sp>
-      <p:sp>
-        <p:nvSpPr>
-          <p:cNvPr id="34" name="Text 29"/>
-          <p:cNvSpPr/>
-          <p:nvPr/>
-        </p:nvSpPr>
-        <p:spPr>
-          <a:xfrm>
-            <a:off x="9090965" y="2803550"/>
-            <a:ext cx="2221078" cy="329184"/>
+              <a:t>各席に電源とWi-Fi</a:t>
+            </a:r>
+            <a:endParaRPr lang="en-US" sz="1050" dirty="0"/>
+          </a:p>
+        </p:txBody>
+      </p:sp>
+      <p:sp>
+        <p:nvSpPr>
+          <p:cNvPr id="22" name="Text 14"/>
+          <p:cNvSpPr/>
+          <p:nvPr/>
+        </p:nvSpPr>
+        <p:spPr>
+          <a:xfrm>
+            <a:off x="4978908" y="5802782"/>
+            <a:ext cx="2636215" cy="402336"/>
           </a:xfrm>
           <a:prstGeom prst="rect">
             <a:avLst/>
@@ -10130,12 +11058,12 @@
           <a:p>
             <a:pPr indent="0" marL="0">
               <a:lnSpc>
-                <a:spcPct val="120000"/>
+                <a:spcPct val="125000"/>
               </a:lnSpc>
               <a:buNone/>
             </a:pPr>
             <a:r>
-              <a:rPr lang="en-US" sz="950" dirty="0">
+              <a:rPr lang="en-US" sz="900" dirty="0">
                 <a:solidFill>
                   <a:srgbClr val="0A3D23"/>
                 </a:solidFill>
@@ -10143,26 +11071,26 @@
                 <a:ea typeface="Yu Gothic" pitchFamily="34" charset="-122"/>
                 <a:cs typeface="Yu Gothic" pitchFamily="34" charset="-120"/>
               </a:rPr>
-              <a:t>館内の通行量・映画館隣接を踏まえ 約1.5倍</a:t>
-            </a:r>
-            <a:endParaRPr lang="en-US" sz="950" dirty="0"/>
-          </a:p>
-        </p:txBody>
-      </p:sp>
-      <p:sp>
-        <p:nvSpPr>
-          <p:cNvPr id="35" name="Shape 30"/>
-          <p:cNvSpPr/>
-          <p:nvPr/>
-        </p:nvSpPr>
-        <p:spPr>
-          <a:xfrm>
-            <a:off x="8450885" y="3297326"/>
-            <a:ext cx="3080614" cy="731520"/>
+              <a:t>長時間の滞在に耐える設えで、書店の滞在時間もあわせて伸びます。</a:t>
+            </a:r>
+            <a:endParaRPr lang="en-US" sz="900" dirty="0"/>
+          </a:p>
+        </p:txBody>
+      </p:sp>
+      <p:sp>
+        <p:nvSpPr>
+          <p:cNvPr id="23" name="Shape 15"/>
+          <p:cNvSpPr/>
+          <p:nvPr/>
+        </p:nvSpPr>
+        <p:spPr>
+          <a:xfrm>
+            <a:off x="8054035" y="5437022"/>
+            <a:ext cx="3477463" cy="859536"/>
           </a:xfrm>
           <a:prstGeom prst="roundRect">
             <a:avLst>
-              <a:gd name="adj" fmla="val 7500"/>
+              <a:gd name="adj" fmla="val 6383"/>
             </a:avLst>
           </a:prstGeom>
           <a:solidFill>
@@ -10178,21 +11106,21 @@
       </p:sp>
       <p:pic>
         <p:nvPicPr>
-          <p:cNvPr id="36" name="Image 3" descr="/home/user/suzuki-ceo/selfcafe-miraiya-deck/assets/icons/LuUsers-green.png">    </p:cNvPr>
+          <p:cNvPr id="24" name="Image 6" descr="/home/user/suzuki-ceo/selfcafe-miraiya-deck/assets/icons/LuUsers-green.png">    </p:cNvPr>
           <p:cNvPicPr>
             <a:picLocks noChangeAspect="1"/>
           </p:cNvPicPr>
           <p:nvPr/>
         </p:nvPicPr>
         <p:blipFill>
-          <a:blip r:embed="rId4"/>
+          <a:blip r:embed="rId7"/>
           <a:stretch>
             <a:fillRect/>
           </a:stretch>
         </p:blipFill>
         <p:spPr>
           <a:xfrm>
-            <a:off x="8670341" y="3498494"/>
+            <a:off x="8273491" y="5693054"/>
             <a:ext cx="310896" cy="310896"/>
           </a:xfrm>
           <a:prstGeom prst="rect">
@@ -10202,30 +11130,30 @@
       </p:pic>
       <p:sp>
         <p:nvSpPr>
-          <p:cNvPr id="37" name="Text 31"/>
-          <p:cNvSpPr/>
-          <p:nvPr/>
-        </p:nvSpPr>
-        <p:spPr>
-          <a:xfrm>
-            <a:off x="9090965" y="3388766"/>
-            <a:ext cx="2221078" cy="237744"/>
-          </a:xfrm>
-          <a:prstGeom prst="rect">
-            <a:avLst/>
-          </a:prstGeom>
-          <a:noFill/>
-          <a:ln/>
-        </p:spPr>
-        <p:txBody>
-          <a:bodyPr wrap="square" lIns="0" tIns="0" rIns="0" bIns="0" rtlCol="0" anchor="ctr"/>
-          <a:lstStyle/>
-          <a:p>
-            <a:pPr indent="0" marL="0">
-              <a:buNone/>
-            </a:pPr>
-            <a:r>
-              <a:rPr lang="en-US" sz="1000" b="1" dirty="0">
+          <p:cNvPr id="25" name="Text 16"/>
+          <p:cNvSpPr/>
+          <p:nvPr/>
+        </p:nvSpPr>
+        <p:spPr>
+          <a:xfrm>
+            <a:off x="8675827" y="5546750"/>
+            <a:ext cx="2636215" cy="256032"/>
+          </a:xfrm>
+          <a:prstGeom prst="rect">
+            <a:avLst/>
+          </a:prstGeom>
+          <a:noFill/>
+          <a:ln/>
+        </p:spPr>
+        <p:txBody>
+          <a:bodyPr wrap="square" lIns="0" tIns="0" rIns="0" bIns="0" rtlCol="0" anchor="ctr"/>
+          <a:lstStyle/>
+          <a:p>
+            <a:pPr indent="0" marL="0">
+              <a:buNone/>
+            </a:pPr>
+            <a:r>
+              <a:rPr lang="en-US" sz="1050" b="1" dirty="0">
                 <a:solidFill>
                   <a:srgbClr val="106838"/>
                 </a:solidFill>
@@ -10233,22 +11161,22 @@
                 <a:ea typeface="Yu Gothic" pitchFamily="34" charset="-122"/>
                 <a:cs typeface="Yu Gothic" pitchFamily="34" charset="-120"/>
               </a:rPr>
-              <a:t>席数で配分</a:t>
-            </a:r>
-            <a:endParaRPr lang="en-US" sz="1000" dirty="0"/>
-          </a:p>
-        </p:txBody>
-      </p:sp>
-      <p:sp>
-        <p:nvSpPr>
-          <p:cNvPr id="38" name="Text 32"/>
-          <p:cNvSpPr/>
-          <p:nvPr/>
-        </p:nvSpPr>
-        <p:spPr>
-          <a:xfrm>
-            <a:off x="9090965" y="3626510"/>
-            <a:ext cx="2221078" cy="329184"/>
+              <a:t>レジ・接客は発生しない</a:t>
+            </a:r>
+            <a:endParaRPr lang="en-US" sz="1050" dirty="0"/>
+          </a:p>
+        </p:txBody>
+      </p:sp>
+      <p:sp>
+        <p:nvSpPr>
+          <p:cNvPr id="26" name="Text 17"/>
+          <p:cNvSpPr/>
+          <p:nvPr/>
+        </p:nvSpPr>
+        <p:spPr>
+          <a:xfrm>
+            <a:off x="8675827" y="5802782"/>
+            <a:ext cx="2636215" cy="402336"/>
           </a:xfrm>
           <a:prstGeom prst="rect">
             <a:avLst/>
@@ -10262,12 +11190,12 @@
           <a:p>
             <a:pPr indent="0" marL="0">
               <a:lnSpc>
-                <a:spcPct val="120000"/>
+                <a:spcPct val="125000"/>
               </a:lnSpc>
               <a:buNone/>
             </a:pPr>
             <a:r>
-              <a:rPr lang="en-US" sz="950" dirty="0">
+              <a:rPr lang="en-US" sz="900" dirty="0">
                 <a:solidFill>
                   <a:srgbClr val="0A3D23"/>
                 </a:solidFill>
@@ -10275,225 +11203,21 @@
                 <a:ea typeface="Yu Gothic" pitchFamily="34" charset="-122"/>
                 <a:cs typeface="Yu Gothic" pitchFamily="34" charset="-120"/>
               </a:rPr>
-              <a:t>秋田73席＝70杯／土浦59席＝60杯</a:t>
-            </a:r>
-            <a:endParaRPr lang="en-US" sz="950" dirty="0"/>
-          </a:p>
-        </p:txBody>
-      </p:sp>
-      <p:sp>
-        <p:nvSpPr>
-          <p:cNvPr id="39" name="Shape 33"/>
-          <p:cNvSpPr/>
-          <p:nvPr/>
-        </p:nvSpPr>
-        <p:spPr>
-          <a:xfrm>
-            <a:off x="8450885" y="4120286"/>
-            <a:ext cx="3080614" cy="731520"/>
-          </a:xfrm>
-          <a:prstGeom prst="roundRect">
-            <a:avLst>
-              <a:gd name="adj" fmla="val 7500"/>
-            </a:avLst>
-          </a:prstGeom>
-          <a:solidFill>
-            <a:srgbClr val="F1F8F3"/>
-          </a:solidFill>
-          <a:ln w="9525">
-            <a:solidFill>
-              <a:srgbClr val="D2E7DA"/>
-            </a:solidFill>
-            <a:prstDash val="solid"/>
-          </a:ln>
-        </p:spPr>
-      </p:sp>
-      <p:pic>
-        <p:nvPicPr>
-          <p:cNvPr id="40" name="Image 4" descr="/home/user/suzuki-ceo/selfcafe-miraiya-deck/assets/icons/LuShieldCheck-green.png">    </p:cNvPr>
-          <p:cNvPicPr>
-            <a:picLocks noChangeAspect="1"/>
-          </p:cNvPicPr>
-          <p:nvPr/>
-        </p:nvPicPr>
-        <p:blipFill>
-          <a:blip r:embed="rId5"/>
-          <a:stretch>
-            <a:fillRect/>
-          </a:stretch>
-        </p:blipFill>
-        <p:spPr>
-          <a:xfrm>
-            <a:off x="8670341" y="4321454"/>
-            <a:ext cx="310896" cy="310896"/>
-          </a:xfrm>
-          <a:prstGeom prst="rect">
-            <a:avLst/>
-          </a:prstGeom>
-        </p:spPr>
-      </p:pic>
-      <p:sp>
-        <p:nvSpPr>
-          <p:cNvPr id="41" name="Text 34"/>
-          <p:cNvSpPr/>
-          <p:nvPr/>
-        </p:nvSpPr>
-        <p:spPr>
-          <a:xfrm>
-            <a:off x="9090965" y="4211726"/>
-            <a:ext cx="2221078" cy="237744"/>
-          </a:xfrm>
-          <a:prstGeom prst="rect">
-            <a:avLst/>
-          </a:prstGeom>
-          <a:noFill/>
-          <a:ln/>
-        </p:spPr>
-        <p:txBody>
-          <a:bodyPr wrap="square" lIns="0" tIns="0" rIns="0" bIns="0" rtlCol="0" anchor="ctr"/>
-          <a:lstStyle/>
-          <a:p>
-            <a:pPr indent="0" marL="0">
-              <a:buNone/>
-            </a:pPr>
-            <a:r>
-              <a:rPr lang="en-US" sz="1000" b="1" dirty="0">
-                <a:solidFill>
-                  <a:srgbClr val="106838"/>
-                </a:solidFill>
-                <a:latin typeface="Yu Gothic" pitchFamily="34" charset="0"/>
-                <a:ea typeface="Yu Gothic" pitchFamily="34" charset="-122"/>
-                <a:cs typeface="Yu Gothic" pitchFamily="34" charset="-120"/>
-              </a:rPr>
-              <a:t>妥当性</a:t>
-            </a:r>
-            <a:endParaRPr lang="en-US" sz="1000" dirty="0"/>
-          </a:p>
-        </p:txBody>
-      </p:sp>
-      <p:sp>
-        <p:nvSpPr>
-          <p:cNvPr id="42" name="Text 35"/>
-          <p:cNvSpPr/>
-          <p:nvPr/>
-        </p:nvSpPr>
-        <p:spPr>
-          <a:xfrm>
-            <a:off x="9090965" y="4449470"/>
-            <a:ext cx="2221078" cy="329184"/>
-          </a:xfrm>
-          <a:prstGeom prst="rect">
-            <a:avLst/>
-          </a:prstGeom>
-          <a:noFill/>
-          <a:ln/>
-        </p:spPr>
-        <p:txBody>
-          <a:bodyPr wrap="square" lIns="0" tIns="0" rIns="0" bIns="0" rtlCol="0" anchor="t"/>
-          <a:lstStyle/>
-          <a:p>
-            <a:pPr indent="0" marL="0">
-              <a:lnSpc>
-                <a:spcPct val="120000"/>
-              </a:lnSpc>
-              <a:buNone/>
-            </a:pPr>
-            <a:r>
-              <a:rPr lang="en-US" sz="950" dirty="0">
-                <a:solidFill>
-                  <a:srgbClr val="0A3D23"/>
-                </a:solidFill>
-                <a:latin typeface="Yu Gothic" pitchFamily="34" charset="0"/>
-                <a:ea typeface="Yu Gothic" pitchFamily="34" charset="-122"/>
-                <a:cs typeface="Yu Gothic" pitchFamily="34" charset="-120"/>
-              </a:rPr>
-              <a:t>ささしまライブ店の実績の約半分の水準</a:t>
-            </a:r>
-            <a:endParaRPr lang="en-US" sz="950" dirty="0"/>
-          </a:p>
-        </p:txBody>
-      </p:sp>
-      <p:sp>
-        <p:nvSpPr>
-          <p:cNvPr id="43" name="Shape 36"/>
-          <p:cNvSpPr/>
-          <p:nvPr/>
-        </p:nvSpPr>
-        <p:spPr>
-          <a:xfrm>
-            <a:off x="660197" y="5052974"/>
-            <a:ext cx="10871302" cy="768096"/>
-          </a:xfrm>
-          <a:prstGeom prst="roundRect">
-            <a:avLst>
-              <a:gd name="adj" fmla="val 7143"/>
-            </a:avLst>
-          </a:prstGeom>
-          <a:solidFill>
-            <a:srgbClr val="0C5230"/>
-          </a:solidFill>
-          <a:ln/>
-        </p:spPr>
-      </p:sp>
-      <p:sp>
-        <p:nvSpPr>
-          <p:cNvPr id="44" name="Text 37"/>
-          <p:cNvSpPr/>
-          <p:nvPr/>
-        </p:nvSpPr>
-        <p:spPr>
-          <a:xfrm>
-            <a:off x="971093" y="5052974"/>
-            <a:ext cx="10249510" cy="768096"/>
-          </a:xfrm>
-          <a:prstGeom prst="rect">
-            <a:avLst/>
-          </a:prstGeom>
-          <a:noFill/>
-          <a:ln/>
-        </p:spPr>
-        <p:txBody>
-          <a:bodyPr wrap="square" lIns="0" tIns="0" rIns="0" bIns="0" rtlCol="0" anchor="ctr"/>
-          <a:lstStyle/>
-          <a:p>
-            <a:pPr indent="0" marL="0">
-              <a:buNone/>
-            </a:pPr>
-            <a:r>
-              <a:rPr lang="en-US" sz="1150" b="1" dirty="0">
-                <a:solidFill>
-                  <a:srgbClr val="FFFFFF"/>
-                </a:solidFill>
-                <a:latin typeface="Yu Gothic" pitchFamily="34" charset="0"/>
-                <a:ea typeface="Yu Gothic" pitchFamily="34" charset="-122"/>
-                <a:cs typeface="Yu Gothic" pitchFamily="34" charset="-120"/>
-              </a:rPr>
-              <a:t>来客に対する購入率でみると、秋田店は約56％・土浦店は約45％。</a:t>
-            </a:r>
-            <a:r>
-              <a:rPr lang="en-US" sz="1100" dirty="0">
-                <a:solidFill>
-                  <a:srgbClr val="AFC2B8"/>
-                </a:solidFill>
-                <a:latin typeface="Yu Gothic" pitchFamily="34" charset="0"/>
-                <a:ea typeface="Yu Gothic" pitchFamily="34" charset="-122"/>
-                <a:cs typeface="Yu Gothic" pitchFamily="34" charset="-120"/>
-              </a:rPr>
-              <a:t>  ご来店のおよそ半数が1杯ご購入いただく水準です。</a:t>
-            </a:r>
-            <a:endParaRPr lang="en-US" sz="1150" dirty="0"/>
-          </a:p>
-        </p:txBody>
-      </p:sp>
-      <p:sp>
-        <p:nvSpPr>
-          <p:cNvPr id="45" name="Text 38"/>
-          <p:cNvSpPr/>
-          <p:nvPr/>
-        </p:nvSpPr>
-        <p:spPr>
-          <a:xfrm>
-            <a:off x="660197" y="6272784"/>
+              <a:t>ドリンクはセルフのマシン。書店スタッフの手は一切かかりません。</a:t>
+            </a:r>
+            <a:endParaRPr lang="en-US" sz="900" dirty="0"/>
+          </a:p>
+        </p:txBody>
+      </p:sp>
+      <p:sp>
+        <p:nvSpPr>
+          <p:cNvPr id="27" name="Text 18"/>
+          <p:cNvSpPr/>
+          <p:nvPr/>
+        </p:nvSpPr>
+        <p:spPr>
+          <a:xfrm>
+            <a:off x="660197" y="6387998"/>
             <a:ext cx="10871302" cy="182880"/>
           </a:xfrm>
           <a:prstGeom prst="rect">
@@ -10518,7 +11242,7 @@
                 <a:ea typeface="Yu Gothic" pitchFamily="34" charset="-122"/>
                 <a:cs typeface="Yu Gothic" pitchFamily="34" charset="-120"/>
               </a:rPr>
-              <a:t>※ 想定値であり、売上を保証するものではありません。実際の販売杯数は立地・季節・館内の動線により変動します。</a:t>
+              <a:t>写真：セルフカフェ 印西牧の原店（千葉県印西市／未来屋書店様 併設）。</a:t>
             </a:r>
             <a:endParaRPr lang="en-US" sz="850" dirty="0"/>
           </a:p>
@@ -10620,7 +11344,7 @@
                 <a:ea typeface="Yu Gothic" pitchFamily="34" charset="-122"/>
                 <a:cs typeface="Yu Gothic" pitchFamily="34" charset="-120"/>
               </a:rPr>
-              <a:t>   収益シミュレーション</a:t>
+              <a:t>   前提の考え方</a:t>
             </a:r>
             <a:endParaRPr lang="en-US" sz="1050" dirty="0"/>
           </a:p>
@@ -10659,7 +11383,7 @@
                 <a:ea typeface="Yu Gothic" pitchFamily="34" charset="-122"/>
                 <a:cs typeface="Yu Gothic" pitchFamily="34" charset="-120"/>
               </a:rPr>
-              <a:t>秋田店 のお受取イメージ</a:t>
+              <a:t>実績を基準に、控えめに置いた想定です。</a:t>
             </a:r>
             <a:endParaRPr lang="en-US" sz="2900" dirty="0"/>
           </a:p>
@@ -10698,7 +11422,7 @@
                 <a:ea typeface="Yu Gothic" pitchFamily="34" charset="-122"/>
                 <a:cs typeface="Yu Gothic" pitchFamily="34" charset="-120"/>
               </a:rPr>
-              <a:t>62.97坪／73席／想定 1日70杯・1杯420円（税抜）で試算しています。</a:t>
+              <a:t>商業施設内・映画館隣接という条件を踏まえ、実績平均の1.5倍程度を想定しました。</a:t>
             </a:r>
             <a:endParaRPr lang="en-US" sz="1250" dirty="0"/>
           </a:p>
@@ -10806,9 +11530,1535 @@
           </a:p>
         </p:txBody>
       </p:sp>
+      <p:sp>
+        <p:nvSpPr>
+          <p:cNvPr id="9" name="Shape 6"/>
+          <p:cNvSpPr/>
+          <p:nvPr/>
+        </p:nvSpPr>
+        <p:spPr>
+          <a:xfrm>
+            <a:off x="660197" y="1651406"/>
+            <a:ext cx="7406640" cy="3200400"/>
+          </a:xfrm>
+          <a:prstGeom prst="roundRect">
+            <a:avLst>
+              <a:gd name="adj" fmla="val 1714"/>
+            </a:avLst>
+          </a:prstGeom>
+          <a:solidFill>
+            <a:srgbClr val="FFFFFF"/>
+          </a:solidFill>
+          <a:ln w="9525">
+            <a:solidFill>
+              <a:srgbClr val="EFEAE0"/>
+            </a:solidFill>
+            <a:prstDash val="solid"/>
+          </a:ln>
+        </p:spPr>
+      </p:sp>
+      <p:sp>
+        <p:nvSpPr>
+          <p:cNvPr id="10" name="Text 7"/>
+          <p:cNvSpPr/>
+          <p:nvPr/>
+        </p:nvSpPr>
+        <p:spPr>
+          <a:xfrm>
+            <a:off x="934517" y="1834286"/>
+            <a:ext cx="6858000" cy="256032"/>
+          </a:xfrm>
+          <a:prstGeom prst="rect">
+            <a:avLst/>
+          </a:prstGeom>
+          <a:noFill/>
+          <a:ln/>
+        </p:spPr>
+        <p:txBody>
+          <a:bodyPr wrap="square" lIns="0" tIns="0" rIns="0" bIns="0" rtlCol="0" anchor="ctr"/>
+          <a:lstStyle/>
+          <a:p>
+            <a:pPr indent="0" marL="0">
+              <a:buNone/>
+            </a:pPr>
+            <a:r>
+              <a:rPr lang="en-US" sz="1100" b="1" dirty="0">
+                <a:solidFill>
+                  <a:srgbClr val="0A3D23"/>
+                </a:solidFill>
+                <a:latin typeface="Yu Gothic" pitchFamily="34" charset="0"/>
+                <a:ea typeface="Yu Gothic" pitchFamily="34" charset="-122"/>
+                <a:cs typeface="Yu Gothic" pitchFamily="34" charset="-120"/>
+              </a:rPr>
+              <a:t>1日あたりの販売杯数の比較</a:t>
+            </a:r>
+            <a:endParaRPr lang="en-US" sz="1100" dirty="0"/>
+          </a:p>
+        </p:txBody>
+      </p:sp>
+      <p:sp>
+        <p:nvSpPr>
+          <p:cNvPr id="11" name="Text 8"/>
+          <p:cNvSpPr/>
+          <p:nvPr/>
+        </p:nvSpPr>
+        <p:spPr>
+          <a:xfrm>
+            <a:off x="934517" y="2254910"/>
+            <a:ext cx="2157984" cy="310896"/>
+          </a:xfrm>
+          <a:prstGeom prst="rect">
+            <a:avLst/>
+          </a:prstGeom>
+          <a:noFill/>
+          <a:ln/>
+        </p:spPr>
+        <p:txBody>
+          <a:bodyPr wrap="square" lIns="0" tIns="0" rIns="0" bIns="0" rtlCol="0" anchor="ctr"/>
+          <a:lstStyle/>
+          <a:p>
+            <a:pPr indent="0" marL="0">
+              <a:buNone/>
+            </a:pPr>
+            <a:r>
+              <a:rPr lang="en-US" sz="950" dirty="0">
+                <a:solidFill>
+                  <a:srgbClr val="7E8882"/>
+                </a:solidFill>
+                <a:latin typeface="Yu Gothic" pitchFamily="34" charset="0"/>
+                <a:ea typeface="Yu Gothic" pitchFamily="34" charset="-122"/>
+                <a:cs typeface="Yu Gothic" pitchFamily="34" charset="-120"/>
+              </a:rPr>
+              <a:t>印西牧の原店（実績）</a:t>
+            </a:r>
+            <a:endParaRPr lang="en-US" sz="950" dirty="0"/>
+          </a:p>
+        </p:txBody>
+      </p:sp>
+      <p:sp>
+        <p:nvSpPr>
+          <p:cNvPr id="12" name="Shape 9"/>
+          <p:cNvSpPr/>
+          <p:nvPr/>
+        </p:nvSpPr>
+        <p:spPr>
+          <a:xfrm>
+            <a:off x="3129077" y="2300630"/>
+            <a:ext cx="1313641" cy="219456"/>
+          </a:xfrm>
+          <a:prstGeom prst="roundRect">
+            <a:avLst>
+              <a:gd name="adj" fmla="val 20833"/>
+            </a:avLst>
+          </a:prstGeom>
+          <a:solidFill>
+            <a:srgbClr val="9CC3AA"/>
+          </a:solidFill>
+          <a:ln/>
+        </p:spPr>
+      </p:sp>
+      <p:sp>
+        <p:nvSpPr>
+          <p:cNvPr id="13" name="Text 10"/>
+          <p:cNvSpPr/>
+          <p:nvPr/>
+        </p:nvSpPr>
+        <p:spPr>
+          <a:xfrm>
+            <a:off x="4534158" y="2254910"/>
+            <a:ext cx="914400" cy="310896"/>
+          </a:xfrm>
+          <a:prstGeom prst="rect">
+            <a:avLst/>
+          </a:prstGeom>
+          <a:noFill/>
+          <a:ln/>
+        </p:spPr>
+        <p:txBody>
+          <a:bodyPr wrap="square" lIns="0" tIns="0" rIns="0" bIns="0" rtlCol="0" anchor="ctr"/>
+          <a:lstStyle/>
+          <a:p>
+            <a:pPr indent="0" marL="0">
+              <a:buNone/>
+            </a:pPr>
+            <a:r>
+              <a:rPr lang="en-US" sz="1000" b="1" dirty="0">
+                <a:solidFill>
+                  <a:srgbClr val="7E8882"/>
+                </a:solidFill>
+                <a:latin typeface="Yu Gothic" pitchFamily="34" charset="0"/>
+                <a:ea typeface="Yu Gothic" pitchFamily="34" charset="-122"/>
+                <a:cs typeface="Yu Gothic" pitchFamily="34" charset="-120"/>
+              </a:rPr>
+              <a:t>40.6 杯</a:t>
+            </a:r>
+            <a:endParaRPr lang="en-US" sz="1000" dirty="0"/>
+          </a:p>
+        </p:txBody>
+      </p:sp>
+      <p:sp>
+        <p:nvSpPr>
+          <p:cNvPr id="14" name="Text 11"/>
+          <p:cNvSpPr/>
+          <p:nvPr/>
+        </p:nvSpPr>
+        <p:spPr>
+          <a:xfrm>
+            <a:off x="934517" y="2757830"/>
+            <a:ext cx="2157984" cy="310896"/>
+          </a:xfrm>
+          <a:prstGeom prst="rect">
+            <a:avLst/>
+          </a:prstGeom>
+          <a:noFill/>
+          <a:ln/>
+        </p:spPr>
+        <p:txBody>
+          <a:bodyPr wrap="square" lIns="0" tIns="0" rIns="0" bIns="0" rtlCol="0" anchor="ctr"/>
+          <a:lstStyle/>
+          <a:p>
+            <a:pPr indent="0" marL="0">
+              <a:buNone/>
+            </a:pPr>
+            <a:r>
+              <a:rPr lang="en-US" sz="950" dirty="0">
+                <a:solidFill>
+                  <a:srgbClr val="7E8882"/>
+                </a:solidFill>
+                <a:latin typeface="Yu Gothic" pitchFamily="34" charset="0"/>
+                <a:ea typeface="Yu Gothic" pitchFamily="34" charset="-122"/>
+                <a:cs typeface="Yu Gothic" pitchFamily="34" charset="-120"/>
+              </a:rPr>
+              <a:t>新守山店（実績）</a:t>
+            </a:r>
+            <a:endParaRPr lang="en-US" sz="950" dirty="0"/>
+          </a:p>
+        </p:txBody>
+      </p:sp>
+      <p:sp>
+        <p:nvSpPr>
+          <p:cNvPr id="15" name="Shape 12"/>
+          <p:cNvSpPr/>
+          <p:nvPr/>
+        </p:nvSpPr>
+        <p:spPr>
+          <a:xfrm>
+            <a:off x="3129077" y="2803550"/>
+            <a:ext cx="1462477" cy="219456"/>
+          </a:xfrm>
+          <a:prstGeom prst="roundRect">
+            <a:avLst>
+              <a:gd name="adj" fmla="val 20833"/>
+            </a:avLst>
+          </a:prstGeom>
+          <a:solidFill>
+            <a:srgbClr val="9CC3AA"/>
+          </a:solidFill>
+          <a:ln/>
+        </p:spPr>
+      </p:sp>
+      <p:sp>
+        <p:nvSpPr>
+          <p:cNvPr id="16" name="Text 13"/>
+          <p:cNvSpPr/>
+          <p:nvPr/>
+        </p:nvSpPr>
+        <p:spPr>
+          <a:xfrm>
+            <a:off x="4682994" y="2757830"/>
+            <a:ext cx="914400" cy="310896"/>
+          </a:xfrm>
+          <a:prstGeom prst="rect">
+            <a:avLst/>
+          </a:prstGeom>
+          <a:noFill/>
+          <a:ln/>
+        </p:spPr>
+        <p:txBody>
+          <a:bodyPr wrap="square" lIns="0" tIns="0" rIns="0" bIns="0" rtlCol="0" anchor="ctr"/>
+          <a:lstStyle/>
+          <a:p>
+            <a:pPr indent="0" marL="0">
+              <a:buNone/>
+            </a:pPr>
+            <a:r>
+              <a:rPr lang="en-US" sz="1000" b="1" dirty="0">
+                <a:solidFill>
+                  <a:srgbClr val="7E8882"/>
+                </a:solidFill>
+                <a:latin typeface="Yu Gothic" pitchFamily="34" charset="0"/>
+                <a:ea typeface="Yu Gothic" pitchFamily="34" charset="-122"/>
+                <a:cs typeface="Yu Gothic" pitchFamily="34" charset="-120"/>
+              </a:rPr>
+              <a:t>45.2 杯</a:t>
+            </a:r>
+            <a:endParaRPr lang="en-US" sz="1000" dirty="0"/>
+          </a:p>
+        </p:txBody>
+      </p:sp>
+      <p:sp>
+        <p:nvSpPr>
+          <p:cNvPr id="17" name="Text 14"/>
+          <p:cNvSpPr/>
+          <p:nvPr/>
+        </p:nvSpPr>
+        <p:spPr>
+          <a:xfrm>
+            <a:off x="934517" y="3260750"/>
+            <a:ext cx="2157984" cy="310896"/>
+          </a:xfrm>
+          <a:prstGeom prst="rect">
+            <a:avLst/>
+          </a:prstGeom>
+          <a:noFill/>
+          <a:ln/>
+        </p:spPr>
+        <p:txBody>
+          <a:bodyPr wrap="square" lIns="0" tIns="0" rIns="0" bIns="0" rtlCol="0" anchor="ctr"/>
+          <a:lstStyle/>
+          <a:p>
+            <a:pPr indent="0" marL="0">
+              <a:buNone/>
+            </a:pPr>
+            <a:r>
+              <a:rPr lang="en-US" sz="950" b="1" dirty="0">
+                <a:solidFill>
+                  <a:srgbClr val="0A3D23"/>
+                </a:solidFill>
+                <a:latin typeface="Yu Gothic" pitchFamily="34" charset="0"/>
+                <a:ea typeface="Yu Gothic" pitchFamily="34" charset="-122"/>
+                <a:cs typeface="Yu Gothic" pitchFamily="34" charset="-120"/>
+              </a:rPr>
+              <a:t>土浦店（想定）</a:t>
+            </a:r>
+            <a:endParaRPr lang="en-US" sz="950" dirty="0"/>
+          </a:p>
+        </p:txBody>
+      </p:sp>
+      <p:sp>
+        <p:nvSpPr>
+          <p:cNvPr id="18" name="Shape 15"/>
+          <p:cNvSpPr/>
+          <p:nvPr/>
+        </p:nvSpPr>
+        <p:spPr>
+          <a:xfrm>
+            <a:off x="3129077" y="3306470"/>
+            <a:ext cx="1941342" cy="219456"/>
+          </a:xfrm>
+          <a:prstGeom prst="roundRect">
+            <a:avLst>
+              <a:gd name="adj" fmla="val 20833"/>
+            </a:avLst>
+          </a:prstGeom>
+          <a:solidFill>
+            <a:srgbClr val="A8761F"/>
+          </a:solidFill>
+          <a:ln/>
+        </p:spPr>
+      </p:sp>
+      <p:sp>
+        <p:nvSpPr>
+          <p:cNvPr id="19" name="Text 16"/>
+          <p:cNvSpPr/>
+          <p:nvPr/>
+        </p:nvSpPr>
+        <p:spPr>
+          <a:xfrm>
+            <a:off x="5161858" y="3260750"/>
+            <a:ext cx="914400" cy="310896"/>
+          </a:xfrm>
+          <a:prstGeom prst="rect">
+            <a:avLst/>
+          </a:prstGeom>
+          <a:noFill/>
+          <a:ln/>
+        </p:spPr>
+        <p:txBody>
+          <a:bodyPr wrap="square" lIns="0" tIns="0" rIns="0" bIns="0" rtlCol="0" anchor="ctr"/>
+          <a:lstStyle/>
+          <a:p>
+            <a:pPr indent="0" marL="0">
+              <a:buNone/>
+            </a:pPr>
+            <a:r>
+              <a:rPr lang="en-US" sz="1000" b="1" dirty="0">
+                <a:solidFill>
+                  <a:srgbClr val="A8761F"/>
+                </a:solidFill>
+                <a:latin typeface="Yu Gothic" pitchFamily="34" charset="0"/>
+                <a:ea typeface="Yu Gothic" pitchFamily="34" charset="-122"/>
+                <a:cs typeface="Yu Gothic" pitchFamily="34" charset="-120"/>
+              </a:rPr>
+              <a:t>60 杯</a:t>
+            </a:r>
+            <a:endParaRPr lang="en-US" sz="1000" dirty="0"/>
+          </a:p>
+        </p:txBody>
+      </p:sp>
+      <p:sp>
+        <p:nvSpPr>
+          <p:cNvPr id="20" name="Text 17"/>
+          <p:cNvSpPr/>
+          <p:nvPr/>
+        </p:nvSpPr>
+        <p:spPr>
+          <a:xfrm>
+            <a:off x="934517" y="3763670"/>
+            <a:ext cx="2157984" cy="310896"/>
+          </a:xfrm>
+          <a:prstGeom prst="rect">
+            <a:avLst/>
+          </a:prstGeom>
+          <a:noFill/>
+          <a:ln/>
+        </p:spPr>
+        <p:txBody>
+          <a:bodyPr wrap="square" lIns="0" tIns="0" rIns="0" bIns="0" rtlCol="0" anchor="ctr"/>
+          <a:lstStyle/>
+          <a:p>
+            <a:pPr indent="0" marL="0">
+              <a:buNone/>
+            </a:pPr>
+            <a:r>
+              <a:rPr lang="en-US" sz="950" b="1" dirty="0">
+                <a:solidFill>
+                  <a:srgbClr val="0A3D23"/>
+                </a:solidFill>
+                <a:latin typeface="Yu Gothic" pitchFamily="34" charset="0"/>
+                <a:ea typeface="Yu Gothic" pitchFamily="34" charset="-122"/>
+                <a:cs typeface="Yu Gothic" pitchFamily="34" charset="-120"/>
+              </a:rPr>
+              <a:t>秋田店（想定）</a:t>
+            </a:r>
+            <a:endParaRPr lang="en-US" sz="950" dirty="0"/>
+          </a:p>
+        </p:txBody>
+      </p:sp>
+      <p:sp>
+        <p:nvSpPr>
+          <p:cNvPr id="21" name="Shape 18"/>
+          <p:cNvSpPr/>
+          <p:nvPr/>
+        </p:nvSpPr>
+        <p:spPr>
+          <a:xfrm>
+            <a:off x="3129077" y="3809390"/>
+            <a:ext cx="2264898" cy="219456"/>
+          </a:xfrm>
+          <a:prstGeom prst="roundRect">
+            <a:avLst>
+              <a:gd name="adj" fmla="val 20833"/>
+            </a:avLst>
+          </a:prstGeom>
+          <a:solidFill>
+            <a:srgbClr val="A8761F"/>
+          </a:solidFill>
+          <a:ln/>
+        </p:spPr>
+      </p:sp>
+      <p:sp>
+        <p:nvSpPr>
+          <p:cNvPr id="22" name="Text 19"/>
+          <p:cNvSpPr/>
+          <p:nvPr/>
+        </p:nvSpPr>
+        <p:spPr>
+          <a:xfrm>
+            <a:off x="5485415" y="3763670"/>
+            <a:ext cx="914400" cy="310896"/>
+          </a:xfrm>
+          <a:prstGeom prst="rect">
+            <a:avLst/>
+          </a:prstGeom>
+          <a:noFill/>
+          <a:ln/>
+        </p:spPr>
+        <p:txBody>
+          <a:bodyPr wrap="square" lIns="0" tIns="0" rIns="0" bIns="0" rtlCol="0" anchor="ctr"/>
+          <a:lstStyle/>
+          <a:p>
+            <a:pPr indent="0" marL="0">
+              <a:buNone/>
+            </a:pPr>
+            <a:r>
+              <a:rPr lang="en-US" sz="1000" b="1" dirty="0">
+                <a:solidFill>
+                  <a:srgbClr val="A8761F"/>
+                </a:solidFill>
+                <a:latin typeface="Yu Gothic" pitchFamily="34" charset="0"/>
+                <a:ea typeface="Yu Gothic" pitchFamily="34" charset="-122"/>
+                <a:cs typeface="Yu Gothic" pitchFamily="34" charset="-120"/>
+              </a:rPr>
+              <a:t>70 杯</a:t>
+            </a:r>
+            <a:endParaRPr lang="en-US" sz="1000" dirty="0"/>
+          </a:p>
+        </p:txBody>
+      </p:sp>
+      <p:sp>
+        <p:nvSpPr>
+          <p:cNvPr id="23" name="Text 20"/>
+          <p:cNvSpPr/>
+          <p:nvPr/>
+        </p:nvSpPr>
+        <p:spPr>
+          <a:xfrm>
+            <a:off x="934517" y="4266590"/>
+            <a:ext cx="2157984" cy="310896"/>
+          </a:xfrm>
+          <a:prstGeom prst="rect">
+            <a:avLst/>
+          </a:prstGeom>
+          <a:noFill/>
+          <a:ln/>
+        </p:spPr>
+        <p:txBody>
+          <a:bodyPr wrap="square" lIns="0" tIns="0" rIns="0" bIns="0" rtlCol="0" anchor="ctr"/>
+          <a:lstStyle/>
+          <a:p>
+            <a:pPr indent="0" marL="0">
+              <a:buNone/>
+            </a:pPr>
+            <a:r>
+              <a:rPr lang="en-US" sz="950" dirty="0">
+                <a:solidFill>
+                  <a:srgbClr val="7E8882"/>
+                </a:solidFill>
+                <a:latin typeface="Yu Gothic" pitchFamily="34" charset="0"/>
+                <a:ea typeface="Yu Gothic" pitchFamily="34" charset="-122"/>
+                <a:cs typeface="Yu Gothic" pitchFamily="34" charset="-120"/>
+              </a:rPr>
+              <a:t>ささしまライブ店（実績）</a:t>
+            </a:r>
+            <a:endParaRPr lang="en-US" sz="950" dirty="0"/>
+          </a:p>
+        </p:txBody>
+      </p:sp>
+      <p:sp>
+        <p:nvSpPr>
+          <p:cNvPr id="24" name="Shape 21"/>
+          <p:cNvSpPr/>
+          <p:nvPr/>
+        </p:nvSpPr>
+        <p:spPr>
+          <a:xfrm>
+            <a:off x="3129077" y="4312310"/>
+            <a:ext cx="3970043" cy="219456"/>
+          </a:xfrm>
+          <a:prstGeom prst="roundRect">
+            <a:avLst>
+              <a:gd name="adj" fmla="val 20833"/>
+            </a:avLst>
+          </a:prstGeom>
+          <a:solidFill>
+            <a:srgbClr val="5FA57C"/>
+          </a:solidFill>
+          <a:ln/>
+        </p:spPr>
+      </p:sp>
+      <p:sp>
+        <p:nvSpPr>
+          <p:cNvPr id="25" name="Text 22"/>
+          <p:cNvSpPr/>
+          <p:nvPr/>
+        </p:nvSpPr>
+        <p:spPr>
+          <a:xfrm>
+            <a:off x="7190560" y="4266590"/>
+            <a:ext cx="914400" cy="310896"/>
+          </a:xfrm>
+          <a:prstGeom prst="rect">
+            <a:avLst/>
+          </a:prstGeom>
+          <a:noFill/>
+          <a:ln/>
+        </p:spPr>
+        <p:txBody>
+          <a:bodyPr wrap="square" lIns="0" tIns="0" rIns="0" bIns="0" rtlCol="0" anchor="ctr"/>
+          <a:lstStyle/>
+          <a:p>
+            <a:pPr indent="0" marL="0">
+              <a:buNone/>
+            </a:pPr>
+            <a:r>
+              <a:rPr lang="en-US" sz="1000" b="1" dirty="0">
+                <a:solidFill>
+                  <a:srgbClr val="7E8882"/>
+                </a:solidFill>
+                <a:latin typeface="Yu Gothic" pitchFamily="34" charset="0"/>
+                <a:ea typeface="Yu Gothic" pitchFamily="34" charset="-122"/>
+                <a:cs typeface="Yu Gothic" pitchFamily="34" charset="-120"/>
+              </a:rPr>
+              <a:t>122.7 杯</a:t>
+            </a:r>
+            <a:endParaRPr lang="en-US" sz="1000" dirty="0"/>
+          </a:p>
+        </p:txBody>
+      </p:sp>
+      <p:sp>
+        <p:nvSpPr>
+          <p:cNvPr id="26" name="Text 23"/>
+          <p:cNvSpPr/>
+          <p:nvPr/>
+        </p:nvSpPr>
+        <p:spPr>
+          <a:xfrm>
+            <a:off x="934517" y="4522622"/>
+            <a:ext cx="6858000" cy="237744"/>
+          </a:xfrm>
+          <a:prstGeom prst="rect">
+            <a:avLst/>
+          </a:prstGeom>
+          <a:noFill/>
+          <a:ln/>
+        </p:spPr>
+        <p:txBody>
+          <a:bodyPr wrap="square" lIns="0" tIns="0" rIns="0" bIns="0" rtlCol="0" anchor="ctr"/>
+          <a:lstStyle/>
+          <a:p>
+            <a:pPr indent="0" marL="0">
+              <a:buNone/>
+            </a:pPr>
+            <a:r>
+              <a:rPr lang="en-US" sz="850" dirty="0">
+                <a:solidFill>
+                  <a:srgbClr val="A8B0AA"/>
+                </a:solidFill>
+                <a:latin typeface="Yu Gothic" pitchFamily="34" charset="0"/>
+                <a:ea typeface="Yu Gothic" pitchFamily="34" charset="-122"/>
+                <a:cs typeface="Yu Gothic" pitchFamily="34" charset="-120"/>
+              </a:rPr>
+              <a:t>※ 帯の色：金＝今回の想定／緑＝既存店の実績</a:t>
+            </a:r>
+            <a:endParaRPr lang="en-US" sz="850" dirty="0"/>
+          </a:p>
+        </p:txBody>
+      </p:sp>
+      <p:sp>
+        <p:nvSpPr>
+          <p:cNvPr id="27" name="Shape 24"/>
+          <p:cNvSpPr/>
+          <p:nvPr/>
+        </p:nvSpPr>
+        <p:spPr>
+          <a:xfrm>
+            <a:off x="8450885" y="1651406"/>
+            <a:ext cx="3080614" cy="731520"/>
+          </a:xfrm>
+          <a:prstGeom prst="roundRect">
+            <a:avLst>
+              <a:gd name="adj" fmla="val 7500"/>
+            </a:avLst>
+          </a:prstGeom>
+          <a:solidFill>
+            <a:srgbClr val="F1F8F3"/>
+          </a:solidFill>
+          <a:ln w="9525">
+            <a:solidFill>
+              <a:srgbClr val="D2E7DA"/>
+            </a:solidFill>
+            <a:prstDash val="solid"/>
+          </a:ln>
+        </p:spPr>
+      </p:sp>
+      <p:pic>
+        <p:nvPicPr>
+          <p:cNvPr id="28" name="Image 1" descr="/home/user/suzuki-ceo/selfcafe-miraiya-deck/assets/icons/LuChartColumn-green.png">    </p:cNvPr>
+          <p:cNvPicPr>
+            <a:picLocks noChangeAspect="1"/>
+          </p:cNvPicPr>
+          <p:nvPr/>
+        </p:nvPicPr>
+        <p:blipFill>
+          <a:blip r:embed="rId2"/>
+          <a:stretch>
+            <a:fillRect/>
+          </a:stretch>
+        </p:blipFill>
+        <p:spPr>
+          <a:xfrm>
+            <a:off x="8670341" y="1852574"/>
+            <a:ext cx="310896" cy="310896"/>
+          </a:xfrm>
+          <a:prstGeom prst="rect">
+            <a:avLst/>
+          </a:prstGeom>
+        </p:spPr>
+      </p:pic>
+      <p:sp>
+        <p:nvSpPr>
+          <p:cNvPr id="29" name="Text 25"/>
+          <p:cNvSpPr/>
+          <p:nvPr/>
+        </p:nvSpPr>
+        <p:spPr>
+          <a:xfrm>
+            <a:off x="9090965" y="1742846"/>
+            <a:ext cx="2221078" cy="237744"/>
+          </a:xfrm>
+          <a:prstGeom prst="rect">
+            <a:avLst/>
+          </a:prstGeom>
+          <a:noFill/>
+          <a:ln/>
+        </p:spPr>
+        <p:txBody>
+          <a:bodyPr wrap="square" lIns="0" tIns="0" rIns="0" bIns="0" rtlCol="0" anchor="ctr"/>
+          <a:lstStyle/>
+          <a:p>
+            <a:pPr indent="0" marL="0">
+              <a:buNone/>
+            </a:pPr>
+            <a:r>
+              <a:rPr lang="en-US" sz="1000" b="1" dirty="0">
+                <a:solidFill>
+                  <a:srgbClr val="106838"/>
+                </a:solidFill>
+                <a:latin typeface="Yu Gothic" pitchFamily="34" charset="0"/>
+                <a:ea typeface="Yu Gothic" pitchFamily="34" charset="-122"/>
+                <a:cs typeface="Yu Gothic" pitchFamily="34" charset="-120"/>
+              </a:rPr>
+              <a:t>基準</a:t>
+            </a:r>
+            <a:endParaRPr lang="en-US" sz="1000" dirty="0"/>
+          </a:p>
+        </p:txBody>
+      </p:sp>
+      <p:sp>
+        <p:nvSpPr>
+          <p:cNvPr id="30" name="Text 26"/>
+          <p:cNvSpPr/>
+          <p:nvPr/>
+        </p:nvSpPr>
+        <p:spPr>
+          <a:xfrm>
+            <a:off x="9090965" y="1980590"/>
+            <a:ext cx="2221078" cy="329184"/>
+          </a:xfrm>
+          <a:prstGeom prst="rect">
+            <a:avLst/>
+          </a:prstGeom>
+          <a:noFill/>
+          <a:ln/>
+        </p:spPr>
+        <p:txBody>
+          <a:bodyPr wrap="square" lIns="0" tIns="0" rIns="0" bIns="0" rtlCol="0" anchor="t"/>
+          <a:lstStyle/>
+          <a:p>
+            <a:pPr indent="0" marL="0">
+              <a:lnSpc>
+                <a:spcPct val="120000"/>
+              </a:lnSpc>
+              <a:buNone/>
+            </a:pPr>
+            <a:r>
+              <a:rPr lang="en-US" sz="950" dirty="0">
+                <a:solidFill>
+                  <a:srgbClr val="0A3D23"/>
+                </a:solidFill>
+                <a:latin typeface="Yu Gothic" pitchFamily="34" charset="0"/>
+                <a:ea typeface="Yu Gothic" pitchFamily="34" charset="-122"/>
+                <a:cs typeface="Yu Gothic" pitchFamily="34" charset="-120"/>
+              </a:rPr>
+              <a:t>書店併設2店の実績平均 1日42.9杯</a:t>
+            </a:r>
+            <a:endParaRPr lang="en-US" sz="950" dirty="0"/>
+          </a:p>
+        </p:txBody>
+      </p:sp>
+      <p:sp>
+        <p:nvSpPr>
+          <p:cNvPr id="31" name="Shape 27"/>
+          <p:cNvSpPr/>
+          <p:nvPr/>
+        </p:nvSpPr>
+        <p:spPr>
+          <a:xfrm>
+            <a:off x="8450885" y="2474366"/>
+            <a:ext cx="3080614" cy="731520"/>
+          </a:xfrm>
+          <a:prstGeom prst="roundRect">
+            <a:avLst>
+              <a:gd name="adj" fmla="val 7500"/>
+            </a:avLst>
+          </a:prstGeom>
+          <a:solidFill>
+            <a:srgbClr val="F1F8F3"/>
+          </a:solidFill>
+          <a:ln w="9525">
+            <a:solidFill>
+              <a:srgbClr val="D2E7DA"/>
+            </a:solidFill>
+            <a:prstDash val="solid"/>
+          </a:ln>
+        </p:spPr>
+      </p:sp>
+      <p:pic>
+        <p:nvPicPr>
+          <p:cNvPr id="32" name="Image 2" descr="/home/user/suzuki-ceo/selfcafe-miraiya-deck/assets/icons/LuTrendingUp-green.png">    </p:cNvPr>
+          <p:cNvPicPr>
+            <a:picLocks noChangeAspect="1"/>
+          </p:cNvPicPr>
+          <p:nvPr/>
+        </p:nvPicPr>
+        <p:blipFill>
+          <a:blip r:embed="rId3"/>
+          <a:stretch>
+            <a:fillRect/>
+          </a:stretch>
+        </p:blipFill>
+        <p:spPr>
+          <a:xfrm>
+            <a:off x="8670341" y="2675534"/>
+            <a:ext cx="310896" cy="310896"/>
+          </a:xfrm>
+          <a:prstGeom prst="rect">
+            <a:avLst/>
+          </a:prstGeom>
+        </p:spPr>
+      </p:pic>
+      <p:sp>
+        <p:nvSpPr>
+          <p:cNvPr id="33" name="Text 28"/>
+          <p:cNvSpPr/>
+          <p:nvPr/>
+        </p:nvSpPr>
+        <p:spPr>
+          <a:xfrm>
+            <a:off x="9090965" y="2565806"/>
+            <a:ext cx="2221078" cy="237744"/>
+          </a:xfrm>
+          <a:prstGeom prst="rect">
+            <a:avLst/>
+          </a:prstGeom>
+          <a:noFill/>
+          <a:ln/>
+        </p:spPr>
+        <p:txBody>
+          <a:bodyPr wrap="square" lIns="0" tIns="0" rIns="0" bIns="0" rtlCol="0" anchor="ctr"/>
+          <a:lstStyle/>
+          <a:p>
+            <a:pPr indent="0" marL="0">
+              <a:buNone/>
+            </a:pPr>
+            <a:r>
+              <a:rPr lang="en-US" sz="1000" b="1" dirty="0">
+                <a:solidFill>
+                  <a:srgbClr val="106838"/>
+                </a:solidFill>
+                <a:latin typeface="Yu Gothic" pitchFamily="34" charset="0"/>
+                <a:ea typeface="Yu Gothic" pitchFamily="34" charset="-122"/>
+                <a:cs typeface="Yu Gothic" pitchFamily="34" charset="-120"/>
+              </a:rPr>
+              <a:t>係数</a:t>
+            </a:r>
+            <a:endParaRPr lang="en-US" sz="1000" dirty="0"/>
+          </a:p>
+        </p:txBody>
+      </p:sp>
+      <p:sp>
+        <p:nvSpPr>
+          <p:cNvPr id="34" name="Text 29"/>
+          <p:cNvSpPr/>
+          <p:nvPr/>
+        </p:nvSpPr>
+        <p:spPr>
+          <a:xfrm>
+            <a:off x="9090965" y="2803550"/>
+            <a:ext cx="2221078" cy="329184"/>
+          </a:xfrm>
+          <a:prstGeom prst="rect">
+            <a:avLst/>
+          </a:prstGeom>
+          <a:noFill/>
+          <a:ln/>
+        </p:spPr>
+        <p:txBody>
+          <a:bodyPr wrap="square" lIns="0" tIns="0" rIns="0" bIns="0" rtlCol="0" anchor="t"/>
+          <a:lstStyle/>
+          <a:p>
+            <a:pPr indent="0" marL="0">
+              <a:lnSpc>
+                <a:spcPct val="120000"/>
+              </a:lnSpc>
+              <a:buNone/>
+            </a:pPr>
+            <a:r>
+              <a:rPr lang="en-US" sz="950" dirty="0">
+                <a:solidFill>
+                  <a:srgbClr val="0A3D23"/>
+                </a:solidFill>
+                <a:latin typeface="Yu Gothic" pitchFamily="34" charset="0"/>
+                <a:ea typeface="Yu Gothic" pitchFamily="34" charset="-122"/>
+                <a:cs typeface="Yu Gothic" pitchFamily="34" charset="-120"/>
+              </a:rPr>
+              <a:t>館内の通行量・映画館隣接を踏まえ 約1.5倍</a:t>
+            </a:r>
+            <a:endParaRPr lang="en-US" sz="950" dirty="0"/>
+          </a:p>
+        </p:txBody>
+      </p:sp>
+      <p:sp>
+        <p:nvSpPr>
+          <p:cNvPr id="35" name="Shape 30"/>
+          <p:cNvSpPr/>
+          <p:nvPr/>
+        </p:nvSpPr>
+        <p:spPr>
+          <a:xfrm>
+            <a:off x="8450885" y="3297326"/>
+            <a:ext cx="3080614" cy="731520"/>
+          </a:xfrm>
+          <a:prstGeom prst="roundRect">
+            <a:avLst>
+              <a:gd name="adj" fmla="val 7500"/>
+            </a:avLst>
+          </a:prstGeom>
+          <a:solidFill>
+            <a:srgbClr val="F1F8F3"/>
+          </a:solidFill>
+          <a:ln w="9525">
+            <a:solidFill>
+              <a:srgbClr val="D2E7DA"/>
+            </a:solidFill>
+            <a:prstDash val="solid"/>
+          </a:ln>
+        </p:spPr>
+      </p:sp>
+      <p:pic>
+        <p:nvPicPr>
+          <p:cNvPr id="36" name="Image 3" descr="/home/user/suzuki-ceo/selfcafe-miraiya-deck/assets/icons/LuUsers-green.png">    </p:cNvPr>
+          <p:cNvPicPr>
+            <a:picLocks noChangeAspect="1"/>
+          </p:cNvPicPr>
+          <p:nvPr/>
+        </p:nvPicPr>
+        <p:blipFill>
+          <a:blip r:embed="rId4"/>
+          <a:stretch>
+            <a:fillRect/>
+          </a:stretch>
+        </p:blipFill>
+        <p:spPr>
+          <a:xfrm>
+            <a:off x="8670341" y="3498494"/>
+            <a:ext cx="310896" cy="310896"/>
+          </a:xfrm>
+          <a:prstGeom prst="rect">
+            <a:avLst/>
+          </a:prstGeom>
+        </p:spPr>
+      </p:pic>
+      <p:sp>
+        <p:nvSpPr>
+          <p:cNvPr id="37" name="Text 31"/>
+          <p:cNvSpPr/>
+          <p:nvPr/>
+        </p:nvSpPr>
+        <p:spPr>
+          <a:xfrm>
+            <a:off x="9090965" y="3388766"/>
+            <a:ext cx="2221078" cy="237744"/>
+          </a:xfrm>
+          <a:prstGeom prst="rect">
+            <a:avLst/>
+          </a:prstGeom>
+          <a:noFill/>
+          <a:ln/>
+        </p:spPr>
+        <p:txBody>
+          <a:bodyPr wrap="square" lIns="0" tIns="0" rIns="0" bIns="0" rtlCol="0" anchor="ctr"/>
+          <a:lstStyle/>
+          <a:p>
+            <a:pPr indent="0" marL="0">
+              <a:buNone/>
+            </a:pPr>
+            <a:r>
+              <a:rPr lang="en-US" sz="1000" b="1" dirty="0">
+                <a:solidFill>
+                  <a:srgbClr val="106838"/>
+                </a:solidFill>
+                <a:latin typeface="Yu Gothic" pitchFamily="34" charset="0"/>
+                <a:ea typeface="Yu Gothic" pitchFamily="34" charset="-122"/>
+                <a:cs typeface="Yu Gothic" pitchFamily="34" charset="-120"/>
+              </a:rPr>
+              <a:t>席数で配分</a:t>
+            </a:r>
+            <a:endParaRPr lang="en-US" sz="1000" dirty="0"/>
+          </a:p>
+        </p:txBody>
+      </p:sp>
+      <p:sp>
+        <p:nvSpPr>
+          <p:cNvPr id="38" name="Text 32"/>
+          <p:cNvSpPr/>
+          <p:nvPr/>
+        </p:nvSpPr>
+        <p:spPr>
+          <a:xfrm>
+            <a:off x="9090965" y="3626510"/>
+            <a:ext cx="2221078" cy="329184"/>
+          </a:xfrm>
+          <a:prstGeom prst="rect">
+            <a:avLst/>
+          </a:prstGeom>
+          <a:noFill/>
+          <a:ln/>
+        </p:spPr>
+        <p:txBody>
+          <a:bodyPr wrap="square" lIns="0" tIns="0" rIns="0" bIns="0" rtlCol="0" anchor="t"/>
+          <a:lstStyle/>
+          <a:p>
+            <a:pPr indent="0" marL="0">
+              <a:lnSpc>
+                <a:spcPct val="120000"/>
+              </a:lnSpc>
+              <a:buNone/>
+            </a:pPr>
+            <a:r>
+              <a:rPr lang="en-US" sz="950" dirty="0">
+                <a:solidFill>
+                  <a:srgbClr val="0A3D23"/>
+                </a:solidFill>
+                <a:latin typeface="Yu Gothic" pitchFamily="34" charset="0"/>
+                <a:ea typeface="Yu Gothic" pitchFamily="34" charset="-122"/>
+                <a:cs typeface="Yu Gothic" pitchFamily="34" charset="-120"/>
+              </a:rPr>
+              <a:t>秋田73席＝70杯／土浦59席＝60杯</a:t>
+            </a:r>
+            <a:endParaRPr lang="en-US" sz="950" dirty="0"/>
+          </a:p>
+        </p:txBody>
+      </p:sp>
+      <p:sp>
+        <p:nvSpPr>
+          <p:cNvPr id="39" name="Shape 33"/>
+          <p:cNvSpPr/>
+          <p:nvPr/>
+        </p:nvSpPr>
+        <p:spPr>
+          <a:xfrm>
+            <a:off x="8450885" y="4120286"/>
+            <a:ext cx="3080614" cy="731520"/>
+          </a:xfrm>
+          <a:prstGeom prst="roundRect">
+            <a:avLst>
+              <a:gd name="adj" fmla="val 7500"/>
+            </a:avLst>
+          </a:prstGeom>
+          <a:solidFill>
+            <a:srgbClr val="F1F8F3"/>
+          </a:solidFill>
+          <a:ln w="9525">
+            <a:solidFill>
+              <a:srgbClr val="D2E7DA"/>
+            </a:solidFill>
+            <a:prstDash val="solid"/>
+          </a:ln>
+        </p:spPr>
+      </p:sp>
+      <p:pic>
+        <p:nvPicPr>
+          <p:cNvPr id="40" name="Image 4" descr="/home/user/suzuki-ceo/selfcafe-miraiya-deck/assets/icons/LuShieldCheck-green.png">    </p:cNvPr>
+          <p:cNvPicPr>
+            <a:picLocks noChangeAspect="1"/>
+          </p:cNvPicPr>
+          <p:nvPr/>
+        </p:nvPicPr>
+        <p:blipFill>
+          <a:blip r:embed="rId5"/>
+          <a:stretch>
+            <a:fillRect/>
+          </a:stretch>
+        </p:blipFill>
+        <p:spPr>
+          <a:xfrm>
+            <a:off x="8670341" y="4321454"/>
+            <a:ext cx="310896" cy="310896"/>
+          </a:xfrm>
+          <a:prstGeom prst="rect">
+            <a:avLst/>
+          </a:prstGeom>
+        </p:spPr>
+      </p:pic>
+      <p:sp>
+        <p:nvSpPr>
+          <p:cNvPr id="41" name="Text 34"/>
+          <p:cNvSpPr/>
+          <p:nvPr/>
+        </p:nvSpPr>
+        <p:spPr>
+          <a:xfrm>
+            <a:off x="9090965" y="4211726"/>
+            <a:ext cx="2221078" cy="237744"/>
+          </a:xfrm>
+          <a:prstGeom prst="rect">
+            <a:avLst/>
+          </a:prstGeom>
+          <a:noFill/>
+          <a:ln/>
+        </p:spPr>
+        <p:txBody>
+          <a:bodyPr wrap="square" lIns="0" tIns="0" rIns="0" bIns="0" rtlCol="0" anchor="ctr"/>
+          <a:lstStyle/>
+          <a:p>
+            <a:pPr indent="0" marL="0">
+              <a:buNone/>
+            </a:pPr>
+            <a:r>
+              <a:rPr lang="en-US" sz="1000" b="1" dirty="0">
+                <a:solidFill>
+                  <a:srgbClr val="106838"/>
+                </a:solidFill>
+                <a:latin typeface="Yu Gothic" pitchFamily="34" charset="0"/>
+                <a:ea typeface="Yu Gothic" pitchFamily="34" charset="-122"/>
+                <a:cs typeface="Yu Gothic" pitchFamily="34" charset="-120"/>
+              </a:rPr>
+              <a:t>妥当性</a:t>
+            </a:r>
+            <a:endParaRPr lang="en-US" sz="1000" dirty="0"/>
+          </a:p>
+        </p:txBody>
+      </p:sp>
+      <p:sp>
+        <p:nvSpPr>
+          <p:cNvPr id="42" name="Text 35"/>
+          <p:cNvSpPr/>
+          <p:nvPr/>
+        </p:nvSpPr>
+        <p:spPr>
+          <a:xfrm>
+            <a:off x="9090965" y="4449470"/>
+            <a:ext cx="2221078" cy="329184"/>
+          </a:xfrm>
+          <a:prstGeom prst="rect">
+            <a:avLst/>
+          </a:prstGeom>
+          <a:noFill/>
+          <a:ln/>
+        </p:spPr>
+        <p:txBody>
+          <a:bodyPr wrap="square" lIns="0" tIns="0" rIns="0" bIns="0" rtlCol="0" anchor="t"/>
+          <a:lstStyle/>
+          <a:p>
+            <a:pPr indent="0" marL="0">
+              <a:lnSpc>
+                <a:spcPct val="120000"/>
+              </a:lnSpc>
+              <a:buNone/>
+            </a:pPr>
+            <a:r>
+              <a:rPr lang="en-US" sz="950" dirty="0">
+                <a:solidFill>
+                  <a:srgbClr val="0A3D23"/>
+                </a:solidFill>
+                <a:latin typeface="Yu Gothic" pitchFamily="34" charset="0"/>
+                <a:ea typeface="Yu Gothic" pitchFamily="34" charset="-122"/>
+                <a:cs typeface="Yu Gothic" pitchFamily="34" charset="-120"/>
+              </a:rPr>
+              <a:t>ささしまライブ店の実績の約半分の水準</a:t>
+            </a:r>
+            <a:endParaRPr lang="en-US" sz="950" dirty="0"/>
+          </a:p>
+        </p:txBody>
+      </p:sp>
+      <p:sp>
+        <p:nvSpPr>
+          <p:cNvPr id="43" name="Shape 36"/>
+          <p:cNvSpPr/>
+          <p:nvPr/>
+        </p:nvSpPr>
+        <p:spPr>
+          <a:xfrm>
+            <a:off x="660197" y="5052974"/>
+            <a:ext cx="10871302" cy="768096"/>
+          </a:xfrm>
+          <a:prstGeom prst="roundRect">
+            <a:avLst>
+              <a:gd name="adj" fmla="val 7143"/>
+            </a:avLst>
+          </a:prstGeom>
+          <a:solidFill>
+            <a:srgbClr val="0C5230"/>
+          </a:solidFill>
+          <a:ln/>
+        </p:spPr>
+      </p:sp>
+      <p:sp>
+        <p:nvSpPr>
+          <p:cNvPr id="44" name="Text 37"/>
+          <p:cNvSpPr/>
+          <p:nvPr/>
+        </p:nvSpPr>
+        <p:spPr>
+          <a:xfrm>
+            <a:off x="971093" y="5052974"/>
+            <a:ext cx="10249510" cy="768096"/>
+          </a:xfrm>
+          <a:prstGeom prst="rect">
+            <a:avLst/>
+          </a:prstGeom>
+          <a:noFill/>
+          <a:ln/>
+        </p:spPr>
+        <p:txBody>
+          <a:bodyPr wrap="square" lIns="0" tIns="0" rIns="0" bIns="0" rtlCol="0" anchor="ctr"/>
+          <a:lstStyle/>
+          <a:p>
+            <a:pPr indent="0" marL="0">
+              <a:buNone/>
+            </a:pPr>
+            <a:r>
+              <a:rPr lang="en-US" sz="1150" b="1" dirty="0">
+                <a:solidFill>
+                  <a:srgbClr val="FFFFFF"/>
+                </a:solidFill>
+                <a:latin typeface="Yu Gothic" pitchFamily="34" charset="0"/>
+                <a:ea typeface="Yu Gothic" pitchFamily="34" charset="-122"/>
+                <a:cs typeface="Yu Gothic" pitchFamily="34" charset="-120"/>
+              </a:rPr>
+              <a:t>来客に対する購入率でみると、秋田店は約56％・土浦店は約45％。</a:t>
+            </a:r>
+            <a:r>
+              <a:rPr lang="en-US" sz="1100" dirty="0">
+                <a:solidFill>
+                  <a:srgbClr val="AFC2B8"/>
+                </a:solidFill>
+                <a:latin typeface="Yu Gothic" pitchFamily="34" charset="0"/>
+                <a:ea typeface="Yu Gothic" pitchFamily="34" charset="-122"/>
+                <a:cs typeface="Yu Gothic" pitchFamily="34" charset="-120"/>
+              </a:rPr>
+              <a:t>  ご来店のおよそ半数が1杯ご購入いただく水準です。</a:t>
+            </a:r>
+            <a:endParaRPr lang="en-US" sz="1150" dirty="0"/>
+          </a:p>
+        </p:txBody>
+      </p:sp>
+      <p:sp>
+        <p:nvSpPr>
+          <p:cNvPr id="45" name="Text 38"/>
+          <p:cNvSpPr/>
+          <p:nvPr/>
+        </p:nvSpPr>
+        <p:spPr>
+          <a:xfrm>
+            <a:off x="660197" y="6272784"/>
+            <a:ext cx="10871302" cy="182880"/>
+          </a:xfrm>
+          <a:prstGeom prst="rect">
+            <a:avLst/>
+          </a:prstGeom>
+          <a:noFill/>
+          <a:ln/>
+        </p:spPr>
+        <p:txBody>
+          <a:bodyPr wrap="square" lIns="0" tIns="0" rIns="0" bIns="0" rtlCol="0" anchor="ctr"/>
+          <a:lstStyle/>
+          <a:p>
+            <a:pPr indent="0" marL="0">
+              <a:buNone/>
+            </a:pPr>
+            <a:r>
+              <a:rPr lang="en-US" sz="850" dirty="0">
+                <a:solidFill>
+                  <a:srgbClr val="A8B0AA"/>
+                </a:solidFill>
+                <a:latin typeface="Yu Gothic" pitchFamily="34" charset="0"/>
+                <a:ea typeface="Yu Gothic" pitchFamily="34" charset="-122"/>
+                <a:cs typeface="Yu Gothic" pitchFamily="34" charset="-120"/>
+              </a:rPr>
+              <a:t>※ 想定値であり、売上を保証するものではありません。実際の販売杯数は立地・季節・館内の動線により変動します。</a:t>
+            </a:r>
+            <a:endParaRPr lang="en-US" sz="850" dirty="0"/>
+          </a:p>
+        </p:txBody>
+      </p:sp>
+    </p:spTree>
+  </p:cSld>
+  <p:clrMapOvr>
+    <a:masterClrMapping/>
+  </p:clrMapOvr>
+</p:sld>
+</file>
+
+<file path=ppt/slides/slide8.xml><?xml version="1.0" encoding="utf-8"?>
+<p:sld xmlns:a="http://schemas.openxmlformats.org/drawingml/2006/main" xmlns:r="http://schemas.openxmlformats.org/officeDocument/2006/relationships" xmlns:p="http://schemas.openxmlformats.org/presentationml/2006/main">
+  <p:cSld name="Slide 8">
+    <p:bg>
+      <p:bgPr>
+        <a:solidFill>
+          <a:srgbClr val="FFFDF7"/>
+        </a:solidFill>
+      </p:bgPr>
+    </p:bg>
+    <p:spTree>
+      <p:nvGrpSpPr>
+        <p:cNvPr id="1" name=""/>
+        <p:cNvGrpSpPr/>
+        <p:nvPr/>
+      </p:nvGrpSpPr>
+      <p:grpSpPr>
+        <a:xfrm>
+          <a:off x="0" y="0"/>
+          <a:ext cx="0" cy="0"/>
+          <a:chOff x="0" y="0"/>
+          <a:chExt cx="0" cy="0"/>
+        </a:xfrm>
+      </p:grpSpPr>
+      <p:sp>
+        <p:nvSpPr>
+          <p:cNvPr id="2" name="Shape 0"/>
+          <p:cNvSpPr/>
+          <p:nvPr/>
+        </p:nvSpPr>
+        <p:spPr>
+          <a:xfrm>
+            <a:off x="660197" y="545897"/>
+            <a:ext cx="202997" cy="25603"/>
+          </a:xfrm>
+          <a:prstGeom prst="rect">
+            <a:avLst/>
+          </a:prstGeom>
+          <a:solidFill>
+            <a:srgbClr val="106838"/>
+          </a:solidFill>
+          <a:ln/>
+        </p:spPr>
+      </p:sp>
+      <p:sp>
+        <p:nvSpPr>
+          <p:cNvPr id="3" name="Text 1"/>
+          <p:cNvSpPr/>
+          <p:nvPr/>
+        </p:nvSpPr>
+        <p:spPr>
+          <a:xfrm>
+            <a:off x="952805" y="444398"/>
+            <a:ext cx="6400800" cy="177394"/>
+          </a:xfrm>
+          <a:prstGeom prst="rect">
+            <a:avLst/>
+          </a:prstGeom>
+          <a:noFill/>
+          <a:ln/>
+        </p:spPr>
+        <p:txBody>
+          <a:bodyPr wrap="square" lIns="0" tIns="0" rIns="0" bIns="0" rtlCol="0" anchor="ctr"/>
+          <a:lstStyle/>
+          <a:p>
+            <a:pPr indent="0" marL="0">
+              <a:buNone/>
+            </a:pPr>
+            <a:r>
+              <a:rPr lang="en-US" sz="1050" b="1" dirty="0">
+                <a:solidFill>
+                  <a:srgbClr val="A8761F"/>
+                </a:solidFill>
+                <a:latin typeface="Arial" pitchFamily="34" charset="0"/>
+                <a:ea typeface="Arial" pitchFamily="34" charset="-122"/>
+                <a:cs typeface="Arial" pitchFamily="34" charset="-120"/>
+              </a:rPr>
+              <a:t>07</a:t>
+            </a:r>
+            <a:r>
+              <a:rPr lang="en-US" sz="1050" b="1" dirty="0">
+                <a:solidFill>
+                  <a:srgbClr val="1B8149"/>
+                </a:solidFill>
+                <a:latin typeface="Yu Gothic" pitchFamily="34" charset="0"/>
+                <a:ea typeface="Yu Gothic" pitchFamily="34" charset="-122"/>
+                <a:cs typeface="Yu Gothic" pitchFamily="34" charset="-120"/>
+              </a:rPr>
+              <a:t>   収益シミュレーション</a:t>
+            </a:r>
+            <a:endParaRPr lang="en-US" sz="1050" dirty="0"/>
+          </a:p>
+        </p:txBody>
+      </p:sp>
+      <p:sp>
+        <p:nvSpPr>
+          <p:cNvPr id="4" name="Text 2"/>
+          <p:cNvSpPr/>
+          <p:nvPr/>
+        </p:nvSpPr>
+        <p:spPr>
+          <a:xfrm>
+            <a:off x="660197" y="660197"/>
+            <a:ext cx="8889797" cy="508406"/>
+          </a:xfrm>
+          <a:prstGeom prst="rect">
+            <a:avLst/>
+          </a:prstGeom>
+          <a:noFill/>
+          <a:ln/>
+        </p:spPr>
+        <p:txBody>
+          <a:bodyPr wrap="square" lIns="0" tIns="0" rIns="0" bIns="0" rtlCol="0" anchor="ctr"/>
+          <a:lstStyle/>
+          <a:p>
+            <a:pPr indent="0" marL="0">
+              <a:buNone/>
+            </a:pPr>
+            <a:r>
+              <a:rPr lang="en-US" sz="2900" b="1" dirty="0">
+                <a:solidFill>
+                  <a:srgbClr val="0A3D23"/>
+                </a:solidFill>
+                <a:latin typeface="Yu Gothic" pitchFamily="34" charset="0"/>
+                <a:ea typeface="Yu Gothic" pitchFamily="34" charset="-122"/>
+                <a:cs typeface="Yu Gothic" pitchFamily="34" charset="-120"/>
+              </a:rPr>
+              <a:t>秋田店 のお受取イメージ</a:t>
+            </a:r>
+            <a:endParaRPr lang="en-US" sz="2900" dirty="0"/>
+          </a:p>
+        </p:txBody>
+      </p:sp>
+      <p:sp>
+        <p:nvSpPr>
+          <p:cNvPr id="5" name="Text 3"/>
+          <p:cNvSpPr/>
+          <p:nvPr/>
+        </p:nvSpPr>
+        <p:spPr>
+          <a:xfrm>
+            <a:off x="660197" y="1308506"/>
+            <a:ext cx="10032797" cy="228600"/>
+          </a:xfrm>
+          <a:prstGeom prst="rect">
+            <a:avLst/>
+          </a:prstGeom>
+          <a:noFill/>
+          <a:ln/>
+        </p:spPr>
+        <p:txBody>
+          <a:bodyPr wrap="square" lIns="0" tIns="0" rIns="0" bIns="0" rtlCol="0" anchor="ctr"/>
+          <a:lstStyle/>
+          <a:p>
+            <a:pPr indent="0" marL="0">
+              <a:buNone/>
+            </a:pPr>
+            <a:r>
+              <a:rPr lang="en-US" sz="1250" dirty="0">
+                <a:solidFill>
+                  <a:srgbClr val="4B5550"/>
+                </a:solidFill>
+                <a:latin typeface="Yu Gothic" pitchFamily="34" charset="0"/>
+                <a:ea typeface="Yu Gothic" pitchFamily="34" charset="-122"/>
+                <a:cs typeface="Yu Gothic" pitchFamily="34" charset="-120"/>
+              </a:rPr>
+              <a:t>62.97坪／73席／想定 1日70杯・1杯420円（税抜）で試算しています。</a:t>
+            </a:r>
+            <a:endParaRPr lang="en-US" sz="1250" dirty="0"/>
+          </a:p>
+        </p:txBody>
+      </p:sp>
+      <p:pic>
+        <p:nvPicPr>
+          <p:cNvPr id="6" name="Image 0" descr="/home/user/suzuki-ceo/selfcafe-miraiya-deck/assets/logo-green.png">    </p:cNvPr>
+          <p:cNvPicPr>
+            <a:picLocks noChangeAspect="1"/>
+          </p:cNvPicPr>
+          <p:nvPr/>
+        </p:nvPicPr>
+        <p:blipFill>
+          <a:blip r:embed="rId1"/>
+          <a:stretch>
+            <a:fillRect/>
+          </a:stretch>
+        </p:blipFill>
+        <p:spPr>
+          <a:xfrm>
+            <a:off x="9855403" y="482803"/>
+            <a:ext cx="1676095" cy="238658"/>
+          </a:xfrm>
+          <a:prstGeom prst="rect">
+            <a:avLst/>
+          </a:prstGeom>
+        </p:spPr>
+      </p:pic>
+      <p:sp>
+        <p:nvSpPr>
+          <p:cNvPr id="7" name="Text 4"/>
+          <p:cNvSpPr/>
+          <p:nvPr/>
+        </p:nvSpPr>
+        <p:spPr>
+          <a:xfrm>
+            <a:off x="660197" y="6476695"/>
+            <a:ext cx="5080406" cy="152705"/>
+          </a:xfrm>
+          <a:prstGeom prst="rect">
+            <a:avLst/>
+          </a:prstGeom>
+          <a:noFill/>
+          <a:ln/>
+        </p:spPr>
+        <p:txBody>
+          <a:bodyPr wrap="square" lIns="0" tIns="0" rIns="0" bIns="0" rtlCol="0" anchor="ctr"/>
+          <a:lstStyle/>
+          <a:p>
+            <a:pPr indent="0" marL="0">
+              <a:buNone/>
+            </a:pPr>
+            <a:r>
+              <a:rPr lang="en-US" sz="900" dirty="0">
+                <a:solidFill>
+                  <a:srgbClr val="A8B0AA"/>
+                </a:solidFill>
+                <a:latin typeface="Yu Gothic" pitchFamily="34" charset="0"/>
+                <a:ea typeface="Yu Gothic" pitchFamily="34" charset="-122"/>
+                <a:cs typeface="Yu Gothic" pitchFamily="34" charset="-120"/>
+              </a:rPr>
+              <a:t>セルフカフェ × 未来屋書店 業態転換のご提案</a:t>
+            </a:r>
+            <a:endParaRPr lang="en-US" sz="900" dirty="0"/>
+          </a:p>
+        </p:txBody>
+      </p:sp>
+      <p:sp>
+        <p:nvSpPr>
+          <p:cNvPr id="8" name="Text 5"/>
+          <p:cNvSpPr/>
+          <p:nvPr/>
+        </p:nvSpPr>
+        <p:spPr>
+          <a:xfrm>
+            <a:off x="10261397" y="6463894"/>
+            <a:ext cx="1270102" cy="152705"/>
+          </a:xfrm>
+          <a:prstGeom prst="rect">
+            <a:avLst/>
+          </a:prstGeom>
+          <a:noFill/>
+          <a:ln/>
+        </p:spPr>
+        <p:txBody>
+          <a:bodyPr wrap="square" lIns="0" tIns="0" rIns="0" bIns="0" rtlCol="0" anchor="ctr"/>
+          <a:lstStyle/>
+          <a:p>
+            <a:pPr algn="r" indent="0" marL="0">
+              <a:buNone/>
+            </a:pPr>
+            <a:r>
+              <a:rPr lang="en-US" sz="1000" b="1" dirty="0">
+                <a:solidFill>
+                  <a:srgbClr val="7E8882"/>
+                </a:solidFill>
+                <a:latin typeface="Arial" pitchFamily="34" charset="0"/>
+                <a:ea typeface="Arial" pitchFamily="34" charset="-122"/>
+                <a:cs typeface="Arial" pitchFamily="34" charset="-120"/>
+              </a:rPr>
+              <a:t>08</a:t>
+            </a:r>
+            <a:endParaRPr lang="en-US" sz="1000" dirty="0"/>
+          </a:p>
+        </p:txBody>
+      </p:sp>
       <p:graphicFrame>
         <p:nvGraphicFramePr>
-          <p:cNvPr id="8" name="Table 0"/>
+          <p:cNvPr id="9" name="Table 0"/>
           <p:cNvGraphicFramePr>
             <a:graphicFrameLocks noGrp="1"/>
           </p:cNvGraphicFramePr>
@@ -12525,9 +14775,9 @@
 </p:sld>
 </file>
 
-<file path=ppt/slides/slide8.xml><?xml version="1.0" encoding="utf-8"?>
+<file path=ppt/slides/slide9.xml><?xml version="1.0" encoding="utf-8"?>
 <p:sld xmlns:a="http://schemas.openxmlformats.org/drawingml/2006/main" xmlns:r="http://schemas.openxmlformats.org/officeDocument/2006/relationships" xmlns:p="http://schemas.openxmlformats.org/presentationml/2006/main">
-  <p:cSld name="Slide 8">
+  <p:cSld name="Slide 9">
     <p:bg>
       <p:bgPr>
         <a:solidFill>
@@ -12602,7 +14852,7 @@
                 <a:ea typeface="Arial" pitchFamily="34" charset="-122"/>
                 <a:cs typeface="Arial" pitchFamily="34" charset="-120"/>
               </a:rPr>
-              <a:t>07</a:t>
+              <a:t>08</a:t>
             </a:r>
             <a:r>
               <a:rPr lang="en-US" sz="1050" b="1" dirty="0">
@@ -12793,7 +15043,7 @@
                 <a:ea typeface="Arial" pitchFamily="34" charset="-122"/>
                 <a:cs typeface="Arial" pitchFamily="34" charset="-120"/>
               </a:rPr>
-              <a:t>08</a:t>
+              <a:t>09</a:t>
             </a:r>
             <a:endParaRPr lang="en-US" sz="1000" dirty="0"/>
           </a:p>
@@ -12801,7 +15051,7 @@
       </p:sp>
       <p:graphicFrame>
         <p:nvGraphicFramePr>
-          <p:cNvPr id="9" name="Table 0"/>
+          <p:cNvPr id="10" name="Table 0"/>
           <p:cNvGraphicFramePr>
             <a:graphicFrameLocks noGrp="1"/>
           </p:cNvGraphicFramePr>
@@ -14518,1312 +16768,6 @@
 </p:sld>
 </file>
 
-<file path=ppt/slides/slide9.xml><?xml version="1.0" encoding="utf-8"?>
-<p:sld xmlns:a="http://schemas.openxmlformats.org/drawingml/2006/main" xmlns:r="http://schemas.openxmlformats.org/officeDocument/2006/relationships" xmlns:p="http://schemas.openxmlformats.org/presentationml/2006/main">
-  <p:cSld name="Slide 9">
-    <p:bg>
-      <p:bgPr>
-        <a:solidFill>
-          <a:srgbClr val="FFFDF7"/>
-        </a:solidFill>
-      </p:bgPr>
-    </p:bg>
-    <p:spTree>
-      <p:nvGrpSpPr>
-        <p:cNvPr id="1" name=""/>
-        <p:cNvGrpSpPr/>
-        <p:nvPr/>
-      </p:nvGrpSpPr>
-      <p:grpSpPr>
-        <a:xfrm>
-          <a:off x="0" y="0"/>
-          <a:ext cx="0" cy="0"/>
-          <a:chOff x="0" y="0"/>
-          <a:chExt cx="0" cy="0"/>
-        </a:xfrm>
-      </p:grpSpPr>
-      <p:sp>
-        <p:nvSpPr>
-          <p:cNvPr id="2" name="Shape 0"/>
-          <p:cNvSpPr/>
-          <p:nvPr/>
-        </p:nvSpPr>
-        <p:spPr>
-          <a:xfrm>
-            <a:off x="660197" y="545897"/>
-            <a:ext cx="202997" cy="25603"/>
-          </a:xfrm>
-          <a:prstGeom prst="rect">
-            <a:avLst/>
-          </a:prstGeom>
-          <a:solidFill>
-            <a:srgbClr val="106838"/>
-          </a:solidFill>
-          <a:ln/>
-        </p:spPr>
-      </p:sp>
-      <p:sp>
-        <p:nvSpPr>
-          <p:cNvPr id="3" name="Text 1"/>
-          <p:cNvSpPr/>
-          <p:nvPr/>
-        </p:nvSpPr>
-        <p:spPr>
-          <a:xfrm>
-            <a:off x="952805" y="444398"/>
-            <a:ext cx="6400800" cy="177394"/>
-          </a:xfrm>
-          <a:prstGeom prst="rect">
-            <a:avLst/>
-          </a:prstGeom>
-          <a:noFill/>
-          <a:ln/>
-        </p:spPr>
-        <p:txBody>
-          <a:bodyPr wrap="square" lIns="0" tIns="0" rIns="0" bIns="0" rtlCol="0" anchor="ctr"/>
-          <a:lstStyle/>
-          <a:p>
-            <a:pPr indent="0" marL="0">
-              <a:buNone/>
-            </a:pPr>
-            <a:r>
-              <a:rPr lang="en-US" sz="1050" b="1" dirty="0">
-                <a:solidFill>
-                  <a:srgbClr val="A8761F"/>
-                </a:solidFill>
-                <a:latin typeface="Arial" pitchFamily="34" charset="0"/>
-                <a:ea typeface="Arial" pitchFamily="34" charset="-122"/>
-                <a:cs typeface="Arial" pitchFamily="34" charset="-120"/>
-              </a:rPr>
-              <a:t>08</a:t>
-            </a:r>
-            <a:r>
-              <a:rPr lang="en-US" sz="1050" b="1" dirty="0">
-                <a:solidFill>
-                  <a:srgbClr val="1B8149"/>
-                </a:solidFill>
-                <a:latin typeface="Yu Gothic" pitchFamily="34" charset="0"/>
-                <a:ea typeface="Yu Gothic" pitchFamily="34" charset="-122"/>
-                <a:cs typeface="Yu Gothic" pitchFamily="34" charset="-120"/>
-              </a:rPr>
-              <a:t>   運営と導入条件</a:t>
-            </a:r>
-            <a:endParaRPr lang="en-US" sz="1050" dirty="0"/>
-          </a:p>
-        </p:txBody>
-      </p:sp>
-      <p:sp>
-        <p:nvSpPr>
-          <p:cNvPr id="4" name="Text 2"/>
-          <p:cNvSpPr/>
-          <p:nvPr/>
-        </p:nvSpPr>
-        <p:spPr>
-          <a:xfrm>
-            <a:off x="660197" y="660197"/>
-            <a:ext cx="8889797" cy="508406"/>
-          </a:xfrm>
-          <a:prstGeom prst="rect">
-            <a:avLst/>
-          </a:prstGeom>
-          <a:noFill/>
-          <a:ln/>
-        </p:spPr>
-        <p:txBody>
-          <a:bodyPr wrap="square" lIns="0" tIns="0" rIns="0" bIns="0" rtlCol="0" anchor="ctr"/>
-          <a:lstStyle/>
-          <a:p>
-            <a:pPr indent="0" marL="0">
-              <a:buNone/>
-            </a:pPr>
-            <a:r>
-              <a:rPr lang="en-US" sz="2900" b="1" dirty="0">
-                <a:solidFill>
-                  <a:srgbClr val="0A3D23"/>
-                </a:solidFill>
-                <a:latin typeface="Yu Gothic" pitchFamily="34" charset="0"/>
-                <a:ea typeface="Yu Gothic" pitchFamily="34" charset="-122"/>
-                <a:cs typeface="Yu Gothic" pitchFamily="34" charset="-120"/>
-              </a:rPr>
-              <a:t>お願いするのは1日15分の清掃と補充だけ。</a:t>
-            </a:r>
-            <a:endParaRPr lang="en-US" sz="2900" dirty="0"/>
-          </a:p>
-        </p:txBody>
-      </p:sp>
-      <p:sp>
-        <p:nvSpPr>
-          <p:cNvPr id="5" name="Text 3"/>
-          <p:cNvSpPr/>
-          <p:nvPr/>
-        </p:nvSpPr>
-        <p:spPr>
-          <a:xfrm>
-            <a:off x="660197" y="1308506"/>
-            <a:ext cx="10032797" cy="228600"/>
-          </a:xfrm>
-          <a:prstGeom prst="rect">
-            <a:avLst/>
-          </a:prstGeom>
-          <a:noFill/>
-          <a:ln/>
-        </p:spPr>
-        <p:txBody>
-          <a:bodyPr wrap="square" lIns="0" tIns="0" rIns="0" bIns="0" rtlCol="0" anchor="ctr"/>
-          <a:lstStyle/>
-          <a:p>
-            <a:pPr indent="0" marL="0">
-              <a:buNone/>
-            </a:pPr>
-            <a:r>
-              <a:rPr lang="en-US" sz="1250" dirty="0">
-                <a:solidFill>
-                  <a:srgbClr val="4B5550"/>
-                </a:solidFill>
-                <a:latin typeface="Yu Gothic" pitchFamily="34" charset="0"/>
-                <a:ea typeface="Yu Gothic" pitchFamily="34" charset="-122"/>
-                <a:cs typeface="Yu Gothic" pitchFamily="34" charset="-120"/>
-              </a:rPr>
-              <a:t>運営主体はセルフカフェ本部です。カフェ専任のスタッフを置く必要はありません。</a:t>
-            </a:r>
-            <a:endParaRPr lang="en-US" sz="1250" dirty="0"/>
-          </a:p>
-        </p:txBody>
-      </p:sp>
-      <p:pic>
-        <p:nvPicPr>
-          <p:cNvPr id="6" name="Image 0" descr="/home/user/suzuki-ceo/selfcafe-miraiya-deck/assets/logo-green.png">    </p:cNvPr>
-          <p:cNvPicPr>
-            <a:picLocks noChangeAspect="1"/>
-          </p:cNvPicPr>
-          <p:nvPr/>
-        </p:nvPicPr>
-        <p:blipFill>
-          <a:blip r:embed="rId1"/>
-          <a:stretch>
-            <a:fillRect/>
-          </a:stretch>
-        </p:blipFill>
-        <p:spPr>
-          <a:xfrm>
-            <a:off x="9855403" y="482803"/>
-            <a:ext cx="1676095" cy="238658"/>
-          </a:xfrm>
-          <a:prstGeom prst="rect">
-            <a:avLst/>
-          </a:prstGeom>
-        </p:spPr>
-      </p:pic>
-      <p:sp>
-        <p:nvSpPr>
-          <p:cNvPr id="7" name="Text 4"/>
-          <p:cNvSpPr/>
-          <p:nvPr/>
-        </p:nvSpPr>
-        <p:spPr>
-          <a:xfrm>
-            <a:off x="660197" y="6476695"/>
-            <a:ext cx="5080406" cy="152705"/>
-          </a:xfrm>
-          <a:prstGeom prst="rect">
-            <a:avLst/>
-          </a:prstGeom>
-          <a:noFill/>
-          <a:ln/>
-        </p:spPr>
-        <p:txBody>
-          <a:bodyPr wrap="square" lIns="0" tIns="0" rIns="0" bIns="0" rtlCol="0" anchor="ctr"/>
-          <a:lstStyle/>
-          <a:p>
-            <a:pPr indent="0" marL="0">
-              <a:buNone/>
-            </a:pPr>
-            <a:r>
-              <a:rPr lang="en-US" sz="900" dirty="0">
-                <a:solidFill>
-                  <a:srgbClr val="A8B0AA"/>
-                </a:solidFill>
-                <a:latin typeface="Yu Gothic" pitchFamily="34" charset="0"/>
-                <a:ea typeface="Yu Gothic" pitchFamily="34" charset="-122"/>
-                <a:cs typeface="Yu Gothic" pitchFamily="34" charset="-120"/>
-              </a:rPr>
-              <a:t>セルフカフェ × 未来屋書店 業態転換のご提案</a:t>
-            </a:r>
-            <a:endParaRPr lang="en-US" sz="900" dirty="0"/>
-          </a:p>
-        </p:txBody>
-      </p:sp>
-      <p:sp>
-        <p:nvSpPr>
-          <p:cNvPr id="8" name="Text 5"/>
-          <p:cNvSpPr/>
-          <p:nvPr/>
-        </p:nvSpPr>
-        <p:spPr>
-          <a:xfrm>
-            <a:off x="10261397" y="6463894"/>
-            <a:ext cx="1270102" cy="152705"/>
-          </a:xfrm>
-          <a:prstGeom prst="rect">
-            <a:avLst/>
-          </a:prstGeom>
-          <a:noFill/>
-          <a:ln/>
-        </p:spPr>
-        <p:txBody>
-          <a:bodyPr wrap="square" lIns="0" tIns="0" rIns="0" bIns="0" rtlCol="0" anchor="ctr"/>
-          <a:lstStyle/>
-          <a:p>
-            <a:pPr algn="r" indent="0" marL="0">
-              <a:buNone/>
-            </a:pPr>
-            <a:r>
-              <a:rPr lang="en-US" sz="1000" b="1" dirty="0">
-                <a:solidFill>
-                  <a:srgbClr val="7E8882"/>
-                </a:solidFill>
-                <a:latin typeface="Arial" pitchFamily="34" charset="0"/>
-                <a:ea typeface="Arial" pitchFamily="34" charset="-122"/>
-                <a:cs typeface="Arial" pitchFamily="34" charset="-120"/>
-              </a:rPr>
-              <a:t>09</a:t>
-            </a:r>
-            <a:endParaRPr lang="en-US" sz="1000" dirty="0"/>
-          </a:p>
-        </p:txBody>
-      </p:sp>
-      <p:sp>
-        <p:nvSpPr>
-          <p:cNvPr id="9" name="Shape 6"/>
-          <p:cNvSpPr/>
-          <p:nvPr/>
-        </p:nvSpPr>
-        <p:spPr>
-          <a:xfrm>
-            <a:off x="660197" y="1651406"/>
-            <a:ext cx="5943600" cy="749808"/>
-          </a:xfrm>
-          <a:prstGeom prst="roundRect">
-            <a:avLst>
-              <a:gd name="adj" fmla="val 7317"/>
-            </a:avLst>
-          </a:prstGeom>
-          <a:solidFill>
-            <a:srgbClr val="F1F8F3"/>
-          </a:solidFill>
-          <a:ln w="9525">
-            <a:solidFill>
-              <a:srgbClr val="D2E7DA"/>
-            </a:solidFill>
-            <a:prstDash val="solid"/>
-          </a:ln>
-        </p:spPr>
-      </p:sp>
-      <p:sp>
-        <p:nvSpPr>
-          <p:cNvPr id="10" name="Text 7"/>
-          <p:cNvSpPr/>
-          <p:nvPr/>
-        </p:nvSpPr>
-        <p:spPr>
-          <a:xfrm>
-            <a:off x="934517" y="1742846"/>
-            <a:ext cx="5394960" cy="256032"/>
-          </a:xfrm>
-          <a:prstGeom prst="rect">
-            <a:avLst/>
-          </a:prstGeom>
-          <a:noFill/>
-          <a:ln/>
-        </p:spPr>
-        <p:txBody>
-          <a:bodyPr wrap="square" lIns="0" tIns="0" rIns="0" bIns="0" rtlCol="0" anchor="ctr"/>
-          <a:lstStyle/>
-          <a:p>
-            <a:pPr indent="0" marL="0">
-              <a:buNone/>
-            </a:pPr>
-            <a:r>
-              <a:rPr lang="en-US" sz="1200" b="1" dirty="0">
-                <a:solidFill>
-                  <a:srgbClr val="106838"/>
-                </a:solidFill>
-                <a:latin typeface="Yu Gothic" pitchFamily="34" charset="0"/>
-                <a:ea typeface="Yu Gothic" pitchFamily="34" charset="-122"/>
-                <a:cs typeface="Yu Gothic" pitchFamily="34" charset="-120"/>
-              </a:rPr>
-              <a:t>① 店内清掃</a:t>
-            </a:r>
-            <a:endParaRPr lang="en-US" sz="1200" dirty="0"/>
-          </a:p>
-        </p:txBody>
-      </p:sp>
-      <p:sp>
-        <p:nvSpPr>
-          <p:cNvPr id="11" name="Text 8"/>
-          <p:cNvSpPr/>
-          <p:nvPr/>
-        </p:nvSpPr>
-        <p:spPr>
-          <a:xfrm>
-            <a:off x="934517" y="2017166"/>
-            <a:ext cx="5394960" cy="310896"/>
-          </a:xfrm>
-          <a:prstGeom prst="rect">
-            <a:avLst/>
-          </a:prstGeom>
-          <a:noFill/>
-          <a:ln/>
-        </p:spPr>
-        <p:txBody>
-          <a:bodyPr wrap="square" lIns="0" tIns="0" rIns="0" bIns="0" rtlCol="0" anchor="ctr"/>
-          <a:lstStyle/>
-          <a:p>
-            <a:pPr indent="0" marL="0">
-              <a:buNone/>
-            </a:pPr>
-            <a:r>
-              <a:rPr lang="en-US" sz="950" dirty="0">
-                <a:solidFill>
-                  <a:srgbClr val="4B5550"/>
-                </a:solidFill>
-                <a:latin typeface="Yu Gothic" pitchFamily="34" charset="0"/>
-                <a:ea typeface="Yu Gothic" pitchFamily="34" charset="-122"/>
-                <a:cs typeface="Yu Gothic" pitchFamily="34" charset="-120"/>
-              </a:rPr>
-              <a:t>テーブル・床・トイレの清掃、ゴミ回収。営業前後の都合の良い時間で結構です。</a:t>
-            </a:r>
-            <a:endParaRPr lang="en-US" sz="950" dirty="0"/>
-          </a:p>
-        </p:txBody>
-      </p:sp>
-      <p:sp>
-        <p:nvSpPr>
-          <p:cNvPr id="12" name="Shape 9"/>
-          <p:cNvSpPr/>
-          <p:nvPr/>
-        </p:nvSpPr>
-        <p:spPr>
-          <a:xfrm>
-            <a:off x="660197" y="2510942"/>
-            <a:ext cx="5943600" cy="749808"/>
-          </a:xfrm>
-          <a:prstGeom prst="roundRect">
-            <a:avLst>
-              <a:gd name="adj" fmla="val 7317"/>
-            </a:avLst>
-          </a:prstGeom>
-          <a:solidFill>
-            <a:srgbClr val="F1F8F3"/>
-          </a:solidFill>
-          <a:ln w="9525">
-            <a:solidFill>
-              <a:srgbClr val="D2E7DA"/>
-            </a:solidFill>
-            <a:prstDash val="solid"/>
-          </a:ln>
-        </p:spPr>
-      </p:sp>
-      <p:sp>
-        <p:nvSpPr>
-          <p:cNvPr id="13" name="Text 10"/>
-          <p:cNvSpPr/>
-          <p:nvPr/>
-        </p:nvSpPr>
-        <p:spPr>
-          <a:xfrm>
-            <a:off x="934517" y="2602382"/>
-            <a:ext cx="5394960" cy="256032"/>
-          </a:xfrm>
-          <a:prstGeom prst="rect">
-            <a:avLst/>
-          </a:prstGeom>
-          <a:noFill/>
-          <a:ln/>
-        </p:spPr>
-        <p:txBody>
-          <a:bodyPr wrap="square" lIns="0" tIns="0" rIns="0" bIns="0" rtlCol="0" anchor="ctr"/>
-          <a:lstStyle/>
-          <a:p>
-            <a:pPr indent="0" marL="0">
-              <a:buNone/>
-            </a:pPr>
-            <a:r>
-              <a:rPr lang="en-US" sz="1200" b="1" dirty="0">
-                <a:solidFill>
-                  <a:srgbClr val="106838"/>
-                </a:solidFill>
-                <a:latin typeface="Yu Gothic" pitchFamily="34" charset="0"/>
-                <a:ea typeface="Yu Gothic" pitchFamily="34" charset="-122"/>
-                <a:cs typeface="Yu Gothic" pitchFamily="34" charset="-120"/>
-              </a:rPr>
-              <a:t>② 原料・備品の補充</a:t>
-            </a:r>
-            <a:endParaRPr lang="en-US" sz="1200" dirty="0"/>
-          </a:p>
-        </p:txBody>
-      </p:sp>
-      <p:sp>
-        <p:nvSpPr>
-          <p:cNvPr id="14" name="Text 11"/>
-          <p:cNvSpPr/>
-          <p:nvPr/>
-        </p:nvSpPr>
-        <p:spPr>
-          <a:xfrm>
-            <a:off x="934517" y="2876702"/>
-            <a:ext cx="5394960" cy="310896"/>
-          </a:xfrm>
-          <a:prstGeom prst="rect">
-            <a:avLst/>
-          </a:prstGeom>
-          <a:noFill/>
-          <a:ln/>
-        </p:spPr>
-        <p:txBody>
-          <a:bodyPr wrap="square" lIns="0" tIns="0" rIns="0" bIns="0" rtlCol="0" anchor="ctr"/>
-          <a:lstStyle/>
-          <a:p>
-            <a:pPr indent="0" marL="0">
-              <a:buNone/>
-            </a:pPr>
-            <a:r>
-              <a:rPr lang="en-US" sz="950" dirty="0">
-                <a:solidFill>
-                  <a:srgbClr val="4B5550"/>
-                </a:solidFill>
-                <a:latin typeface="Yu Gothic" pitchFamily="34" charset="0"/>
-                <a:ea typeface="Yu Gothic" pitchFamily="34" charset="-122"/>
-                <a:cs typeface="Yu Gothic" pitchFamily="34" charset="-120"/>
-              </a:rPr>
-              <a:t>コーヒー豆・カップ等の補充。在庫は本部から定期配送します。</a:t>
-            </a:r>
-            <a:endParaRPr lang="en-US" sz="950" dirty="0"/>
-          </a:p>
-        </p:txBody>
-      </p:sp>
-      <p:sp>
-        <p:nvSpPr>
-          <p:cNvPr id="15" name="Shape 12"/>
-          <p:cNvSpPr/>
-          <p:nvPr/>
-        </p:nvSpPr>
-        <p:spPr>
-          <a:xfrm>
-            <a:off x="660197" y="3370478"/>
-            <a:ext cx="5943600" cy="749808"/>
-          </a:xfrm>
-          <a:prstGeom prst="roundRect">
-            <a:avLst>
-              <a:gd name="adj" fmla="val 7317"/>
-            </a:avLst>
-          </a:prstGeom>
-          <a:solidFill>
-            <a:srgbClr val="F1F8F3"/>
-          </a:solidFill>
-          <a:ln w="9525">
-            <a:solidFill>
-              <a:srgbClr val="D2E7DA"/>
-            </a:solidFill>
-            <a:prstDash val="solid"/>
-          </a:ln>
-        </p:spPr>
-      </p:sp>
-      <p:sp>
-        <p:nvSpPr>
-          <p:cNvPr id="16" name="Text 13"/>
-          <p:cNvSpPr/>
-          <p:nvPr/>
-        </p:nvSpPr>
-        <p:spPr>
-          <a:xfrm>
-            <a:off x="934517" y="3461918"/>
-            <a:ext cx="5394960" cy="256032"/>
-          </a:xfrm>
-          <a:prstGeom prst="rect">
-            <a:avLst/>
-          </a:prstGeom>
-          <a:noFill/>
-          <a:ln/>
-        </p:spPr>
-        <p:txBody>
-          <a:bodyPr wrap="square" lIns="0" tIns="0" rIns="0" bIns="0" rtlCol="0" anchor="ctr"/>
-          <a:lstStyle/>
-          <a:p>
-            <a:pPr indent="0" marL="0">
-              <a:buNone/>
-            </a:pPr>
-            <a:r>
-              <a:rPr lang="en-US" sz="1200" b="1" dirty="0">
-                <a:solidFill>
-                  <a:srgbClr val="106838"/>
-                </a:solidFill>
-                <a:latin typeface="Yu Gothic" pitchFamily="34" charset="0"/>
-                <a:ea typeface="Yu Gothic" pitchFamily="34" charset="-122"/>
-                <a:cs typeface="Yu Gothic" pitchFamily="34" charset="-120"/>
-              </a:rPr>
-              <a:t>③ 発注・棚卸（月1〜2回）</a:t>
-            </a:r>
-            <a:endParaRPr lang="en-US" sz="1200" dirty="0"/>
-          </a:p>
-        </p:txBody>
-      </p:sp>
-      <p:sp>
-        <p:nvSpPr>
-          <p:cNvPr id="17" name="Text 14"/>
-          <p:cNvSpPr/>
-          <p:nvPr/>
-        </p:nvSpPr>
-        <p:spPr>
-          <a:xfrm>
-            <a:off x="934517" y="3736238"/>
-            <a:ext cx="5394960" cy="310896"/>
-          </a:xfrm>
-          <a:prstGeom prst="rect">
-            <a:avLst/>
-          </a:prstGeom>
-          <a:noFill/>
-          <a:ln/>
-        </p:spPr>
-        <p:txBody>
-          <a:bodyPr wrap="square" lIns="0" tIns="0" rIns="0" bIns="0" rtlCol="0" anchor="ctr"/>
-          <a:lstStyle/>
-          <a:p>
-            <a:pPr indent="0" marL="0">
-              <a:buNone/>
-            </a:pPr>
-            <a:r>
-              <a:rPr lang="en-US" sz="950" dirty="0">
-                <a:solidFill>
-                  <a:srgbClr val="4B5550"/>
-                </a:solidFill>
-                <a:latin typeface="Yu Gothic" pitchFamily="34" charset="0"/>
-                <a:ea typeface="Yu Gothic" pitchFamily="34" charset="-122"/>
-                <a:cs typeface="Yu Gothic" pitchFamily="34" charset="-120"/>
-              </a:rPr>
-              <a:t>定期配送に合わせた発注と在庫の棚卸のみです。</a:t>
-            </a:r>
-            <a:endParaRPr lang="en-US" sz="950" dirty="0"/>
-          </a:p>
-        </p:txBody>
-      </p:sp>
-      <p:sp>
-        <p:nvSpPr>
-          <p:cNvPr id="18" name="Shape 15"/>
-          <p:cNvSpPr/>
-          <p:nvPr/>
-        </p:nvSpPr>
-        <p:spPr>
-          <a:xfrm>
-            <a:off x="660197" y="4303166"/>
-            <a:ext cx="5943600" cy="822960"/>
-          </a:xfrm>
-          <a:prstGeom prst="roundRect">
-            <a:avLst>
-              <a:gd name="adj" fmla="val 6667"/>
-            </a:avLst>
-          </a:prstGeom>
-          <a:solidFill>
-            <a:srgbClr val="0C5230"/>
-          </a:solidFill>
-          <a:ln/>
-        </p:spPr>
-      </p:sp>
-      <p:pic>
-        <p:nvPicPr>
-          <p:cNvPr id="19" name="Image 1" descr="/home/user/suzuki-ceo/selfcafe-miraiya-deck/assets/icons/LuLifeBuoy-pale.png">    </p:cNvPr>
-          <p:cNvPicPr>
-            <a:picLocks noChangeAspect="1"/>
-          </p:cNvPicPr>
-          <p:nvPr/>
-        </p:nvPicPr>
-        <p:blipFill>
-          <a:blip r:embed="rId2"/>
-          <a:stretch>
-            <a:fillRect/>
-          </a:stretch>
-        </p:blipFill>
-        <p:spPr>
-          <a:xfrm>
-            <a:off x="934517" y="4540910"/>
-            <a:ext cx="329184" cy="329184"/>
-          </a:xfrm>
-          <a:prstGeom prst="rect">
-            <a:avLst/>
-          </a:prstGeom>
-        </p:spPr>
-      </p:pic>
-      <p:sp>
-        <p:nvSpPr>
-          <p:cNvPr id="20" name="Text 16"/>
-          <p:cNvSpPr/>
-          <p:nvPr/>
-        </p:nvSpPr>
-        <p:spPr>
-          <a:xfrm>
-            <a:off x="1410005" y="4303166"/>
-            <a:ext cx="4919472" cy="822960"/>
-          </a:xfrm>
-          <a:prstGeom prst="rect">
-            <a:avLst/>
-          </a:prstGeom>
-          <a:noFill/>
-          <a:ln/>
-        </p:spPr>
-        <p:txBody>
-          <a:bodyPr wrap="square" lIns="0" tIns="0" rIns="0" bIns="0" rtlCol="0" anchor="ctr"/>
-          <a:lstStyle/>
-          <a:p>
-            <a:pPr indent="0" marL="0">
-              <a:lnSpc>
-                <a:spcPct val="130000"/>
-              </a:lnSpc>
-              <a:buNone/>
-            </a:pPr>
-            <a:r>
-              <a:rPr lang="en-US" sz="1000" b="1" dirty="0">
-                <a:solidFill>
-                  <a:srgbClr val="FFFFFF"/>
-                </a:solidFill>
-                <a:latin typeface="Yu Gothic" pitchFamily="34" charset="0"/>
-                <a:ea typeface="Yu Gothic" pitchFamily="34" charset="-122"/>
-                <a:cs typeface="Yu Gothic" pitchFamily="34" charset="-120"/>
-              </a:rPr>
-              <a:t>清掃はパートナーへの委託も可能です（月3万円程度）。お客様からのお問い合わせは本部が対応します。</a:t>
-            </a:r>
-            <a:endParaRPr lang="en-US" sz="1000" dirty="0"/>
-          </a:p>
-        </p:txBody>
-      </p:sp>
-      <p:sp>
-        <p:nvSpPr>
-          <p:cNvPr id="21" name="Shape 17"/>
-          <p:cNvSpPr/>
-          <p:nvPr/>
-        </p:nvSpPr>
-        <p:spPr>
-          <a:xfrm>
-            <a:off x="6987845" y="1651406"/>
-            <a:ext cx="4543654" cy="3474720"/>
-          </a:xfrm>
-          <a:prstGeom prst="roundRect">
-            <a:avLst>
-              <a:gd name="adj" fmla="val 1579"/>
-            </a:avLst>
-          </a:prstGeom>
-          <a:solidFill>
-            <a:srgbClr val="FFFFFF"/>
-          </a:solidFill>
-          <a:ln w="9525">
-            <a:solidFill>
-              <a:srgbClr val="EFEAE0"/>
-            </a:solidFill>
-            <a:prstDash val="solid"/>
-          </a:ln>
-        </p:spPr>
-      </p:sp>
-      <p:sp>
-        <p:nvSpPr>
-          <p:cNvPr id="22" name="Text 18"/>
-          <p:cNvSpPr/>
-          <p:nvPr/>
-        </p:nvSpPr>
-        <p:spPr>
-          <a:xfrm>
-            <a:off x="7262165" y="1870862"/>
-            <a:ext cx="2194560" cy="164592"/>
-          </a:xfrm>
-          <a:prstGeom prst="rect">
-            <a:avLst/>
-          </a:prstGeom>
-          <a:noFill/>
-          <a:ln/>
-        </p:spPr>
-        <p:txBody>
-          <a:bodyPr wrap="square" lIns="0" tIns="0" rIns="0" bIns="0" rtlCol="0" anchor="ctr"/>
-          <a:lstStyle/>
-          <a:p>
-            <a:pPr indent="0" marL="0">
-              <a:buNone/>
-            </a:pPr>
-            <a:r>
-              <a:rPr lang="en-US" sz="900" b="1" spc="150" kern="0" dirty="0">
-                <a:solidFill>
-                  <a:srgbClr val="A8761F"/>
-                </a:solidFill>
-                <a:latin typeface="Arial" pitchFamily="34" charset="0"/>
-                <a:ea typeface="Arial" pitchFamily="34" charset="-122"/>
-                <a:cs typeface="Arial" pitchFamily="34" charset="-120"/>
-              </a:rPr>
-              <a:t>CONDITIONS</a:t>
-            </a:r>
-            <a:endParaRPr lang="en-US" sz="900" dirty="0"/>
-          </a:p>
-        </p:txBody>
-      </p:sp>
-      <p:sp>
-        <p:nvSpPr>
-          <p:cNvPr id="23" name="Text 19"/>
-          <p:cNvSpPr/>
-          <p:nvPr/>
-        </p:nvSpPr>
-        <p:spPr>
-          <a:xfrm>
-            <a:off x="7262165" y="2181758"/>
-            <a:ext cx="3995014" cy="219456"/>
-          </a:xfrm>
-          <a:prstGeom prst="rect">
-            <a:avLst/>
-          </a:prstGeom>
-          <a:noFill/>
-          <a:ln/>
-        </p:spPr>
-        <p:txBody>
-          <a:bodyPr wrap="square" lIns="0" tIns="0" rIns="0" bIns="0" rtlCol="0" anchor="ctr"/>
-          <a:lstStyle/>
-          <a:p>
-            <a:pPr indent="0" marL="0">
-              <a:buNone/>
-            </a:pPr>
-            <a:r>
-              <a:rPr lang="en-US" sz="950" dirty="0">
-                <a:solidFill>
-                  <a:srgbClr val="7E8882"/>
-                </a:solidFill>
-                <a:latin typeface="Yu Gothic" pitchFamily="34" charset="0"/>
-                <a:ea typeface="Yu Gothic" pitchFamily="34" charset="-122"/>
-                <a:cs typeface="Yu Gothic" pitchFamily="34" charset="-120"/>
-              </a:rPr>
-              <a:t>初期費用</a:t>
-            </a:r>
-            <a:endParaRPr lang="en-US" sz="950" dirty="0"/>
-          </a:p>
-        </p:txBody>
-      </p:sp>
-      <p:sp>
-        <p:nvSpPr>
-          <p:cNvPr id="24" name="Text 20"/>
-          <p:cNvSpPr/>
-          <p:nvPr/>
-        </p:nvSpPr>
-        <p:spPr>
-          <a:xfrm>
-            <a:off x="7262165" y="2382926"/>
-            <a:ext cx="3995014" cy="274320"/>
-          </a:xfrm>
-          <a:prstGeom prst="rect">
-            <a:avLst/>
-          </a:prstGeom>
-          <a:noFill/>
-          <a:ln/>
-        </p:spPr>
-        <p:txBody>
-          <a:bodyPr wrap="square" lIns="0" tIns="0" rIns="0" bIns="0" rtlCol="0" anchor="ctr"/>
-          <a:lstStyle/>
-          <a:p>
-            <a:pPr indent="0" marL="0">
-              <a:buNone/>
-            </a:pPr>
-            <a:r>
-              <a:rPr lang="en-US" sz="1150" b="1" dirty="0">
-                <a:solidFill>
-                  <a:srgbClr val="0A3D23"/>
-                </a:solidFill>
-                <a:latin typeface="Yu Gothic" pitchFamily="34" charset="0"/>
-                <a:ea typeface="Yu Gothic" pitchFamily="34" charset="-122"/>
-                <a:cs typeface="Yu Gothic" pitchFamily="34" charset="-120"/>
-              </a:rPr>
-              <a:t>30万〜50万円程度（機器設置費のみ）</a:t>
-            </a:r>
-            <a:endParaRPr lang="en-US" sz="1150" dirty="0"/>
-          </a:p>
-        </p:txBody>
-      </p:sp>
-      <p:sp>
-        <p:nvSpPr>
-          <p:cNvPr id="25" name="Shape 21"/>
-          <p:cNvSpPr/>
-          <p:nvPr/>
-        </p:nvSpPr>
-        <p:spPr>
-          <a:xfrm>
-            <a:off x="7262165" y="2675534"/>
-            <a:ext cx="3995014" cy="10058"/>
-          </a:xfrm>
-          <a:prstGeom prst="rect">
-            <a:avLst/>
-          </a:prstGeom>
-          <a:solidFill>
-            <a:srgbClr val="EFEAE0"/>
-          </a:solidFill>
-          <a:ln/>
-        </p:spPr>
-      </p:sp>
-      <p:sp>
-        <p:nvSpPr>
-          <p:cNvPr id="26" name="Text 22"/>
-          <p:cNvSpPr/>
-          <p:nvPr/>
-        </p:nvSpPr>
-        <p:spPr>
-          <a:xfrm>
-            <a:off x="7262165" y="2748686"/>
-            <a:ext cx="3995014" cy="219456"/>
-          </a:xfrm>
-          <a:prstGeom prst="rect">
-            <a:avLst/>
-          </a:prstGeom>
-          <a:noFill/>
-          <a:ln/>
-        </p:spPr>
-        <p:txBody>
-          <a:bodyPr wrap="square" lIns="0" tIns="0" rIns="0" bIns="0" rtlCol="0" anchor="ctr"/>
-          <a:lstStyle/>
-          <a:p>
-            <a:pPr indent="0" marL="0">
-              <a:buNone/>
-            </a:pPr>
-            <a:r>
-              <a:rPr lang="en-US" sz="950" dirty="0">
-                <a:solidFill>
-                  <a:srgbClr val="7E8882"/>
-                </a:solidFill>
-                <a:latin typeface="Yu Gothic" pitchFamily="34" charset="0"/>
-                <a:ea typeface="Yu Gothic" pitchFamily="34" charset="-122"/>
-                <a:cs typeface="Yu Gothic" pitchFamily="34" charset="-120"/>
-              </a:rPr>
-              <a:t>加盟金・研修費</a:t>
-            </a:r>
-            <a:endParaRPr lang="en-US" sz="950" dirty="0"/>
-          </a:p>
-        </p:txBody>
-      </p:sp>
-      <p:sp>
-        <p:nvSpPr>
-          <p:cNvPr id="27" name="Text 23"/>
-          <p:cNvSpPr/>
-          <p:nvPr/>
-        </p:nvSpPr>
-        <p:spPr>
-          <a:xfrm>
-            <a:off x="7262165" y="2949854"/>
-            <a:ext cx="3995014" cy="274320"/>
-          </a:xfrm>
-          <a:prstGeom prst="rect">
-            <a:avLst/>
-          </a:prstGeom>
-          <a:noFill/>
-          <a:ln/>
-        </p:spPr>
-        <p:txBody>
-          <a:bodyPr wrap="square" lIns="0" tIns="0" rIns="0" bIns="0" rtlCol="0" anchor="ctr"/>
-          <a:lstStyle/>
-          <a:p>
-            <a:pPr indent="0" marL="0">
-              <a:buNone/>
-            </a:pPr>
-            <a:r>
-              <a:rPr lang="en-US" sz="1150" b="1" dirty="0">
-                <a:solidFill>
-                  <a:srgbClr val="0A3D23"/>
-                </a:solidFill>
-                <a:latin typeface="Yu Gothic" pitchFamily="34" charset="0"/>
-                <a:ea typeface="Yu Gothic" pitchFamily="34" charset="-122"/>
-                <a:cs typeface="Yu Gothic" pitchFamily="34" charset="-120"/>
-              </a:rPr>
-              <a:t>なし</a:t>
-            </a:r>
-            <a:endParaRPr lang="en-US" sz="1150" dirty="0"/>
-          </a:p>
-        </p:txBody>
-      </p:sp>
-      <p:sp>
-        <p:nvSpPr>
-          <p:cNvPr id="28" name="Shape 24"/>
-          <p:cNvSpPr/>
-          <p:nvPr/>
-        </p:nvSpPr>
-        <p:spPr>
-          <a:xfrm>
-            <a:off x="7262165" y="3242462"/>
-            <a:ext cx="3995014" cy="10058"/>
-          </a:xfrm>
-          <a:prstGeom prst="rect">
-            <a:avLst/>
-          </a:prstGeom>
-          <a:solidFill>
-            <a:srgbClr val="EFEAE0"/>
-          </a:solidFill>
-          <a:ln/>
-        </p:spPr>
-      </p:sp>
-      <p:sp>
-        <p:nvSpPr>
-          <p:cNvPr id="29" name="Text 25"/>
-          <p:cNvSpPr/>
-          <p:nvPr/>
-        </p:nvSpPr>
-        <p:spPr>
-          <a:xfrm>
-            <a:off x="7262165" y="3315614"/>
-            <a:ext cx="3995014" cy="219456"/>
-          </a:xfrm>
-          <a:prstGeom prst="rect">
-            <a:avLst/>
-          </a:prstGeom>
-          <a:noFill/>
-          <a:ln/>
-        </p:spPr>
-        <p:txBody>
-          <a:bodyPr wrap="square" lIns="0" tIns="0" rIns="0" bIns="0" rtlCol="0" anchor="ctr"/>
-          <a:lstStyle/>
-          <a:p>
-            <a:pPr indent="0" marL="0">
-              <a:buNone/>
-            </a:pPr>
-            <a:r>
-              <a:rPr lang="en-US" sz="950" dirty="0">
-                <a:solidFill>
-                  <a:srgbClr val="7E8882"/>
-                </a:solidFill>
-                <a:latin typeface="Yu Gothic" pitchFamily="34" charset="0"/>
-                <a:ea typeface="Yu Gothic" pitchFamily="34" charset="-122"/>
-                <a:cs typeface="Yu Gothic" pitchFamily="34" charset="-120"/>
-              </a:rPr>
-              <a:t>原料・水道光熱費</a:t>
-            </a:r>
-            <a:endParaRPr lang="en-US" sz="950" dirty="0"/>
-          </a:p>
-        </p:txBody>
-      </p:sp>
-      <p:sp>
-        <p:nvSpPr>
-          <p:cNvPr id="30" name="Text 26"/>
-          <p:cNvSpPr/>
-          <p:nvPr/>
-        </p:nvSpPr>
-        <p:spPr>
-          <a:xfrm>
-            <a:off x="7262165" y="3516782"/>
-            <a:ext cx="3995014" cy="274320"/>
-          </a:xfrm>
-          <a:prstGeom prst="rect">
-            <a:avLst/>
-          </a:prstGeom>
-          <a:noFill/>
-          <a:ln/>
-        </p:spPr>
-        <p:txBody>
-          <a:bodyPr wrap="square" lIns="0" tIns="0" rIns="0" bIns="0" rtlCol="0" anchor="ctr"/>
-          <a:lstStyle/>
-          <a:p>
-            <a:pPr indent="0" marL="0">
-              <a:buNone/>
-            </a:pPr>
-            <a:r>
-              <a:rPr lang="en-US" sz="1150" b="1" dirty="0">
-                <a:solidFill>
-                  <a:srgbClr val="0A3D23"/>
-                </a:solidFill>
-                <a:latin typeface="Yu Gothic" pitchFamily="34" charset="0"/>
-                <a:ea typeface="Yu Gothic" pitchFamily="34" charset="-122"/>
-                <a:cs typeface="Yu Gothic" pitchFamily="34" charset="-120"/>
-              </a:rPr>
-              <a:t>本部負担</a:t>
-            </a:r>
-            <a:endParaRPr lang="en-US" sz="1150" dirty="0"/>
-          </a:p>
-        </p:txBody>
-      </p:sp>
-      <p:sp>
-        <p:nvSpPr>
-          <p:cNvPr id="31" name="Shape 27"/>
-          <p:cNvSpPr/>
-          <p:nvPr/>
-        </p:nvSpPr>
-        <p:spPr>
-          <a:xfrm>
-            <a:off x="7262165" y="3809390"/>
-            <a:ext cx="3995014" cy="10058"/>
-          </a:xfrm>
-          <a:prstGeom prst="rect">
-            <a:avLst/>
-          </a:prstGeom>
-          <a:solidFill>
-            <a:srgbClr val="EFEAE0"/>
-          </a:solidFill>
-          <a:ln/>
-        </p:spPr>
-      </p:sp>
-      <p:sp>
-        <p:nvSpPr>
-          <p:cNvPr id="32" name="Text 28"/>
-          <p:cNvSpPr/>
-          <p:nvPr/>
-        </p:nvSpPr>
-        <p:spPr>
-          <a:xfrm>
-            <a:off x="7262165" y="3882542"/>
-            <a:ext cx="3995014" cy="219456"/>
-          </a:xfrm>
-          <a:prstGeom prst="rect">
-            <a:avLst/>
-          </a:prstGeom>
-          <a:noFill/>
-          <a:ln/>
-        </p:spPr>
-        <p:txBody>
-          <a:bodyPr wrap="square" lIns="0" tIns="0" rIns="0" bIns="0" rtlCol="0" anchor="ctr"/>
-          <a:lstStyle/>
-          <a:p>
-            <a:pPr indent="0" marL="0">
-              <a:buNone/>
-            </a:pPr>
-            <a:r>
-              <a:rPr lang="en-US" sz="950" dirty="0">
-                <a:solidFill>
-                  <a:srgbClr val="7E8882"/>
-                </a:solidFill>
-                <a:latin typeface="Yu Gothic" pitchFamily="34" charset="0"/>
-                <a:ea typeface="Yu Gothic" pitchFamily="34" charset="-122"/>
-                <a:cs typeface="Yu Gothic" pitchFamily="34" charset="-120"/>
-              </a:rPr>
-              <a:t>お支払い</a:t>
-            </a:r>
-            <a:endParaRPr lang="en-US" sz="950" dirty="0"/>
-          </a:p>
-        </p:txBody>
-      </p:sp>
-      <p:sp>
-        <p:nvSpPr>
-          <p:cNvPr id="33" name="Text 29"/>
-          <p:cNvSpPr/>
-          <p:nvPr/>
-        </p:nvSpPr>
-        <p:spPr>
-          <a:xfrm>
-            <a:off x="7262165" y="4083710"/>
-            <a:ext cx="3995014" cy="274320"/>
-          </a:xfrm>
-          <a:prstGeom prst="rect">
-            <a:avLst/>
-          </a:prstGeom>
-          <a:noFill/>
-          <a:ln/>
-        </p:spPr>
-        <p:txBody>
-          <a:bodyPr wrap="square" lIns="0" tIns="0" rIns="0" bIns="0" rtlCol="0" anchor="ctr"/>
-          <a:lstStyle/>
-          <a:p>
-            <a:pPr indent="0" marL="0">
-              <a:buNone/>
-            </a:pPr>
-            <a:r>
-              <a:rPr lang="en-US" sz="1150" b="1" dirty="0">
-                <a:solidFill>
-                  <a:srgbClr val="0A3D23"/>
-                </a:solidFill>
-                <a:latin typeface="Yu Gothic" pitchFamily="34" charset="0"/>
-                <a:ea typeface="Yu Gothic" pitchFamily="34" charset="-122"/>
-                <a:cs typeface="Yu Gothic" pitchFamily="34" charset="-120"/>
-              </a:rPr>
-              <a:t>セルフカフェ売上の25％ ＋ 月額5万円</a:t>
-            </a:r>
-            <a:endParaRPr lang="en-US" sz="1150" dirty="0"/>
-          </a:p>
-        </p:txBody>
-      </p:sp>
-      <p:sp>
-        <p:nvSpPr>
-          <p:cNvPr id="34" name="Shape 30"/>
-          <p:cNvSpPr/>
-          <p:nvPr/>
-        </p:nvSpPr>
-        <p:spPr>
-          <a:xfrm>
-            <a:off x="7262165" y="4376318"/>
-            <a:ext cx="3995014" cy="10058"/>
-          </a:xfrm>
-          <a:prstGeom prst="rect">
-            <a:avLst/>
-          </a:prstGeom>
-          <a:solidFill>
-            <a:srgbClr val="EFEAE0"/>
-          </a:solidFill>
-          <a:ln/>
-        </p:spPr>
-      </p:sp>
-      <p:sp>
-        <p:nvSpPr>
-          <p:cNvPr id="35" name="Text 31"/>
-          <p:cNvSpPr/>
-          <p:nvPr/>
-        </p:nvSpPr>
-        <p:spPr>
-          <a:xfrm>
-            <a:off x="7262165" y="4449470"/>
-            <a:ext cx="3995014" cy="219456"/>
-          </a:xfrm>
-          <a:prstGeom prst="rect">
-            <a:avLst/>
-          </a:prstGeom>
-          <a:noFill/>
-          <a:ln/>
-        </p:spPr>
-        <p:txBody>
-          <a:bodyPr wrap="square" lIns="0" tIns="0" rIns="0" bIns="0" rtlCol="0" anchor="ctr"/>
-          <a:lstStyle/>
-          <a:p>
-            <a:pPr indent="0" marL="0">
-              <a:buNone/>
-            </a:pPr>
-            <a:r>
-              <a:rPr lang="en-US" sz="950" dirty="0">
-                <a:solidFill>
-                  <a:srgbClr val="7E8882"/>
-                </a:solidFill>
-                <a:latin typeface="Yu Gothic" pitchFamily="34" charset="0"/>
-                <a:ea typeface="Yu Gothic" pitchFamily="34" charset="-122"/>
-                <a:cs typeface="Yu Gothic" pitchFamily="34" charset="-120"/>
-              </a:rPr>
-              <a:t>契約期間</a:t>
-            </a:r>
-            <a:endParaRPr lang="en-US" sz="950" dirty="0"/>
-          </a:p>
-        </p:txBody>
-      </p:sp>
-      <p:sp>
-        <p:nvSpPr>
-          <p:cNvPr id="36" name="Text 32"/>
-          <p:cNvSpPr/>
-          <p:nvPr/>
-        </p:nvSpPr>
-        <p:spPr>
-          <a:xfrm>
-            <a:off x="7262165" y="4650638"/>
-            <a:ext cx="3995014" cy="274320"/>
-          </a:xfrm>
-          <a:prstGeom prst="rect">
-            <a:avLst/>
-          </a:prstGeom>
-          <a:noFill/>
-          <a:ln/>
-        </p:spPr>
-        <p:txBody>
-          <a:bodyPr wrap="square" lIns="0" tIns="0" rIns="0" bIns="0" rtlCol="0" anchor="ctr"/>
-          <a:lstStyle/>
-          <a:p>
-            <a:pPr indent="0" marL="0">
-              <a:buNone/>
-            </a:pPr>
-            <a:r>
-              <a:rPr lang="en-US" sz="1150" b="1" dirty="0">
-                <a:solidFill>
-                  <a:srgbClr val="0A3D23"/>
-                </a:solidFill>
-                <a:latin typeface="Yu Gothic" pitchFamily="34" charset="0"/>
-                <a:ea typeface="Yu Gothic" pitchFamily="34" charset="-122"/>
-                <a:cs typeface="Yu Gothic" pitchFamily="34" charset="-120"/>
-              </a:rPr>
-              <a:t>最低3年〜（本部審査あり）</a:t>
-            </a:r>
-            <a:endParaRPr lang="en-US" sz="1150" dirty="0"/>
-          </a:p>
-        </p:txBody>
-      </p:sp>
-      <p:pic>
-        <p:nvPicPr>
-          <p:cNvPr id="37" name="Image 2" descr="/home/user/suzuki-ceo/selfcafe-miraiya-deck/assets/photos/.crops/p24-install-1189x96.jpg">    </p:cNvPr>
-          <p:cNvPicPr>
-            <a:picLocks noChangeAspect="1"/>
-          </p:cNvPicPr>
-          <p:nvPr/>
-        </p:nvPicPr>
-        <p:blipFill>
-          <a:blip r:embed="rId3"/>
-          <a:stretch>
-            <a:fillRect/>
-          </a:stretch>
-        </p:blipFill>
-        <p:spPr>
-          <a:xfrm>
-            <a:off x="660197" y="5272430"/>
-            <a:ext cx="10871302" cy="877824"/>
-          </a:xfrm>
-          <a:prstGeom prst="rect">
-            <a:avLst/>
-          </a:prstGeom>
-        </p:spPr>
-      </p:pic>
-      <p:sp>
-        <p:nvSpPr>
-          <p:cNvPr id="38" name="Shape 33"/>
-          <p:cNvSpPr/>
-          <p:nvPr/>
-        </p:nvSpPr>
-        <p:spPr>
-          <a:xfrm>
-            <a:off x="660197" y="5272430"/>
-            <a:ext cx="10871302" cy="877824"/>
-          </a:xfrm>
-          <a:prstGeom prst="rect">
-            <a:avLst/>
-          </a:prstGeom>
-          <a:ln w="12700">
-            <a:solidFill>
-              <a:srgbClr val="D8D2C6"/>
-            </a:solidFill>
-            <a:prstDash val="solid"/>
-          </a:ln>
-        </p:spPr>
-      </p:sp>
-      <p:sp>
-        <p:nvSpPr>
-          <p:cNvPr id="39" name="Text 34"/>
-          <p:cNvSpPr/>
-          <p:nvPr/>
-        </p:nvSpPr>
-        <p:spPr>
-          <a:xfrm>
-            <a:off x="660197" y="6345936"/>
-            <a:ext cx="10871302" cy="182880"/>
-          </a:xfrm>
-          <a:prstGeom prst="rect">
-            <a:avLst/>
-          </a:prstGeom>
-          <a:noFill/>
-          <a:ln/>
-        </p:spPr>
-        <p:txBody>
-          <a:bodyPr wrap="square" lIns="0" tIns="0" rIns="0" bIns="0" rtlCol="0" anchor="ctr"/>
-          <a:lstStyle/>
-          <a:p>
-            <a:pPr indent="0" marL="0">
-              <a:buNone/>
-            </a:pPr>
-            <a:r>
-              <a:rPr lang="en-US" sz="850" dirty="0">
-                <a:solidFill>
-                  <a:srgbClr val="A8B0AA"/>
-                </a:solidFill>
-                <a:latin typeface="Yu Gothic" pitchFamily="34" charset="0"/>
-                <a:ea typeface="Yu Gothic" pitchFamily="34" charset="-122"/>
-                <a:cs typeface="Yu Gothic" pitchFamily="34" charset="-120"/>
-              </a:rPr>
-              <a:t>※ 既存什器の再利用可否・工事範囲は現地確認のうえ個別にご相談させてください。金額は税抜・目安です。</a:t>
-            </a:r>
-            <a:endParaRPr lang="en-US" sz="850" dirty="0"/>
-          </a:p>
-        </p:txBody>
-      </p:sp>
-    </p:spTree>
-  </p:cSld>
-  <p:clrMapOvr>
-    <a:masterClrMapping/>
-  </p:clrMapOvr>
-</p:sld>
-</file>
-
 <file path=ppt/theme/theme1.xml><?xml version="1.0" encoding="utf-8"?>
 <a:theme xmlns:a="http://schemas.openxmlformats.org/drawingml/2006/main" name="Office Theme">
   <a:themeElements>

--- a/selfcafe-miraiya-deck/selfcafe-miraiya-deck.pptx
+++ b/selfcafe-miraiya-deck/selfcafe-miraiya-deck.pptx
@@ -2147,7 +2147,7 @@
                 <a:ea typeface="Arial" pitchFamily="34" charset="-122"/>
                 <a:cs typeface="Arial" pitchFamily="34" charset="-120"/>
               </a:rPr>
-              <a:t>27.0</a:t>
+              <a:t>31.8</a:t>
             </a:r>
             <a:r>
               <a:rPr lang="en-US" sz="1200" b="1" dirty="0">
@@ -2236,7 +2236,7 @@
                 <a:ea typeface="Arial" pitchFamily="34" charset="-122"/>
                 <a:cs typeface="Arial" pitchFamily="34" charset="-120"/>
               </a:rPr>
-              <a:t>23.9</a:t>
+              <a:t>28.6</a:t>
             </a:r>
             <a:r>
               <a:rPr lang="en-US" sz="1200" b="1" dirty="0">
@@ -5901,7 +5901,7 @@
                 <a:ea typeface="Arial" pitchFamily="34" charset="-122"/>
                 <a:cs typeface="Arial" pitchFamily="34" charset="-120"/>
               </a:rPr>
-              <a:t>27.0</a:t>
+              <a:t>31.8</a:t>
             </a:r>
             <a:r>
               <a:rPr lang="en-US" sz="1500" b="1" dirty="0">
@@ -5954,7 +5954,7 @@
                 <a:ea typeface="Yu Gothic" pitchFamily="34" charset="-122"/>
                 <a:cs typeface="Yu Gothic" pitchFamily="34" charset="-120"/>
               </a:rPr>
-              <a:t>年間 324.6万円</a:t>
+              <a:t>年間 381.3万円</a:t>
             </a:r>
             <a:endParaRPr lang="en-US" sz="1050" dirty="0"/>
           </a:p>
@@ -6252,7 +6252,7 @@
                 <a:ea typeface="Arial" pitchFamily="34" charset="-122"/>
                 <a:cs typeface="Arial" pitchFamily="34" charset="-120"/>
               </a:rPr>
-              <a:t>23.9</a:t>
+              <a:t>28.6</a:t>
             </a:r>
             <a:r>
               <a:rPr lang="en-US" sz="1500" b="1" dirty="0">
@@ -6305,7 +6305,7 @@
                 <a:ea typeface="Yu Gothic" pitchFamily="34" charset="-122"/>
                 <a:cs typeface="Yu Gothic" pitchFamily="34" charset="-120"/>
               </a:rPr>
-              <a:t>年間 286.8万円</a:t>
+              <a:t>年間 343.5万円</a:t>
             </a:r>
             <a:endParaRPr lang="en-US" sz="1050" dirty="0"/>
           </a:p>
@@ -11422,7 +11422,7 @@
                 <a:ea typeface="Yu Gothic" pitchFamily="34" charset="-122"/>
                 <a:cs typeface="Yu Gothic" pitchFamily="34" charset="-120"/>
               </a:rPr>
-              <a:t>商業施設内・映画館隣接という条件を踏まえ、実績平均の1.5倍程度を想定しました。</a:t>
+              <a:t>商業施設内・映画館隣接・館内の通行量を踏まえ、実績平均の約1.9倍を想定しました。</a:t>
             </a:r>
             <a:endParaRPr lang="en-US" sz="1250" dirty="0"/>
           </a:p>
@@ -11844,7 +11844,7 @@
         <p:spPr>
           <a:xfrm>
             <a:off x="3129077" y="3306470"/>
-            <a:ext cx="1941342" cy="219456"/>
+            <a:ext cx="2426677" cy="219456"/>
           </a:xfrm>
           <a:prstGeom prst="roundRect">
             <a:avLst>
@@ -11865,7 +11865,7 @@
         </p:nvSpPr>
         <p:spPr>
           <a:xfrm>
-            <a:off x="5161858" y="3260750"/>
+            <a:off x="5647194" y="3260750"/>
             <a:ext cx="914400" cy="310896"/>
           </a:xfrm>
           <a:prstGeom prst="rect">
@@ -11890,7 +11890,7 @@
                 <a:ea typeface="Yu Gothic" pitchFamily="34" charset="-122"/>
                 <a:cs typeface="Yu Gothic" pitchFamily="34" charset="-120"/>
               </a:rPr>
-              <a:t>60 杯</a:t>
+              <a:t>75 杯</a:t>
             </a:r>
             <a:endParaRPr lang="en-US" sz="1000" dirty="0"/>
           </a:p>
@@ -11944,7 +11944,7 @@
         <p:spPr>
           <a:xfrm>
             <a:off x="3129077" y="3809390"/>
-            <a:ext cx="2264898" cy="219456"/>
+            <a:ext cx="2750234" cy="219456"/>
           </a:xfrm>
           <a:prstGeom prst="roundRect">
             <a:avLst>
@@ -11965,7 +11965,7 @@
         </p:nvSpPr>
         <p:spPr>
           <a:xfrm>
-            <a:off x="5485415" y="3763670"/>
+            <a:off x="5970751" y="3763670"/>
             <a:ext cx="914400" cy="310896"/>
           </a:xfrm>
           <a:prstGeom prst="rect">
@@ -11990,7 +11990,7 @@
                 <a:ea typeface="Yu Gothic" pitchFamily="34" charset="-122"/>
                 <a:cs typeface="Yu Gothic" pitchFamily="34" charset="-120"/>
               </a:rPr>
-              <a:t>70 杯</a:t>
+              <a:t>85 杯</a:t>
             </a:r>
             <a:endParaRPr lang="en-US" sz="1000" dirty="0"/>
           </a:p>
@@ -12393,7 +12393,7 @@
                 <a:ea typeface="Yu Gothic" pitchFamily="34" charset="-122"/>
                 <a:cs typeface="Yu Gothic" pitchFamily="34" charset="-120"/>
               </a:rPr>
-              <a:t>館内の通行量・映画館隣接を踏まえ 約1.5倍</a:t>
+              <a:t>館内の通行量・映画館隣接を踏まえ 約1.9倍</a:t>
             </a:r>
             <a:endParaRPr lang="en-US" sz="950" dirty="0"/>
           </a:p>
@@ -12525,7 +12525,7 @@
                 <a:ea typeface="Yu Gothic" pitchFamily="34" charset="-122"/>
                 <a:cs typeface="Yu Gothic" pitchFamily="34" charset="-120"/>
               </a:rPr>
-              <a:t>秋田73席＝70杯／土浦59席＝60杯</a:t>
+              <a:t>秋田73席＝85杯／土浦59席＝75杯</a:t>
             </a:r>
             <a:endParaRPr lang="en-US" sz="950" dirty="0"/>
           </a:p>
@@ -12657,7 +12657,7 @@
                 <a:ea typeface="Yu Gothic" pitchFamily="34" charset="-122"/>
                 <a:cs typeface="Yu Gothic" pitchFamily="34" charset="-120"/>
               </a:rPr>
-              <a:t>ささしまライブ店の実績の約半分の水準</a:t>
+              <a:t>ささしまライブ店の実績の6〜7割の水準</a:t>
             </a:r>
             <a:endParaRPr lang="en-US" sz="950" dirty="0"/>
           </a:p>
@@ -12718,7 +12718,7 @@
                 <a:ea typeface="Yu Gothic" pitchFamily="34" charset="-122"/>
                 <a:cs typeface="Yu Gothic" pitchFamily="34" charset="-120"/>
               </a:rPr>
-              <a:t>来客に対する購入率でみると、秋田店は約56％・土浦店は約45％。</a:t>
+              <a:t>来客に対する購入率でみると、秋田店は約68％・土浦店は約56％。</a:t>
             </a:r>
             <a:r>
               <a:rPr lang="en-US" sz="1100" dirty="0">
@@ -12729,7 +12729,7 @@
                 <a:ea typeface="Yu Gothic" pitchFamily="34" charset="-122"/>
                 <a:cs typeface="Yu Gothic" pitchFamily="34" charset="-120"/>
               </a:rPr>
-              <a:t>  ご来店のおよそ半数が1杯ご購入いただく水準です。</a:t>
+              <a:t>  ご来店の半数以上が1杯ご購入いただく水準です。</a:t>
             </a:r>
             <a:endParaRPr lang="en-US" sz="1150" dirty="0"/>
           </a:p>
@@ -12948,7 +12948,7 @@
                 <a:ea typeface="Yu Gothic" pitchFamily="34" charset="-122"/>
                 <a:cs typeface="Yu Gothic" pitchFamily="34" charset="-120"/>
               </a:rPr>
-              <a:t>62.97坪／73席／想定 1日70杯・1杯420円（税抜）で試算しています。</a:t>
+              <a:t>62.97坪／73席／想定 1日85杯・1杯420円（税抜）で試算しています。</a:t>
             </a:r>
             <a:endParaRPr lang="en-US" sz="1250" dirty="0"/>
           </a:p>
@@ -13306,7 +13306,7 @@
                           <a:ea typeface="Arial" pitchFamily="34" charset="-122"/>
                           <a:cs typeface="Arial" pitchFamily="34" charset="-120"/>
                         </a:rPr>
-                        <a:t>70杯</a:t>
+                        <a:t>85杯</a:t>
                       </a:r>
                       <a:endParaRPr lang="en-US" sz="1150" dirty="0">
                         <a:latin typeface="Arial" charset="0"/>
@@ -13444,7 +13444,7 @@
                           <a:ea typeface="Arial" pitchFamily="34" charset="-122"/>
                           <a:cs typeface="Arial" pitchFamily="34" charset="-120"/>
                         </a:rPr>
-                        <a:t>2,100杯</a:t>
+                        <a:t>2,550杯</a:t>
                       </a:r>
                       <a:endParaRPr lang="en-US" sz="1150" dirty="0">
                         <a:latin typeface="Arial" charset="0"/>
@@ -13582,7 +13582,7 @@
                           <a:ea typeface="Arial" pitchFamily="34" charset="-122"/>
                           <a:cs typeface="Arial" pitchFamily="34" charset="-120"/>
                         </a:rPr>
-                        <a:t>882,000</a:t>
+                        <a:t>1,071,000</a:t>
                       </a:r>
                       <a:endParaRPr lang="en-US" sz="1300" dirty="0">
                         <a:latin typeface="Arial" charset="0"/>
@@ -13720,7 +13720,7 @@
                           <a:ea typeface="Arial" pitchFamily="34" charset="-122"/>
                           <a:cs typeface="Arial" pitchFamily="34" charset="-120"/>
                         </a:rPr>
-                        <a:t>220,500</a:t>
+                        <a:t>267,750</a:t>
                       </a:r>
                       <a:endParaRPr lang="en-US" sz="1150" dirty="0">
                         <a:latin typeface="Arial" charset="0"/>
@@ -13996,7 +13996,7 @@
                           <a:ea typeface="Arial" pitchFamily="34" charset="-122"/>
                           <a:cs typeface="Arial" pitchFamily="34" charset="-120"/>
                         </a:rPr>
-                        <a:t>270,500</a:t>
+                        <a:t>317,750</a:t>
                       </a:r>
                       <a:endParaRPr lang="en-US" sz="1700" dirty="0">
                         <a:latin typeface="Arial" charset="0"/>
@@ -14134,7 +14134,7 @@
                           <a:ea typeface="Arial" pitchFamily="34" charset="-122"/>
                           <a:cs typeface="Arial" pitchFamily="34" charset="-120"/>
                         </a:rPr>
-                        <a:t>3,246,000</a:t>
+                        <a:t>3,813,000</a:t>
                       </a:r>
                       <a:endParaRPr lang="en-US" sz="1150" dirty="0">
                         <a:latin typeface="Arial" charset="0"/>
@@ -14334,7 +14334,7 @@
                 <a:ea typeface="Arial" pitchFamily="34" charset="-122"/>
                 <a:cs typeface="Arial" pitchFamily="34" charset="-120"/>
               </a:rPr>
-              <a:t>27.0</a:t>
+              <a:t>31.8</a:t>
             </a:r>
             <a:r>
               <a:rPr lang="en-US" sz="1400" b="1" dirty="0">
@@ -14404,7 +14404,7 @@
                 <a:ea typeface="Yu Gothic" pitchFamily="34" charset="-122"/>
                 <a:cs typeface="Yu Gothic" pitchFamily="34" charset="-120"/>
               </a:rPr>
-              <a:t>年 324.6 万円</a:t>
+              <a:t>年 381.3 万円</a:t>
             </a:r>
             <a:endParaRPr lang="en-US" sz="1400" dirty="0"/>
           </a:p>
@@ -14596,7 +14596,7 @@
                 <a:ea typeface="Yu Gothic" pitchFamily="34" charset="-122"/>
                 <a:cs typeface="Yu Gothic" pitchFamily="34" charset="-120"/>
               </a:rPr>
-              <a:t>うち約56％が1杯ご購入</a:t>
+              <a:t>うち約68％が1杯ご購入</a:t>
             </a:r>
             <a:endParaRPr lang="en-US" sz="950" dirty="0"/>
           </a:p>
@@ -14659,7 +14659,7 @@
                 <a:ea typeface="Yu Gothic" pitchFamily="34" charset="-122"/>
                 <a:cs typeface="Yu Gothic" pitchFamily="34" charset="-120"/>
               </a:rPr>
-              <a:t>書店併設2店の実績の約1.5倍</a:t>
+              <a:t>書店併設2店の実績の約1.9倍</a:t>
             </a:r>
             <a:endParaRPr lang="en-US" sz="950" dirty="0"/>
           </a:p>
@@ -14941,7 +14941,7 @@
                 <a:ea typeface="Yu Gothic" pitchFamily="34" charset="-122"/>
                 <a:cs typeface="Yu Gothic" pitchFamily="34" charset="-120"/>
               </a:rPr>
-              <a:t>30坪／59席／想定 1日60杯・1杯420円（税抜）で試算しています。</a:t>
+              <a:t>30坪／59席／想定 1日75杯・1杯420円（税抜）で試算しています。</a:t>
             </a:r>
             <a:endParaRPr lang="en-US" sz="1250" dirty="0"/>
           </a:p>
@@ -15299,7 +15299,7 @@
                           <a:ea typeface="Arial" pitchFamily="34" charset="-122"/>
                           <a:cs typeface="Arial" pitchFamily="34" charset="-120"/>
                         </a:rPr>
-                        <a:t>60杯</a:t>
+                        <a:t>75杯</a:t>
                       </a:r>
                       <a:endParaRPr lang="en-US" sz="1150" dirty="0">
                         <a:latin typeface="Arial" charset="0"/>
@@ -15437,7 +15437,7 @@
                           <a:ea typeface="Arial" pitchFamily="34" charset="-122"/>
                           <a:cs typeface="Arial" pitchFamily="34" charset="-120"/>
                         </a:rPr>
-                        <a:t>1,800杯</a:t>
+                        <a:t>2,250杯</a:t>
                       </a:r>
                       <a:endParaRPr lang="en-US" sz="1150" dirty="0">
                         <a:latin typeface="Arial" charset="0"/>
@@ -15575,7 +15575,7 @@
                           <a:ea typeface="Arial" pitchFamily="34" charset="-122"/>
                           <a:cs typeface="Arial" pitchFamily="34" charset="-120"/>
                         </a:rPr>
-                        <a:t>756,000</a:t>
+                        <a:t>945,000</a:t>
                       </a:r>
                       <a:endParaRPr lang="en-US" sz="1300" dirty="0">
                         <a:latin typeface="Arial" charset="0"/>
@@ -15713,7 +15713,7 @@
                           <a:ea typeface="Arial" pitchFamily="34" charset="-122"/>
                           <a:cs typeface="Arial" pitchFamily="34" charset="-120"/>
                         </a:rPr>
-                        <a:t>189,000</a:t>
+                        <a:t>236,250</a:t>
                       </a:r>
                       <a:endParaRPr lang="en-US" sz="1150" dirty="0">
                         <a:latin typeface="Arial" charset="0"/>
@@ -15989,7 +15989,7 @@
                           <a:ea typeface="Arial" pitchFamily="34" charset="-122"/>
                           <a:cs typeface="Arial" pitchFamily="34" charset="-120"/>
                         </a:rPr>
-                        <a:t>239,000</a:t>
+                        <a:t>286,250</a:t>
                       </a:r>
                       <a:endParaRPr lang="en-US" sz="1700" dirty="0">
                         <a:latin typeface="Arial" charset="0"/>
@@ -16127,7 +16127,7 @@
                           <a:ea typeface="Arial" pitchFamily="34" charset="-122"/>
                           <a:cs typeface="Arial" pitchFamily="34" charset="-120"/>
                         </a:rPr>
-                        <a:t>2,868,000</a:t>
+                        <a:t>3,435,000</a:t>
                       </a:r>
                       <a:endParaRPr lang="en-US" sz="1150" dirty="0">
                         <a:latin typeface="Arial" charset="0"/>
@@ -16327,7 +16327,7 @@
                 <a:ea typeface="Arial" pitchFamily="34" charset="-122"/>
                 <a:cs typeface="Arial" pitchFamily="34" charset="-120"/>
               </a:rPr>
-              <a:t>23.9</a:t>
+              <a:t>28.6</a:t>
             </a:r>
             <a:r>
               <a:rPr lang="en-US" sz="1400" b="1" dirty="0">
@@ -16397,7 +16397,7 @@
                 <a:ea typeface="Yu Gothic" pitchFamily="34" charset="-122"/>
                 <a:cs typeface="Yu Gothic" pitchFamily="34" charset="-120"/>
               </a:rPr>
-              <a:t>年 286.8 万円</a:t>
+              <a:t>年 343.5 万円</a:t>
             </a:r>
             <a:endParaRPr lang="en-US" sz="1400" dirty="0"/>
           </a:p>
@@ -16589,7 +16589,7 @@
                 <a:ea typeface="Yu Gothic" pitchFamily="34" charset="-122"/>
                 <a:cs typeface="Yu Gothic" pitchFamily="34" charset="-120"/>
               </a:rPr>
-              <a:t>うち約45％が1杯ご購入</a:t>
+              <a:t>うち約56％が1杯ご購入</a:t>
             </a:r>
             <a:endParaRPr lang="en-US" sz="950" dirty="0"/>
           </a:p>
@@ -16652,7 +16652,7 @@
                 <a:ea typeface="Yu Gothic" pitchFamily="34" charset="-122"/>
                 <a:cs typeface="Yu Gothic" pitchFamily="34" charset="-120"/>
               </a:rPr>
-              <a:t>書店併設2店の実績の約1.5倍</a:t>
+              <a:t>書店併設2店の実績の約1.9倍</a:t>
             </a:r>
             <a:endParaRPr lang="en-US" sz="950" dirty="0"/>
           </a:p>

--- a/selfcafe-miraiya-deck/selfcafe-miraiya-deck.pptx
+++ b/selfcafe-miraiya-deck/selfcafe-miraiya-deck.pptx
@@ -9656,7 +9656,7 @@
       </p:sp>
       <p:pic>
         <p:nvPicPr>
-          <p:cNvPr id="19" name="Image 2" descr="/home/user/suzuki-ceo/selfcafe-miraiya-deck/assets/photos/.crops/store-shinmoriyama-328x172.jpg">    </p:cNvPr>
+          <p:cNvPr id="19" name="Image 2" descr="/home/user/suzuki-ceo/selfcafe-miraiya-deck/assets/photos/.crops/shinmoriyama-hall-328x172.jpg">    </p:cNvPr>
           <p:cNvPicPr>
             <a:picLocks noChangeAspect="1"/>
           </p:cNvPicPr>
